--- a/GymVision_Historico_Projeto.pptx
+++ b/GymVision_Historico_Projeto.pptx
@@ -21,6 +21,8 @@
     <p:sldId id="269" r:id="rId20"/>
     <p:sldId id="270" r:id="rId21"/>
     <p:sldId id="271" r:id="rId22"/>
+    <p:sldId id="272" r:id="rId23"/>
+    <p:sldId id="273" r:id="rId24"/>
   </p:sldIdLst>
   <p:sldSz cx="12191695" cy="6858000" type="screen4x3"/>
   <p:notesSz cx="6858000" cy="9144000"/>
@@ -3228,7 +3230,7 @@
                 </a:solidFill>
                 <a:latin typeface="Calibri"/>
               </a:rPr>
-              <a:t>Da primeira versão ao CI/CD — histórico completo do desenvolvimento</a:t>
+              <a:t>Histórico completo do projeto, organizado por Sprints — do Sprint 0 ao CI/CD</a:t>
             </a:r>
           </a:p>
         </p:txBody>
@@ -3396,7 +3398,7 @@
             <a:avLst/>
           </a:prstGeom>
           <a:solidFill>
-            <a:srgbClr val="00D4AA"/>
+            <a:srgbClr val="F59E0B"/>
           </a:solidFill>
           <a:ln>
             <a:noFill/>
@@ -3434,7 +3436,7 @@
         <p:spPr>
           <a:xfrm>
             <a:off x="548640" y="320040"/>
-            <a:ext cx="7315200" cy="365760"/>
+            <a:ext cx="8229600" cy="365760"/>
           </a:xfrm>
           <a:prstGeom prst="rect">
             <a:avLst/>
@@ -3455,11 +3457,11 @@
             <a:r>
               <a:rPr sz="1400" b="1" i="0">
                 <a:solidFill>
-                  <a:srgbClr val="00D4AA"/>
-                </a:solidFill>
-                <a:latin typeface="Calibri"/>
-              </a:rPr>
-              <a:t>FASE 5 · DECISÃO</a:t>
+                  <a:srgbClr val="F59E0B"/>
+                </a:solidFill>
+                <a:latin typeface="Calibri"/>
+              </a:rPr>
+              <a:t>SPRINT 1 · HARDENING</a:t>
             </a:r>
           </a:p>
         </p:txBody>
@@ -3498,7 +3500,7 @@
                 </a:solidFill>
                 <a:latin typeface="Calibri"/>
               </a:rPr>
-              <a:t>Reversão do motor de IA para o motor de regras</a:t>
+              <a:t>Decisão: reverter o motor de IA para regras</a:t>
             </a:r>
           </a:p>
         </p:txBody>
@@ -3550,14 +3552,14 @@
         </p:nvSpPr>
         <p:spPr>
           <a:xfrm>
-            <a:off x="10180015" y="365760"/>
-            <a:ext cx="1554480" cy="411480"/>
+            <a:off x="10088575" y="365760"/>
+            <a:ext cx="1645920" cy="411480"/>
           </a:xfrm>
           <a:prstGeom prst="roundRect">
             <a:avLst/>
           </a:prstGeom>
           <a:solidFill>
-            <a:srgbClr val="008F73"/>
+            <a:srgbClr val="F59E0B"/>
           </a:solidFill>
           <a:ln>
             <a:noFill/>
@@ -3579,7 +3581,7 @@
           </a:fontRef>
         </p:style>
         <p:txBody>
-          <a:bodyPr rtlCol="0" anchor="ctr" wrap="none" lIns="50800" rIns="50800"/>
+          <a:bodyPr rtlCol="0" anchor="ctr"/>
           <a:lstStyle/>
           <a:p>
             <a:pPr algn="ctr"/>
@@ -3748,25 +3750,6 @@
                 <a:latin typeface="Calibri"/>
               </a:rPr>
               <a:t>•  Conclusão do usuário: a IA nunca superaria as regras nesse desenho — não vale a complexidade adicional</a:t>
-            </a:r>
-          </a:p>
-          <a:p>
-            <a:pPr>
-              <a:lnSpc>
-                <a:spcPct val="112000"/>
-              </a:lnSpc>
-              <a:spcAft>
-                <a:spcPts val="800"/>
-              </a:spcAft>
-            </a:pPr>
-            <a:r>
-              <a:rPr sz="1600">
-                <a:solidFill>
-                  <a:srgbClr val="FFFFFF"/>
-                </a:solidFill>
-                <a:latin typeface="Calibri"/>
-              </a:rPr>
-              <a:t>•  Hybrid (regras como piso + IA como refinamento) também descartado: complicação desnecessária</a:t>
             </a:r>
           </a:p>
           <a:p>
@@ -3875,7 +3858,7 @@
             <a:avLst/>
           </a:prstGeom>
           <a:solidFill>
-            <a:srgbClr val="00D4AA"/>
+            <a:srgbClr val="F59E0B"/>
           </a:solidFill>
           <a:ln>
             <a:noFill/>
@@ -3913,7 +3896,7 @@
         <p:spPr>
           <a:xfrm>
             <a:off x="548640" y="320040"/>
-            <a:ext cx="7315200" cy="365760"/>
+            <a:ext cx="8229600" cy="365760"/>
           </a:xfrm>
           <a:prstGeom prst="rect">
             <a:avLst/>
@@ -3934,11 +3917,11 @@
             <a:r>
               <a:rPr sz="1400" b="1" i="0">
                 <a:solidFill>
-                  <a:srgbClr val="00D4AA"/>
-                </a:solidFill>
-                <a:latin typeface="Calibri"/>
-              </a:rPr>
-              <a:t>FASE 6 · HARDENING</a:t>
+                  <a:srgbClr val="F59E0B"/>
+                </a:solidFill>
+                <a:latin typeface="Calibri"/>
+              </a:rPr>
+              <a:t>SPRINT 1 · HARDENING</a:t>
             </a:r>
           </a:p>
         </p:txBody>
@@ -4029,14 +4012,14 @@
         </p:nvSpPr>
         <p:spPr>
           <a:xfrm>
-            <a:off x="10180015" y="365760"/>
-            <a:ext cx="1554480" cy="411480"/>
+            <a:off x="10088575" y="365760"/>
+            <a:ext cx="1645920" cy="411480"/>
           </a:xfrm>
           <a:prstGeom prst="roundRect">
             <a:avLst/>
           </a:prstGeom>
           <a:solidFill>
-            <a:srgbClr val="008F73"/>
+            <a:srgbClr val="F59E0B"/>
           </a:solidFill>
           <a:ln>
             <a:noFill/>
@@ -4058,7 +4041,7 @@
           </a:fontRef>
         </p:style>
         <p:txBody>
-          <a:bodyPr rtlCol="0" anchor="ctr" wrap="none" lIns="50800" rIns="50800"/>
+          <a:bodyPr rtlCol="0" anchor="ctr"/>
           <a:lstStyle/>
           <a:p>
             <a:pPr algn="ctr"/>
@@ -4238,7 +4221,7 @@
             <a:avLst/>
           </a:prstGeom>
           <a:solidFill>
-            <a:srgbClr val="00D4AA"/>
+            <a:srgbClr val="F59E0B"/>
           </a:solidFill>
           <a:ln>
             <a:noFill/>
@@ -4276,7 +4259,7 @@
         <p:spPr>
           <a:xfrm>
             <a:off x="548640" y="320040"/>
-            <a:ext cx="7315200" cy="365760"/>
+            <a:ext cx="8229600" cy="365760"/>
           </a:xfrm>
           <a:prstGeom prst="rect">
             <a:avLst/>
@@ -4297,11 +4280,11 @@
             <a:r>
               <a:rPr sz="1400" b="1" i="0">
                 <a:solidFill>
-                  <a:srgbClr val="00D4AA"/>
-                </a:solidFill>
-                <a:latin typeface="Calibri"/>
-              </a:rPr>
-              <a:t>FASE 7 · CI/CD</a:t>
+                  <a:srgbClr val="F59E0B"/>
+                </a:solidFill>
+                <a:latin typeface="Calibri"/>
+              </a:rPr>
+              <a:t>SPRINT 1 · HARDENING</a:t>
             </a:r>
           </a:p>
         </p:txBody>
@@ -4340,7 +4323,7 @@
                 </a:solidFill>
                 <a:latin typeface="Calibri"/>
               </a:rPr>
-              <a:t>Pipeline GitHub Actions</a:t>
+              <a:t>Pipeline CI/CD (GitHub Actions)</a:t>
             </a:r>
           </a:p>
         </p:txBody>
@@ -4615,7 +4598,7 @@
                 </a:solidFill>
                 <a:latin typeface="Calibri"/>
               </a:rPr>
-              <a:t>•  build-and-push: builda e publica imagem de cada serviço (depois que os testes/builds passam)</a:t>
+              <a:t>•  build-and-push: builda e publica imagem de cada serviço</a:t>
             </a:r>
           </a:p>
           <a:p>
@@ -4762,7 +4745,7 @@
             <a:avLst/>
           </a:prstGeom>
           <a:solidFill>
-            <a:srgbClr val="00D4AA"/>
+            <a:srgbClr val="F59E0B"/>
           </a:solidFill>
           <a:ln>
             <a:noFill/>
@@ -4800,7 +4783,7 @@
         <p:spPr>
           <a:xfrm>
             <a:off x="548640" y="320040"/>
-            <a:ext cx="7315200" cy="365760"/>
+            <a:ext cx="8229600" cy="365760"/>
           </a:xfrm>
           <a:prstGeom prst="rect">
             <a:avLst/>
@@ -4821,11 +4804,11 @@
             <a:r>
               <a:rPr sz="1400" b="1" i="0">
                 <a:solidFill>
-                  <a:srgbClr val="00D4AA"/>
-                </a:solidFill>
-                <a:latin typeface="Calibri"/>
-              </a:rPr>
-              <a:t>FASE 7 · CI/CD</a:t>
+                  <a:srgbClr val="F59E0B"/>
+                </a:solidFill>
+                <a:latin typeface="Calibri"/>
+              </a:rPr>
+              <a:t>SPRINT 1 · HARDENING</a:t>
             </a:r>
           </a:p>
         </p:txBody>
@@ -5544,7 +5527,7 @@
             <a:avLst/>
           </a:prstGeom>
           <a:solidFill>
-            <a:srgbClr val="00D4AA"/>
+            <a:srgbClr val="4A525E"/>
           </a:solidFill>
           <a:ln>
             <a:noFill/>
@@ -5582,7 +5565,7 @@
         <p:spPr>
           <a:xfrm>
             <a:off x="548640" y="320040"/>
-            <a:ext cx="7315200" cy="365760"/>
+            <a:ext cx="8229600" cy="365760"/>
           </a:xfrm>
           <a:prstGeom prst="rect">
             <a:avLst/>
@@ -5603,11 +5586,11 @@
             <a:r>
               <a:rPr sz="1400" b="1" i="0">
                 <a:solidFill>
-                  <a:srgbClr val="00D4AA"/>
-                </a:solidFill>
-                <a:latin typeface="Calibri"/>
-              </a:rPr>
-              <a:t>ESTADO ATUAL</a:t>
+                  <a:srgbClr val="4A525E"/>
+                </a:solidFill>
+                <a:latin typeface="Calibri"/>
+              </a:rPr>
+              <a:t>SPRINT 2 · PLANEJADO</a:t>
             </a:r>
           </a:p>
         </p:txBody>
@@ -5646,7 +5629,7 @@
                 </a:solidFill>
                 <a:latin typeface="Calibri"/>
               </a:rPr>
-              <a:t>Métricas do projeto</a:t>
+              <a:t>Produto e Experiência — ainda não iniciado</a:t>
             </a:r>
           </a:p>
         </p:txBody>
@@ -5698,19 +5681,17 @@
         </p:nvSpPr>
         <p:spPr>
           <a:xfrm>
-            <a:off x="548640" y="1554480"/>
-            <a:ext cx="3429000" cy="1645920"/>
+            <a:off x="548640" y="1188720"/>
+            <a:ext cx="1554480" cy="365760"/>
           </a:xfrm>
           <a:prstGeom prst="roundRect">
             <a:avLst/>
           </a:prstGeom>
           <a:solidFill>
-            <a:srgbClr val="1B2129"/>
+            <a:srgbClr val="4A525E"/>
           </a:solidFill>
-          <a:ln w="12700">
-            <a:solidFill>
-              <a:srgbClr val="00D4AA"/>
-            </a:solidFill>
+          <a:ln>
+            <a:noFill/>
           </a:ln>
           <a:effectLst/>
         </p:spPr>
@@ -5733,6 +5714,14 @@
           <a:lstStyle/>
           <a:p>
             <a:pPr algn="ctr"/>
+            <a:r>
+              <a:rPr sz="1200" b="1">
+                <a:solidFill>
+                  <a:srgbClr val="FFFFFF"/>
+                </a:solidFill>
+              </a:rPr>
+              <a:t>NÃO INICIADO</a:t>
+            </a:r>
           </a:p>
         </p:txBody>
       </p:sp>
@@ -5744,8 +5733,8 @@
         </p:nvSpPr>
         <p:spPr>
           <a:xfrm>
-            <a:off x="548640" y="1737360"/>
-            <a:ext cx="3429000" cy="822960"/>
+            <a:off x="548640" y="1828800"/>
+            <a:ext cx="10789920" cy="4114800"/>
           </a:xfrm>
           <a:prstGeom prst="rect">
             <a:avLst/>
@@ -5753,683 +5742,84 @@
           <a:noFill/>
         </p:spPr>
         <p:txBody>
-          <a:bodyPr wrap="square" anchor="t">
+          <a:bodyPr wrap="square">
             <a:spAutoFit/>
           </a:bodyPr>
           <a:lstStyle/>
           <a:p>
-            <a:pPr algn="ctr">
-              <a:lnSpc>
-                <a:spcPct val="100000"/>
-              </a:lnSpc>
-            </a:pPr>
-            <a:r>
-              <a:rPr sz="4000" b="1" i="0">
-                <a:solidFill>
-                  <a:srgbClr val="00D4AA"/>
-                </a:solidFill>
-                <a:latin typeface="Calibri"/>
-              </a:rPr>
-              <a:t>9</a:t>
-            </a:r>
-          </a:p>
-        </p:txBody>
-      </p:sp>
-      <p:sp>
-        <p:nvSpPr>
-          <p:cNvPr id="9" name="TextBox 8"/>
-          <p:cNvSpPr txBox="1"/>
-          <p:nvPr/>
-        </p:nvSpPr>
-        <p:spPr>
-          <a:xfrm>
-            <a:off x="548640" y="2560320"/>
-            <a:ext cx="3429000" cy="548640"/>
-          </a:xfrm>
-          <a:prstGeom prst="rect">
-            <a:avLst/>
-          </a:prstGeom>
-          <a:noFill/>
-        </p:spPr>
-        <p:txBody>
-          <a:bodyPr wrap="square" anchor="t">
-            <a:spAutoFit/>
-          </a:bodyPr>
-          <a:lstStyle/>
-          <a:p>
-            <a:pPr algn="ctr">
-              <a:lnSpc>
-                <a:spcPct val="100000"/>
-              </a:lnSpc>
-            </a:pPr>
-            <a:r>
-              <a:rPr sz="1400" b="0" i="0">
-                <a:solidFill>
-                  <a:srgbClr val="B0B8C2"/>
-                </a:solidFill>
-                <a:latin typeface="Calibri"/>
-              </a:rPr>
-              <a:t>microsserviços</a:t>
-            </a:r>
-          </a:p>
-        </p:txBody>
-      </p:sp>
-      <p:sp>
-        <p:nvSpPr>
-          <p:cNvPr id="10" name="Rounded Rectangle 9"/>
-          <p:cNvSpPr/>
-          <p:nvPr/>
-        </p:nvSpPr>
-        <p:spPr>
-          <a:xfrm>
-            <a:off x="4251960" y="1554480"/>
-            <a:ext cx="3429000" cy="1645920"/>
-          </a:xfrm>
-          <a:prstGeom prst="roundRect">
-            <a:avLst/>
-          </a:prstGeom>
-          <a:solidFill>
-            <a:srgbClr val="1B2129"/>
-          </a:solidFill>
-          <a:ln w="12700">
-            <a:solidFill>
-              <a:srgbClr val="00D4AA"/>
-            </a:solidFill>
-          </a:ln>
-          <a:effectLst/>
-        </p:spPr>
-        <p:style>
-          <a:lnRef idx="1">
-            <a:schemeClr val="accent1"/>
-          </a:lnRef>
-          <a:fillRef idx="3">
-            <a:schemeClr val="accent1"/>
-          </a:fillRef>
-          <a:effectRef idx="2">
-            <a:schemeClr val="accent1"/>
-          </a:effectRef>
-          <a:fontRef idx="minor">
-            <a:schemeClr val="lt1"/>
-          </a:fontRef>
-        </p:style>
-        <p:txBody>
-          <a:bodyPr rtlCol="0" anchor="ctr"/>
-          <a:lstStyle/>
-          <a:p>
-            <a:pPr algn="ctr"/>
-          </a:p>
-        </p:txBody>
-      </p:sp>
-      <p:sp>
-        <p:nvSpPr>
-          <p:cNvPr id="11" name="TextBox 10"/>
-          <p:cNvSpPr txBox="1"/>
-          <p:nvPr/>
-        </p:nvSpPr>
-        <p:spPr>
-          <a:xfrm>
-            <a:off x="4251960" y="1737360"/>
-            <a:ext cx="3429000" cy="822960"/>
-          </a:xfrm>
-          <a:prstGeom prst="rect">
-            <a:avLst/>
-          </a:prstGeom>
-          <a:noFill/>
-        </p:spPr>
-        <p:txBody>
-          <a:bodyPr wrap="square" anchor="t">
-            <a:spAutoFit/>
-          </a:bodyPr>
-          <a:lstStyle/>
-          <a:p>
-            <a:pPr algn="ctr">
-              <a:lnSpc>
-                <a:spcPct val="100000"/>
-              </a:lnSpc>
-            </a:pPr>
-            <a:r>
-              <a:rPr sz="4000" b="1" i="0">
-                <a:solidFill>
-                  <a:srgbClr val="00D4AA"/>
-                </a:solidFill>
-                <a:latin typeface="Calibri"/>
-              </a:rPr>
-              <a:t>5</a:t>
-            </a:r>
-          </a:p>
-        </p:txBody>
-      </p:sp>
-      <p:sp>
-        <p:nvSpPr>
-          <p:cNvPr id="12" name="TextBox 11"/>
-          <p:cNvSpPr txBox="1"/>
-          <p:nvPr/>
-        </p:nvSpPr>
-        <p:spPr>
-          <a:xfrm>
-            <a:off x="4251960" y="2560320"/>
-            <a:ext cx="3429000" cy="548640"/>
-          </a:xfrm>
-          <a:prstGeom prst="rect">
-            <a:avLst/>
-          </a:prstGeom>
-          <a:noFill/>
-        </p:spPr>
-        <p:txBody>
-          <a:bodyPr wrap="square" anchor="t">
-            <a:spAutoFit/>
-          </a:bodyPr>
-          <a:lstStyle/>
-          <a:p>
-            <a:pPr algn="ctr">
-              <a:lnSpc>
-                <a:spcPct val="100000"/>
-              </a:lnSpc>
-            </a:pPr>
-            <a:r>
-              <a:rPr sz="1400" b="0" i="0">
-                <a:solidFill>
-                  <a:srgbClr val="B0B8C2"/>
-                </a:solidFill>
-                <a:latin typeface="Calibri"/>
-              </a:rPr>
-              <a:t>exercícios suportados</a:t>
-            </a:r>
-          </a:p>
-        </p:txBody>
-      </p:sp>
-      <p:sp>
-        <p:nvSpPr>
-          <p:cNvPr id="13" name="Rounded Rectangle 12"/>
-          <p:cNvSpPr/>
-          <p:nvPr/>
-        </p:nvSpPr>
-        <p:spPr>
-          <a:xfrm>
-            <a:off x="7955280" y="1554480"/>
-            <a:ext cx="3429000" cy="1645920"/>
-          </a:xfrm>
-          <a:prstGeom prst="roundRect">
-            <a:avLst/>
-          </a:prstGeom>
-          <a:solidFill>
-            <a:srgbClr val="1B2129"/>
-          </a:solidFill>
-          <a:ln w="12700">
-            <a:solidFill>
-              <a:srgbClr val="00D4AA"/>
-            </a:solidFill>
-          </a:ln>
-          <a:effectLst/>
-        </p:spPr>
-        <p:style>
-          <a:lnRef idx="1">
-            <a:schemeClr val="accent1"/>
-          </a:lnRef>
-          <a:fillRef idx="3">
-            <a:schemeClr val="accent1"/>
-          </a:fillRef>
-          <a:effectRef idx="2">
-            <a:schemeClr val="accent1"/>
-          </a:effectRef>
-          <a:fontRef idx="minor">
-            <a:schemeClr val="lt1"/>
-          </a:fontRef>
-        </p:style>
-        <p:txBody>
-          <a:bodyPr rtlCol="0" anchor="ctr"/>
-          <a:lstStyle/>
-          <a:p>
-            <a:pPr algn="ctr"/>
-          </a:p>
-        </p:txBody>
-      </p:sp>
-      <p:sp>
-        <p:nvSpPr>
-          <p:cNvPr id="14" name="TextBox 13"/>
-          <p:cNvSpPr txBox="1"/>
-          <p:nvPr/>
-        </p:nvSpPr>
-        <p:spPr>
-          <a:xfrm>
-            <a:off x="7955280" y="1737360"/>
-            <a:ext cx="3429000" cy="822960"/>
-          </a:xfrm>
-          <a:prstGeom prst="rect">
-            <a:avLst/>
-          </a:prstGeom>
-          <a:noFill/>
-        </p:spPr>
-        <p:txBody>
-          <a:bodyPr wrap="square" anchor="t">
-            <a:spAutoFit/>
-          </a:bodyPr>
-          <a:lstStyle/>
-          <a:p>
-            <a:pPr algn="ctr">
-              <a:lnSpc>
-                <a:spcPct val="100000"/>
-              </a:lnSpc>
-            </a:pPr>
-            <a:r>
-              <a:rPr sz="4000" b="1" i="0">
-                <a:solidFill>
-                  <a:srgbClr val="00D4AA"/>
-                </a:solidFill>
-                <a:latin typeface="Calibri"/>
-              </a:rPr>
-              <a:t>48/48</a:t>
-            </a:r>
-          </a:p>
-        </p:txBody>
-      </p:sp>
-      <p:sp>
-        <p:nvSpPr>
-          <p:cNvPr id="15" name="TextBox 14"/>
-          <p:cNvSpPr txBox="1"/>
-          <p:nvPr/>
-        </p:nvSpPr>
-        <p:spPr>
-          <a:xfrm>
-            <a:off x="7955280" y="2560320"/>
-            <a:ext cx="3429000" cy="548640"/>
-          </a:xfrm>
-          <a:prstGeom prst="rect">
-            <a:avLst/>
-          </a:prstGeom>
-          <a:noFill/>
-        </p:spPr>
-        <p:txBody>
-          <a:bodyPr wrap="square" anchor="t">
-            <a:spAutoFit/>
-          </a:bodyPr>
-          <a:lstStyle/>
-          <a:p>
-            <a:pPr algn="ctr">
-              <a:lnSpc>
-                <a:spcPct val="100000"/>
-              </a:lnSpc>
-            </a:pPr>
-            <a:r>
-              <a:rPr sz="1400" b="0" i="0">
-                <a:solidFill>
-                  <a:srgbClr val="B0B8C2"/>
-                </a:solidFill>
-                <a:latin typeface="Calibri"/>
-              </a:rPr>
-              <a:t>testes passando</a:t>
-            </a:r>
-          </a:p>
-        </p:txBody>
-      </p:sp>
-      <p:sp>
-        <p:nvSpPr>
-          <p:cNvPr id="16" name="Rounded Rectangle 15"/>
-          <p:cNvSpPr/>
-          <p:nvPr/>
-        </p:nvSpPr>
-        <p:spPr>
-          <a:xfrm>
-            <a:off x="548640" y="3474720"/>
-            <a:ext cx="3429000" cy="1645920"/>
-          </a:xfrm>
-          <a:prstGeom prst="roundRect">
-            <a:avLst/>
-          </a:prstGeom>
-          <a:solidFill>
-            <a:srgbClr val="1B2129"/>
-          </a:solidFill>
-          <a:ln w="12700">
-            <a:solidFill>
-              <a:srgbClr val="00D4AA"/>
-            </a:solidFill>
-          </a:ln>
-          <a:effectLst/>
-        </p:spPr>
-        <p:style>
-          <a:lnRef idx="1">
-            <a:schemeClr val="accent1"/>
-          </a:lnRef>
-          <a:fillRef idx="3">
-            <a:schemeClr val="accent1"/>
-          </a:fillRef>
-          <a:effectRef idx="2">
-            <a:schemeClr val="accent1"/>
-          </a:effectRef>
-          <a:fontRef idx="minor">
-            <a:schemeClr val="lt1"/>
-          </a:fontRef>
-        </p:style>
-        <p:txBody>
-          <a:bodyPr rtlCol="0" anchor="ctr"/>
-          <a:lstStyle/>
-          <a:p>
-            <a:pPr algn="ctr"/>
-          </a:p>
-        </p:txBody>
-      </p:sp>
-      <p:sp>
-        <p:nvSpPr>
-          <p:cNvPr id="17" name="TextBox 16"/>
-          <p:cNvSpPr txBox="1"/>
-          <p:nvPr/>
-        </p:nvSpPr>
-        <p:spPr>
-          <a:xfrm>
-            <a:off x="548640" y="3657600"/>
-            <a:ext cx="3429000" cy="822960"/>
-          </a:xfrm>
-          <a:prstGeom prst="rect">
-            <a:avLst/>
-          </a:prstGeom>
-          <a:noFill/>
-        </p:spPr>
-        <p:txBody>
-          <a:bodyPr wrap="square" anchor="t">
-            <a:spAutoFit/>
-          </a:bodyPr>
-          <a:lstStyle/>
-          <a:p>
-            <a:pPr algn="ctr">
-              <a:lnSpc>
-                <a:spcPct val="100000"/>
-              </a:lnSpc>
-            </a:pPr>
-            <a:r>
-              <a:rPr sz="4000" b="1" i="0">
-                <a:solidFill>
-                  <a:srgbClr val="00D4AA"/>
-                </a:solidFill>
-                <a:latin typeface="Calibri"/>
-              </a:rPr>
-              <a:t>12</a:t>
-            </a:r>
-          </a:p>
-        </p:txBody>
-      </p:sp>
-      <p:sp>
-        <p:nvSpPr>
-          <p:cNvPr id="18" name="TextBox 17"/>
-          <p:cNvSpPr txBox="1"/>
-          <p:nvPr/>
-        </p:nvSpPr>
-        <p:spPr>
-          <a:xfrm>
-            <a:off x="548640" y="4480560"/>
-            <a:ext cx="3429000" cy="548640"/>
-          </a:xfrm>
-          <a:prstGeom prst="rect">
-            <a:avLst/>
-          </a:prstGeom>
-          <a:noFill/>
-        </p:spPr>
-        <p:txBody>
-          <a:bodyPr wrap="square" anchor="t">
-            <a:spAutoFit/>
-          </a:bodyPr>
-          <a:lstStyle/>
-          <a:p>
-            <a:pPr algn="ctr">
-              <a:lnSpc>
-                <a:spcPct val="100000"/>
-              </a:lnSpc>
-            </a:pPr>
-            <a:r>
-              <a:rPr sz="1400" b="0" i="0">
-                <a:solidFill>
-                  <a:srgbClr val="B0B8C2"/>
-                </a:solidFill>
-                <a:latin typeface="Calibri"/>
-              </a:rPr>
-              <a:t>containers Docker</a:t>
-            </a:r>
-          </a:p>
-        </p:txBody>
-      </p:sp>
-      <p:sp>
-        <p:nvSpPr>
-          <p:cNvPr id="19" name="Rounded Rectangle 18"/>
-          <p:cNvSpPr/>
-          <p:nvPr/>
-        </p:nvSpPr>
-        <p:spPr>
-          <a:xfrm>
-            <a:off x="4251960" y="3474720"/>
-            <a:ext cx="3429000" cy="1645920"/>
-          </a:xfrm>
-          <a:prstGeom prst="roundRect">
-            <a:avLst/>
-          </a:prstGeom>
-          <a:solidFill>
-            <a:srgbClr val="1B2129"/>
-          </a:solidFill>
-          <a:ln w="12700">
-            <a:solidFill>
-              <a:srgbClr val="00D4AA"/>
-            </a:solidFill>
-          </a:ln>
-          <a:effectLst/>
-        </p:spPr>
-        <p:style>
-          <a:lnRef idx="1">
-            <a:schemeClr val="accent1"/>
-          </a:lnRef>
-          <a:fillRef idx="3">
-            <a:schemeClr val="accent1"/>
-          </a:fillRef>
-          <a:effectRef idx="2">
-            <a:schemeClr val="accent1"/>
-          </a:effectRef>
-          <a:fontRef idx="minor">
-            <a:schemeClr val="lt1"/>
-          </a:fontRef>
-        </p:style>
-        <p:txBody>
-          <a:bodyPr rtlCol="0" anchor="ctr"/>
-          <a:lstStyle/>
-          <a:p>
-            <a:pPr algn="ctr"/>
-          </a:p>
-        </p:txBody>
-      </p:sp>
-      <p:sp>
-        <p:nvSpPr>
-          <p:cNvPr id="20" name="TextBox 19"/>
-          <p:cNvSpPr txBox="1"/>
-          <p:nvPr/>
-        </p:nvSpPr>
-        <p:spPr>
-          <a:xfrm>
-            <a:off x="4251960" y="3657600"/>
-            <a:ext cx="3429000" cy="822960"/>
-          </a:xfrm>
-          <a:prstGeom prst="rect">
-            <a:avLst/>
-          </a:prstGeom>
-          <a:noFill/>
-        </p:spPr>
-        <p:txBody>
-          <a:bodyPr wrap="square" anchor="t">
-            <a:spAutoFit/>
-          </a:bodyPr>
-          <a:lstStyle/>
-          <a:p>
-            <a:pPr algn="ctr">
-              <a:lnSpc>
-                <a:spcPct val="100000"/>
-              </a:lnSpc>
-            </a:pPr>
-            <a:r>
-              <a:rPr sz="4000" b="1" i="0">
-                <a:solidFill>
-                  <a:srgbClr val="00D4AA"/>
-                </a:solidFill>
-                <a:latin typeface="Calibri"/>
-              </a:rPr>
-              <a:t>2</a:t>
-            </a:r>
-          </a:p>
-        </p:txBody>
-      </p:sp>
-      <p:sp>
-        <p:nvSpPr>
-          <p:cNvPr id="21" name="TextBox 20"/>
-          <p:cNvSpPr txBox="1"/>
-          <p:nvPr/>
-        </p:nvSpPr>
-        <p:spPr>
-          <a:xfrm>
-            <a:off x="4251960" y="4480560"/>
-            <a:ext cx="3429000" cy="548640"/>
-          </a:xfrm>
-          <a:prstGeom prst="rect">
-            <a:avLst/>
-          </a:prstGeom>
-          <a:noFill/>
-        </p:spPr>
-        <p:txBody>
-          <a:bodyPr wrap="square" anchor="t">
-            <a:spAutoFit/>
-          </a:bodyPr>
-          <a:lstStyle/>
-          <a:p>
-            <a:pPr algn="ctr">
-              <a:lnSpc>
-                <a:spcPct val="100000"/>
-              </a:lnSpc>
-            </a:pPr>
-            <a:r>
-              <a:rPr sz="1400" b="0" i="0">
-                <a:solidFill>
-                  <a:srgbClr val="B0B8C2"/>
-                </a:solidFill>
-                <a:latin typeface="Calibri"/>
-              </a:rPr>
-              <a:t>registries (ghcr.io + Docker Hub)</a:t>
-            </a:r>
-          </a:p>
-        </p:txBody>
-      </p:sp>
-      <p:sp>
-        <p:nvSpPr>
-          <p:cNvPr id="22" name="Rounded Rectangle 21"/>
-          <p:cNvSpPr/>
-          <p:nvPr/>
-        </p:nvSpPr>
-        <p:spPr>
-          <a:xfrm>
-            <a:off x="7955280" y="3474720"/>
-            <a:ext cx="3429000" cy="1645920"/>
-          </a:xfrm>
-          <a:prstGeom prst="roundRect">
-            <a:avLst/>
-          </a:prstGeom>
-          <a:solidFill>
-            <a:srgbClr val="1B2129"/>
-          </a:solidFill>
-          <a:ln w="12700">
-            <a:solidFill>
-              <a:srgbClr val="00D4AA"/>
-            </a:solidFill>
-          </a:ln>
-          <a:effectLst/>
-        </p:spPr>
-        <p:style>
-          <a:lnRef idx="1">
-            <a:schemeClr val="accent1"/>
-          </a:lnRef>
-          <a:fillRef idx="3">
-            <a:schemeClr val="accent1"/>
-          </a:fillRef>
-          <a:effectRef idx="2">
-            <a:schemeClr val="accent1"/>
-          </a:effectRef>
-          <a:fontRef idx="minor">
-            <a:schemeClr val="lt1"/>
-          </a:fontRef>
-        </p:style>
-        <p:txBody>
-          <a:bodyPr rtlCol="0" anchor="ctr"/>
-          <a:lstStyle/>
-          <a:p>
-            <a:pPr algn="ctr"/>
-          </a:p>
-        </p:txBody>
-      </p:sp>
-      <p:sp>
-        <p:nvSpPr>
-          <p:cNvPr id="23" name="TextBox 22"/>
-          <p:cNvSpPr txBox="1"/>
-          <p:nvPr/>
-        </p:nvSpPr>
-        <p:spPr>
-          <a:xfrm>
-            <a:off x="7955280" y="3657600"/>
-            <a:ext cx="3429000" cy="822960"/>
-          </a:xfrm>
-          <a:prstGeom prst="rect">
-            <a:avLst/>
-          </a:prstGeom>
-          <a:noFill/>
-        </p:spPr>
-        <p:txBody>
-          <a:bodyPr wrap="square" anchor="t">
-            <a:spAutoFit/>
-          </a:bodyPr>
-          <a:lstStyle/>
-          <a:p>
-            <a:pPr algn="ctr">
-              <a:lnSpc>
-                <a:spcPct val="100000"/>
-              </a:lnSpc>
-            </a:pPr>
-            <a:r>
-              <a:rPr sz="4000" b="1" i="0">
-                <a:solidFill>
-                  <a:srgbClr val="00D4AA"/>
-                </a:solidFill>
-                <a:latin typeface="Calibri"/>
-              </a:rPr>
-              <a:t>10+</a:t>
-            </a:r>
-          </a:p>
-        </p:txBody>
-      </p:sp>
-      <p:sp>
-        <p:nvSpPr>
-          <p:cNvPr id="24" name="TextBox 23"/>
-          <p:cNvSpPr txBox="1"/>
-          <p:nvPr/>
-        </p:nvSpPr>
-        <p:spPr>
-          <a:xfrm>
-            <a:off x="7955280" y="4480560"/>
-            <a:ext cx="3429000" cy="548640"/>
-          </a:xfrm>
-          <a:prstGeom prst="rect">
-            <a:avLst/>
-          </a:prstGeom>
-          <a:noFill/>
-        </p:spPr>
-        <p:txBody>
-          <a:bodyPr wrap="square" anchor="t">
-            <a:spAutoFit/>
-          </a:bodyPr>
-          <a:lstStyle/>
-          <a:p>
-            <a:pPr algn="ctr">
-              <a:lnSpc>
-                <a:spcPct val="100000"/>
-              </a:lnSpc>
-            </a:pPr>
-            <a:r>
-              <a:rPr sz="1400" b="0" i="0">
-                <a:solidFill>
-                  <a:srgbClr val="B0B8C2"/>
-                </a:solidFill>
-                <a:latin typeface="Calibri"/>
-              </a:rPr>
-              <a:t>telas no app Android</a:t>
+            <a:pPr>
+              <a:lnSpc>
+                <a:spcPct val="112000"/>
+              </a:lnSpc>
+              <a:spcAft>
+                <a:spcPts val="800"/>
+              </a:spcAft>
+            </a:pPr>
+            <a:r>
+              <a:rPr sz="1800">
+                <a:solidFill>
+                  <a:srgbClr val="FFFFFF"/>
+                </a:solidFill>
+                <a:latin typeface="Calibri"/>
+              </a:rPr>
+              <a:t>•  Relatório semanal gerencial para o professor (e-mail toda segunda-feira)</a:t>
+            </a:r>
+          </a:p>
+          <a:p>
+            <a:pPr>
+              <a:lnSpc>
+                <a:spcPct val="112000"/>
+              </a:lnSpc>
+              <a:spcAft>
+                <a:spcPts val="800"/>
+              </a:spcAft>
+            </a:pPr>
+            <a:r>
+              <a:rPr sz="1800">
+                <a:solidFill>
+                  <a:srgbClr val="FFFFFF"/>
+                </a:solidFill>
+                <a:latin typeface="Calibri"/>
+              </a:rPr>
+              <a:t>•  Auto-detecção de exercício por padrão de landmarks (regras + Random Forest)</a:t>
+            </a:r>
+          </a:p>
+          <a:p>
+            <a:pPr>
+              <a:lnSpc>
+                <a:spcPct val="112000"/>
+              </a:lnSpc>
+              <a:spcAft>
+                <a:spcPts val="800"/>
+              </a:spcAft>
+            </a:pPr>
+            <a:r>
+              <a:rPr sz="1800">
+                <a:solidFill>
+                  <a:srgbClr val="FFFFFF"/>
+                </a:solidFill>
+                <a:latin typeface="Calibri"/>
+              </a:rPr>
+              <a:t>•  Progressão de carga inteligente nos planos de treino</a:t>
+            </a:r>
+          </a:p>
+          <a:p>
+            <a:pPr>
+              <a:lnSpc>
+                <a:spcPct val="112000"/>
+              </a:lnSpc>
+              <a:spcAft>
+                <a:spcPts val="800"/>
+              </a:spcAft>
+            </a:pPr>
+            <a:r>
+              <a:rPr sz="1800">
+                <a:solidFill>
+                  <a:srgbClr val="FFFFFF"/>
+                </a:solidFill>
+                <a:latin typeface="Calibri"/>
+              </a:rPr>
+              <a:t>•  FCM push notifications no Android (alertas mesmo com app em background)</a:t>
             </a:r>
           </a:p>
         </p:txBody>
@@ -6519,7 +5909,7 @@
             <a:avLst/>
           </a:prstGeom>
           <a:solidFill>
-            <a:srgbClr val="00D4AA"/>
+            <a:srgbClr val="F59E0B"/>
           </a:solidFill>
           <a:ln>
             <a:noFill/>
@@ -6557,7 +5947,7 @@
         <p:spPr>
           <a:xfrm>
             <a:off x="548640" y="320040"/>
-            <a:ext cx="7315200" cy="365760"/>
+            <a:ext cx="8229600" cy="365760"/>
           </a:xfrm>
           <a:prstGeom prst="rect">
             <a:avLst/>
@@ -6578,11 +5968,11 @@
             <a:r>
               <a:rPr sz="1400" b="1" i="0">
                 <a:solidFill>
-                  <a:srgbClr val="00D4AA"/>
-                </a:solidFill>
-                <a:latin typeface="Calibri"/>
-              </a:rPr>
-              <a:t>PRÓXIMOS PASSOS</a:t>
+                  <a:srgbClr val="F59E0B"/>
+                </a:solidFill>
+                <a:latin typeface="Calibri"/>
+              </a:rPr>
+              <a:t>SPRINT 3 · PLANEJADO</a:t>
             </a:r>
           </a:p>
         </p:txBody>
@@ -6621,7 +6011,7 @@
                 </a:solidFill>
                 <a:latin typeface="Calibri"/>
               </a:rPr>
-              <a:t>Pendências em aberto</a:t>
+              <a:t>Plataforma e Escala — parcialmente testado</a:t>
             </a:r>
           </a:p>
         </p:txBody>
@@ -6667,14 +6057,66 @@
       </p:sp>
       <p:sp>
         <p:nvSpPr>
-          <p:cNvPr id="7" name="TextBox 6"/>
+          <p:cNvPr id="7" name="Rounded Rectangle 6"/>
+          <p:cNvSpPr/>
+          <p:nvPr/>
+        </p:nvSpPr>
+        <p:spPr>
+          <a:xfrm>
+            <a:off x="548640" y="1188720"/>
+            <a:ext cx="1554480" cy="365760"/>
+          </a:xfrm>
+          <a:prstGeom prst="roundRect">
+            <a:avLst/>
+          </a:prstGeom>
+          <a:solidFill>
+            <a:srgbClr val="F59E0B"/>
+          </a:solidFill>
+          <a:ln>
+            <a:noFill/>
+          </a:ln>
+          <a:effectLst/>
+        </p:spPr>
+        <p:style>
+          <a:lnRef idx="1">
+            <a:schemeClr val="accent1"/>
+          </a:lnRef>
+          <a:fillRef idx="3">
+            <a:schemeClr val="accent1"/>
+          </a:fillRef>
+          <a:effectRef idx="2">
+            <a:schemeClr val="accent1"/>
+          </a:effectRef>
+          <a:fontRef idx="minor">
+            <a:schemeClr val="lt1"/>
+          </a:fontRef>
+        </p:style>
+        <p:txBody>
+          <a:bodyPr rtlCol="0" anchor="ctr"/>
+          <a:lstStyle/>
+          <a:p>
+            <a:pPr algn="ctr"/>
+            <a:r>
+              <a:rPr sz="1200" b="1">
+                <a:solidFill>
+                  <a:srgbClr val="FFFFFF"/>
+                </a:solidFill>
+              </a:rPr>
+              <a:t>PARCIAL</a:t>
+            </a:r>
+          </a:p>
+        </p:txBody>
+      </p:sp>
+      <p:sp>
+        <p:nvSpPr>
+          <p:cNvPr id="8" name="TextBox 7"/>
           <p:cNvSpPr txBox="1"/>
           <p:nvPr/>
         </p:nvSpPr>
         <p:spPr>
           <a:xfrm>
-            <a:off x="548640" y="1463040"/>
-            <a:ext cx="10789920" cy="4572000"/>
+            <a:off x="548640" y="1828800"/>
+            <a:ext cx="10789920" cy="4114800"/>
           </a:xfrm>
           <a:prstGeom prst="rect">
             <a:avLst/>
@@ -6696,13 +6138,13 @@
               </a:spcAft>
             </a:pPr>
             <a:r>
-              <a:rPr sz="1800">
+              <a:rPr sz="1700">
                 <a:solidFill>
                   <a:srgbClr val="FFFFFF"/>
                 </a:solidFill>
                 <a:latin typeface="Calibri"/>
               </a:rPr>
-              <a:t>•  Configurar secrets DOCKERHUB_USERNAME / DOCKERHUB_TOKEN no GitHub para o build-and-push publicar de fato</a:t>
+              <a:t>•  Prometheus + Grafana (métricas, dashboards, alertas) — não iniciado</a:t>
             </a:r>
           </a:p>
           <a:p>
@@ -6715,13 +6157,13 @@
               </a:spcAft>
             </a:pPr>
             <a:r>
-              <a:rPr sz="1800">
+              <a:rPr sz="1700">
                 <a:solidFill>
                   <a:srgbClr val="FFFFFF"/>
                 </a:solidFill>
                 <a:latin typeface="Calibri"/>
               </a:rPr>
-              <a:t>•  Decidir o destino de pose-service/ai/dataset_generator.py (imports não usados de thresholds de LUNGE/ROW — início de uma extensão da IA desconectada)</a:t>
+              <a:t>•  PWA de câmera para alunos sem Android — não iniciado</a:t>
             </a:r>
           </a:p>
           <a:p>
@@ -6734,13 +6176,13 @@
               </a:spcAft>
             </a:pPr>
             <a:r>
-              <a:rPr sz="1800">
+              <a:rPr sz="1700">
                 <a:solidFill>
                   <a:srgbClr val="FFFFFF"/>
                 </a:solidFill>
                 <a:latin typeface="Calibri"/>
               </a:rPr>
-              <a:t>•  Configurar secrets STAGING_HOST/USER/SSH_KEY para habilitar o deploy automático em staging</a:t>
+              <a:t>•  Modelo de IA próprio — antecipado durante o Sprint 1, validado contra vídeo real e</a:t>
             </a:r>
           </a:p>
           <a:p>
@@ -6753,13 +6195,32 @@
               </a:spcAft>
             </a:pPr>
             <a:r>
-              <a:rPr sz="1800">
-                <a:solidFill>
-                  <a:srgbClr val="FFFFFF"/>
-                </a:solidFill>
-                <a:latin typeface="Calibri"/>
-              </a:rPr>
-              <a:t>•  Avaliar retomar o motor de IA no futuro, mas treinado com dados reais anotados (não sintéticos) — único caminho para superar o motor de regras</a:t>
+              <a:rPr sz="1500">
+                <a:solidFill>
+                  <a:srgbClr val="B0B8C2"/>
+                </a:solidFill>
+                <a:latin typeface="Calibri"/>
+              </a:rPr>
+              <a:t>    ‣  REVERTIDO: dataset sintético limitava o modelo a, no máximo, igualar as regras</a:t>
+            </a:r>
+          </a:p>
+          <a:p>
+            <a:pPr>
+              <a:lnSpc>
+                <a:spcPct val="112000"/>
+              </a:lnSpc>
+              <a:spcAft>
+                <a:spcPts val="800"/>
+              </a:spcAft>
+            </a:pPr>
+            <a:r>
+              <a:rPr sz="1500">
+                <a:solidFill>
+                  <a:srgbClr val="B0B8C2"/>
+                </a:solidFill>
+                <a:latin typeface="Calibri"/>
+              </a:rPr>
+              <a:t>    ‣  Código mantido no disco (desconectado) para retomar com dados reais anotados no futuro</a:t>
             </a:r>
           </a:p>
         </p:txBody>
@@ -6773,6 +6234,1330 @@
 </file>
 
 <file path=ppt/slides/slide16.xml><?xml version="1.0" encoding="utf-8"?>
+<p:sld xmlns:a="http://schemas.openxmlformats.org/drawingml/2006/main" xmlns:p="http://schemas.openxmlformats.org/presentationml/2006/main" xmlns:r="http://schemas.openxmlformats.org/officeDocument/2006/relationships">
+  <p:cSld>
+    <p:bg>
+      <p:bgPr>
+        <a:solidFill>
+          <a:srgbClr val="161B22"/>
+        </a:solidFill>
+        <a:effectLst/>
+      </p:bgPr>
+    </p:bg>
+    <p:spTree>
+      <p:nvGrpSpPr>
+        <p:cNvPr id="1" name=""/>
+        <p:cNvGrpSpPr/>
+        <p:nvPr/>
+      </p:nvGrpSpPr>
+      <p:grpSpPr/>
+      <p:sp>
+        <p:nvSpPr>
+          <p:cNvPr id="2" name="Rectangle 1"/>
+          <p:cNvSpPr/>
+          <p:nvPr/>
+        </p:nvSpPr>
+        <p:spPr>
+          <a:xfrm>
+            <a:off x="0" y="0"/>
+            <a:ext cx="12191695" cy="1051560"/>
+          </a:xfrm>
+          <a:prstGeom prst="rect">
+            <a:avLst/>
+          </a:prstGeom>
+          <a:solidFill>
+            <a:srgbClr val="0D1117"/>
+          </a:solidFill>
+          <a:ln>
+            <a:noFill/>
+          </a:ln>
+          <a:effectLst/>
+        </p:spPr>
+        <p:style>
+          <a:lnRef idx="1">
+            <a:schemeClr val="accent1"/>
+          </a:lnRef>
+          <a:fillRef idx="3">
+            <a:schemeClr val="accent1"/>
+          </a:fillRef>
+          <a:effectRef idx="2">
+            <a:schemeClr val="accent1"/>
+          </a:effectRef>
+          <a:fontRef idx="minor">
+            <a:schemeClr val="lt1"/>
+          </a:fontRef>
+        </p:style>
+        <p:txBody>
+          <a:bodyPr rtlCol="0" anchor="ctr"/>
+          <a:lstStyle/>
+          <a:p>
+            <a:pPr algn="ctr"/>
+          </a:p>
+        </p:txBody>
+      </p:sp>
+      <p:sp>
+        <p:nvSpPr>
+          <p:cNvPr id="3" name="Rectangle 2"/>
+          <p:cNvSpPr/>
+          <p:nvPr/>
+        </p:nvSpPr>
+        <p:spPr>
+          <a:xfrm>
+            <a:off x="0" y="1051560"/>
+            <a:ext cx="12191695" cy="25400"/>
+          </a:xfrm>
+          <a:prstGeom prst="rect">
+            <a:avLst/>
+          </a:prstGeom>
+          <a:solidFill>
+            <a:srgbClr val="00D4AA"/>
+          </a:solidFill>
+          <a:ln>
+            <a:noFill/>
+          </a:ln>
+          <a:effectLst/>
+        </p:spPr>
+        <p:style>
+          <a:lnRef idx="1">
+            <a:schemeClr val="accent1"/>
+          </a:lnRef>
+          <a:fillRef idx="3">
+            <a:schemeClr val="accent1"/>
+          </a:fillRef>
+          <a:effectRef idx="2">
+            <a:schemeClr val="accent1"/>
+          </a:effectRef>
+          <a:fontRef idx="minor">
+            <a:schemeClr val="lt1"/>
+          </a:fontRef>
+        </p:style>
+        <p:txBody>
+          <a:bodyPr rtlCol="0" anchor="ctr"/>
+          <a:lstStyle/>
+          <a:p>
+            <a:pPr algn="ctr"/>
+          </a:p>
+        </p:txBody>
+      </p:sp>
+      <p:sp>
+        <p:nvSpPr>
+          <p:cNvPr id="4" name="TextBox 3"/>
+          <p:cNvSpPr txBox="1"/>
+          <p:nvPr/>
+        </p:nvSpPr>
+        <p:spPr>
+          <a:xfrm>
+            <a:off x="548640" y="320040"/>
+            <a:ext cx="8229600" cy="365760"/>
+          </a:xfrm>
+          <a:prstGeom prst="rect">
+            <a:avLst/>
+          </a:prstGeom>
+          <a:noFill/>
+        </p:spPr>
+        <p:txBody>
+          <a:bodyPr wrap="square" anchor="t">
+            <a:spAutoFit/>
+          </a:bodyPr>
+          <a:lstStyle/>
+          <a:p>
+            <a:pPr algn="l">
+              <a:lnSpc>
+                <a:spcPct val="100000"/>
+              </a:lnSpc>
+            </a:pPr>
+            <a:r>
+              <a:rPr sz="1400" b="1" i="0">
+                <a:solidFill>
+                  <a:srgbClr val="00D4AA"/>
+                </a:solidFill>
+                <a:latin typeface="Calibri"/>
+              </a:rPr>
+              <a:t>ESTADO ATUAL</a:t>
+            </a:r>
+          </a:p>
+        </p:txBody>
+      </p:sp>
+      <p:sp>
+        <p:nvSpPr>
+          <p:cNvPr id="5" name="TextBox 4"/>
+          <p:cNvSpPr txBox="1"/>
+          <p:nvPr/>
+        </p:nvSpPr>
+        <p:spPr>
+          <a:xfrm>
+            <a:off x="548640" y="566928"/>
+            <a:ext cx="10515600" cy="548640"/>
+          </a:xfrm>
+          <a:prstGeom prst="rect">
+            <a:avLst/>
+          </a:prstGeom>
+          <a:noFill/>
+        </p:spPr>
+        <p:txBody>
+          <a:bodyPr wrap="square" anchor="t">
+            <a:spAutoFit/>
+          </a:bodyPr>
+          <a:lstStyle/>
+          <a:p>
+            <a:pPr algn="l">
+              <a:lnSpc>
+                <a:spcPct val="100000"/>
+              </a:lnSpc>
+            </a:pPr>
+            <a:r>
+              <a:rPr sz="2600" b="1" i="0">
+                <a:solidFill>
+                  <a:srgbClr val="FFFFFF"/>
+                </a:solidFill>
+                <a:latin typeface="Calibri"/>
+              </a:rPr>
+              <a:t>Métricas do projeto</a:t>
+            </a:r>
+          </a:p>
+        </p:txBody>
+      </p:sp>
+      <p:sp>
+        <p:nvSpPr>
+          <p:cNvPr id="6" name="TextBox 5"/>
+          <p:cNvSpPr txBox="1"/>
+          <p:nvPr/>
+        </p:nvSpPr>
+        <p:spPr>
+          <a:xfrm>
+            <a:off x="11277295" y="6446520"/>
+            <a:ext cx="640080" cy="320040"/>
+          </a:xfrm>
+          <a:prstGeom prst="rect">
+            <a:avLst/>
+          </a:prstGeom>
+          <a:noFill/>
+        </p:spPr>
+        <p:txBody>
+          <a:bodyPr wrap="square" anchor="t">
+            <a:spAutoFit/>
+          </a:bodyPr>
+          <a:lstStyle/>
+          <a:p>
+            <a:pPr algn="r">
+              <a:lnSpc>
+                <a:spcPct val="100000"/>
+              </a:lnSpc>
+            </a:pPr>
+            <a:r>
+              <a:rPr sz="1100" b="0" i="0">
+                <a:solidFill>
+                  <a:srgbClr val="B0B8C2"/>
+                </a:solidFill>
+                <a:latin typeface="Calibri"/>
+              </a:rPr>
+              <a:t>16</a:t>
+            </a:r>
+          </a:p>
+        </p:txBody>
+      </p:sp>
+      <p:sp>
+        <p:nvSpPr>
+          <p:cNvPr id="7" name="Rounded Rectangle 6"/>
+          <p:cNvSpPr/>
+          <p:nvPr/>
+        </p:nvSpPr>
+        <p:spPr>
+          <a:xfrm>
+            <a:off x="548640" y="1554480"/>
+            <a:ext cx="3429000" cy="1645920"/>
+          </a:xfrm>
+          <a:prstGeom prst="roundRect">
+            <a:avLst/>
+          </a:prstGeom>
+          <a:solidFill>
+            <a:srgbClr val="1B2129"/>
+          </a:solidFill>
+          <a:ln w="12700">
+            <a:solidFill>
+              <a:srgbClr val="00D4AA"/>
+            </a:solidFill>
+          </a:ln>
+          <a:effectLst/>
+        </p:spPr>
+        <p:style>
+          <a:lnRef idx="1">
+            <a:schemeClr val="accent1"/>
+          </a:lnRef>
+          <a:fillRef idx="3">
+            <a:schemeClr val="accent1"/>
+          </a:fillRef>
+          <a:effectRef idx="2">
+            <a:schemeClr val="accent1"/>
+          </a:effectRef>
+          <a:fontRef idx="minor">
+            <a:schemeClr val="lt1"/>
+          </a:fontRef>
+        </p:style>
+        <p:txBody>
+          <a:bodyPr rtlCol="0" anchor="ctr"/>
+          <a:lstStyle/>
+          <a:p>
+            <a:pPr algn="ctr"/>
+          </a:p>
+        </p:txBody>
+      </p:sp>
+      <p:sp>
+        <p:nvSpPr>
+          <p:cNvPr id="8" name="TextBox 7"/>
+          <p:cNvSpPr txBox="1"/>
+          <p:nvPr/>
+        </p:nvSpPr>
+        <p:spPr>
+          <a:xfrm>
+            <a:off x="548640" y="1737360"/>
+            <a:ext cx="3429000" cy="822960"/>
+          </a:xfrm>
+          <a:prstGeom prst="rect">
+            <a:avLst/>
+          </a:prstGeom>
+          <a:noFill/>
+        </p:spPr>
+        <p:txBody>
+          <a:bodyPr wrap="square" anchor="t">
+            <a:spAutoFit/>
+          </a:bodyPr>
+          <a:lstStyle/>
+          <a:p>
+            <a:pPr algn="ctr">
+              <a:lnSpc>
+                <a:spcPct val="100000"/>
+              </a:lnSpc>
+            </a:pPr>
+            <a:r>
+              <a:rPr sz="4000" b="1" i="0">
+                <a:solidFill>
+                  <a:srgbClr val="00D4AA"/>
+                </a:solidFill>
+                <a:latin typeface="Calibri"/>
+              </a:rPr>
+              <a:t>9</a:t>
+            </a:r>
+          </a:p>
+        </p:txBody>
+      </p:sp>
+      <p:sp>
+        <p:nvSpPr>
+          <p:cNvPr id="9" name="TextBox 8"/>
+          <p:cNvSpPr txBox="1"/>
+          <p:nvPr/>
+        </p:nvSpPr>
+        <p:spPr>
+          <a:xfrm>
+            <a:off x="548640" y="2560320"/>
+            <a:ext cx="3429000" cy="548640"/>
+          </a:xfrm>
+          <a:prstGeom prst="rect">
+            <a:avLst/>
+          </a:prstGeom>
+          <a:noFill/>
+        </p:spPr>
+        <p:txBody>
+          <a:bodyPr wrap="square" anchor="t">
+            <a:spAutoFit/>
+          </a:bodyPr>
+          <a:lstStyle/>
+          <a:p>
+            <a:pPr algn="ctr">
+              <a:lnSpc>
+                <a:spcPct val="100000"/>
+              </a:lnSpc>
+            </a:pPr>
+            <a:r>
+              <a:rPr sz="1400" b="0" i="0">
+                <a:solidFill>
+                  <a:srgbClr val="B0B8C2"/>
+                </a:solidFill>
+                <a:latin typeface="Calibri"/>
+              </a:rPr>
+              <a:t>microsserviços</a:t>
+            </a:r>
+          </a:p>
+        </p:txBody>
+      </p:sp>
+      <p:sp>
+        <p:nvSpPr>
+          <p:cNvPr id="10" name="Rounded Rectangle 9"/>
+          <p:cNvSpPr/>
+          <p:nvPr/>
+        </p:nvSpPr>
+        <p:spPr>
+          <a:xfrm>
+            <a:off x="4251960" y="1554480"/>
+            <a:ext cx="3429000" cy="1645920"/>
+          </a:xfrm>
+          <a:prstGeom prst="roundRect">
+            <a:avLst/>
+          </a:prstGeom>
+          <a:solidFill>
+            <a:srgbClr val="1B2129"/>
+          </a:solidFill>
+          <a:ln w="12700">
+            <a:solidFill>
+              <a:srgbClr val="00D4AA"/>
+            </a:solidFill>
+          </a:ln>
+          <a:effectLst/>
+        </p:spPr>
+        <p:style>
+          <a:lnRef idx="1">
+            <a:schemeClr val="accent1"/>
+          </a:lnRef>
+          <a:fillRef idx="3">
+            <a:schemeClr val="accent1"/>
+          </a:fillRef>
+          <a:effectRef idx="2">
+            <a:schemeClr val="accent1"/>
+          </a:effectRef>
+          <a:fontRef idx="minor">
+            <a:schemeClr val="lt1"/>
+          </a:fontRef>
+        </p:style>
+        <p:txBody>
+          <a:bodyPr rtlCol="0" anchor="ctr"/>
+          <a:lstStyle/>
+          <a:p>
+            <a:pPr algn="ctr"/>
+          </a:p>
+        </p:txBody>
+      </p:sp>
+      <p:sp>
+        <p:nvSpPr>
+          <p:cNvPr id="11" name="TextBox 10"/>
+          <p:cNvSpPr txBox="1"/>
+          <p:nvPr/>
+        </p:nvSpPr>
+        <p:spPr>
+          <a:xfrm>
+            <a:off x="4251960" y="1737360"/>
+            <a:ext cx="3429000" cy="822960"/>
+          </a:xfrm>
+          <a:prstGeom prst="rect">
+            <a:avLst/>
+          </a:prstGeom>
+          <a:noFill/>
+        </p:spPr>
+        <p:txBody>
+          <a:bodyPr wrap="square" anchor="t">
+            <a:spAutoFit/>
+          </a:bodyPr>
+          <a:lstStyle/>
+          <a:p>
+            <a:pPr algn="ctr">
+              <a:lnSpc>
+                <a:spcPct val="100000"/>
+              </a:lnSpc>
+            </a:pPr>
+            <a:r>
+              <a:rPr sz="4000" b="1" i="0">
+                <a:solidFill>
+                  <a:srgbClr val="00D4AA"/>
+                </a:solidFill>
+                <a:latin typeface="Calibri"/>
+              </a:rPr>
+              <a:t>5</a:t>
+            </a:r>
+          </a:p>
+        </p:txBody>
+      </p:sp>
+      <p:sp>
+        <p:nvSpPr>
+          <p:cNvPr id="12" name="TextBox 11"/>
+          <p:cNvSpPr txBox="1"/>
+          <p:nvPr/>
+        </p:nvSpPr>
+        <p:spPr>
+          <a:xfrm>
+            <a:off x="4251960" y="2560320"/>
+            <a:ext cx="3429000" cy="548640"/>
+          </a:xfrm>
+          <a:prstGeom prst="rect">
+            <a:avLst/>
+          </a:prstGeom>
+          <a:noFill/>
+        </p:spPr>
+        <p:txBody>
+          <a:bodyPr wrap="square" anchor="t">
+            <a:spAutoFit/>
+          </a:bodyPr>
+          <a:lstStyle/>
+          <a:p>
+            <a:pPr algn="ctr">
+              <a:lnSpc>
+                <a:spcPct val="100000"/>
+              </a:lnSpc>
+            </a:pPr>
+            <a:r>
+              <a:rPr sz="1400" b="0" i="0">
+                <a:solidFill>
+                  <a:srgbClr val="B0B8C2"/>
+                </a:solidFill>
+                <a:latin typeface="Calibri"/>
+              </a:rPr>
+              <a:t>exercícios suportados</a:t>
+            </a:r>
+          </a:p>
+        </p:txBody>
+      </p:sp>
+      <p:sp>
+        <p:nvSpPr>
+          <p:cNvPr id="13" name="Rounded Rectangle 12"/>
+          <p:cNvSpPr/>
+          <p:nvPr/>
+        </p:nvSpPr>
+        <p:spPr>
+          <a:xfrm>
+            <a:off x="7955280" y="1554480"/>
+            <a:ext cx="3429000" cy="1645920"/>
+          </a:xfrm>
+          <a:prstGeom prst="roundRect">
+            <a:avLst/>
+          </a:prstGeom>
+          <a:solidFill>
+            <a:srgbClr val="1B2129"/>
+          </a:solidFill>
+          <a:ln w="12700">
+            <a:solidFill>
+              <a:srgbClr val="00D4AA"/>
+            </a:solidFill>
+          </a:ln>
+          <a:effectLst/>
+        </p:spPr>
+        <p:style>
+          <a:lnRef idx="1">
+            <a:schemeClr val="accent1"/>
+          </a:lnRef>
+          <a:fillRef idx="3">
+            <a:schemeClr val="accent1"/>
+          </a:fillRef>
+          <a:effectRef idx="2">
+            <a:schemeClr val="accent1"/>
+          </a:effectRef>
+          <a:fontRef idx="minor">
+            <a:schemeClr val="lt1"/>
+          </a:fontRef>
+        </p:style>
+        <p:txBody>
+          <a:bodyPr rtlCol="0" anchor="ctr"/>
+          <a:lstStyle/>
+          <a:p>
+            <a:pPr algn="ctr"/>
+          </a:p>
+        </p:txBody>
+      </p:sp>
+      <p:sp>
+        <p:nvSpPr>
+          <p:cNvPr id="14" name="TextBox 13"/>
+          <p:cNvSpPr txBox="1"/>
+          <p:nvPr/>
+        </p:nvSpPr>
+        <p:spPr>
+          <a:xfrm>
+            <a:off x="7955280" y="1737360"/>
+            <a:ext cx="3429000" cy="822960"/>
+          </a:xfrm>
+          <a:prstGeom prst="rect">
+            <a:avLst/>
+          </a:prstGeom>
+          <a:noFill/>
+        </p:spPr>
+        <p:txBody>
+          <a:bodyPr wrap="square" anchor="t">
+            <a:spAutoFit/>
+          </a:bodyPr>
+          <a:lstStyle/>
+          <a:p>
+            <a:pPr algn="ctr">
+              <a:lnSpc>
+                <a:spcPct val="100000"/>
+              </a:lnSpc>
+            </a:pPr>
+            <a:r>
+              <a:rPr sz="4000" b="1" i="0">
+                <a:solidFill>
+                  <a:srgbClr val="00D4AA"/>
+                </a:solidFill>
+                <a:latin typeface="Calibri"/>
+              </a:rPr>
+              <a:t>48/48</a:t>
+            </a:r>
+          </a:p>
+        </p:txBody>
+      </p:sp>
+      <p:sp>
+        <p:nvSpPr>
+          <p:cNvPr id="15" name="TextBox 14"/>
+          <p:cNvSpPr txBox="1"/>
+          <p:nvPr/>
+        </p:nvSpPr>
+        <p:spPr>
+          <a:xfrm>
+            <a:off x="7955280" y="2560320"/>
+            <a:ext cx="3429000" cy="548640"/>
+          </a:xfrm>
+          <a:prstGeom prst="rect">
+            <a:avLst/>
+          </a:prstGeom>
+          <a:noFill/>
+        </p:spPr>
+        <p:txBody>
+          <a:bodyPr wrap="square" anchor="t">
+            <a:spAutoFit/>
+          </a:bodyPr>
+          <a:lstStyle/>
+          <a:p>
+            <a:pPr algn="ctr">
+              <a:lnSpc>
+                <a:spcPct val="100000"/>
+              </a:lnSpc>
+            </a:pPr>
+            <a:r>
+              <a:rPr sz="1400" b="0" i="0">
+                <a:solidFill>
+                  <a:srgbClr val="B0B8C2"/>
+                </a:solidFill>
+                <a:latin typeface="Calibri"/>
+              </a:rPr>
+              <a:t>testes passando</a:t>
+            </a:r>
+          </a:p>
+        </p:txBody>
+      </p:sp>
+      <p:sp>
+        <p:nvSpPr>
+          <p:cNvPr id="16" name="Rounded Rectangle 15"/>
+          <p:cNvSpPr/>
+          <p:nvPr/>
+        </p:nvSpPr>
+        <p:spPr>
+          <a:xfrm>
+            <a:off x="548640" y="3474720"/>
+            <a:ext cx="3429000" cy="1645920"/>
+          </a:xfrm>
+          <a:prstGeom prst="roundRect">
+            <a:avLst/>
+          </a:prstGeom>
+          <a:solidFill>
+            <a:srgbClr val="1B2129"/>
+          </a:solidFill>
+          <a:ln w="12700">
+            <a:solidFill>
+              <a:srgbClr val="00D4AA"/>
+            </a:solidFill>
+          </a:ln>
+          <a:effectLst/>
+        </p:spPr>
+        <p:style>
+          <a:lnRef idx="1">
+            <a:schemeClr val="accent1"/>
+          </a:lnRef>
+          <a:fillRef idx="3">
+            <a:schemeClr val="accent1"/>
+          </a:fillRef>
+          <a:effectRef idx="2">
+            <a:schemeClr val="accent1"/>
+          </a:effectRef>
+          <a:fontRef idx="minor">
+            <a:schemeClr val="lt1"/>
+          </a:fontRef>
+        </p:style>
+        <p:txBody>
+          <a:bodyPr rtlCol="0" anchor="ctr"/>
+          <a:lstStyle/>
+          <a:p>
+            <a:pPr algn="ctr"/>
+          </a:p>
+        </p:txBody>
+      </p:sp>
+      <p:sp>
+        <p:nvSpPr>
+          <p:cNvPr id="17" name="TextBox 16"/>
+          <p:cNvSpPr txBox="1"/>
+          <p:nvPr/>
+        </p:nvSpPr>
+        <p:spPr>
+          <a:xfrm>
+            <a:off x="548640" y="3657600"/>
+            <a:ext cx="3429000" cy="822960"/>
+          </a:xfrm>
+          <a:prstGeom prst="rect">
+            <a:avLst/>
+          </a:prstGeom>
+          <a:noFill/>
+        </p:spPr>
+        <p:txBody>
+          <a:bodyPr wrap="square" anchor="t">
+            <a:spAutoFit/>
+          </a:bodyPr>
+          <a:lstStyle/>
+          <a:p>
+            <a:pPr algn="ctr">
+              <a:lnSpc>
+                <a:spcPct val="100000"/>
+              </a:lnSpc>
+            </a:pPr>
+            <a:r>
+              <a:rPr sz="4000" b="1" i="0">
+                <a:solidFill>
+                  <a:srgbClr val="00D4AA"/>
+                </a:solidFill>
+                <a:latin typeface="Calibri"/>
+              </a:rPr>
+              <a:t>12</a:t>
+            </a:r>
+          </a:p>
+        </p:txBody>
+      </p:sp>
+      <p:sp>
+        <p:nvSpPr>
+          <p:cNvPr id="18" name="TextBox 17"/>
+          <p:cNvSpPr txBox="1"/>
+          <p:nvPr/>
+        </p:nvSpPr>
+        <p:spPr>
+          <a:xfrm>
+            <a:off x="548640" y="4480560"/>
+            <a:ext cx="3429000" cy="548640"/>
+          </a:xfrm>
+          <a:prstGeom prst="rect">
+            <a:avLst/>
+          </a:prstGeom>
+          <a:noFill/>
+        </p:spPr>
+        <p:txBody>
+          <a:bodyPr wrap="square" anchor="t">
+            <a:spAutoFit/>
+          </a:bodyPr>
+          <a:lstStyle/>
+          <a:p>
+            <a:pPr algn="ctr">
+              <a:lnSpc>
+                <a:spcPct val="100000"/>
+              </a:lnSpc>
+            </a:pPr>
+            <a:r>
+              <a:rPr sz="1400" b="0" i="0">
+                <a:solidFill>
+                  <a:srgbClr val="B0B8C2"/>
+                </a:solidFill>
+                <a:latin typeface="Calibri"/>
+              </a:rPr>
+              <a:t>containers Docker</a:t>
+            </a:r>
+          </a:p>
+        </p:txBody>
+      </p:sp>
+      <p:sp>
+        <p:nvSpPr>
+          <p:cNvPr id="19" name="Rounded Rectangle 18"/>
+          <p:cNvSpPr/>
+          <p:nvPr/>
+        </p:nvSpPr>
+        <p:spPr>
+          <a:xfrm>
+            <a:off x="4251960" y="3474720"/>
+            <a:ext cx="3429000" cy="1645920"/>
+          </a:xfrm>
+          <a:prstGeom prst="roundRect">
+            <a:avLst/>
+          </a:prstGeom>
+          <a:solidFill>
+            <a:srgbClr val="1B2129"/>
+          </a:solidFill>
+          <a:ln w="12700">
+            <a:solidFill>
+              <a:srgbClr val="00D4AA"/>
+            </a:solidFill>
+          </a:ln>
+          <a:effectLst/>
+        </p:spPr>
+        <p:style>
+          <a:lnRef idx="1">
+            <a:schemeClr val="accent1"/>
+          </a:lnRef>
+          <a:fillRef idx="3">
+            <a:schemeClr val="accent1"/>
+          </a:fillRef>
+          <a:effectRef idx="2">
+            <a:schemeClr val="accent1"/>
+          </a:effectRef>
+          <a:fontRef idx="minor">
+            <a:schemeClr val="lt1"/>
+          </a:fontRef>
+        </p:style>
+        <p:txBody>
+          <a:bodyPr rtlCol="0" anchor="ctr"/>
+          <a:lstStyle/>
+          <a:p>
+            <a:pPr algn="ctr"/>
+          </a:p>
+        </p:txBody>
+      </p:sp>
+      <p:sp>
+        <p:nvSpPr>
+          <p:cNvPr id="20" name="TextBox 19"/>
+          <p:cNvSpPr txBox="1"/>
+          <p:nvPr/>
+        </p:nvSpPr>
+        <p:spPr>
+          <a:xfrm>
+            <a:off x="4251960" y="3657600"/>
+            <a:ext cx="3429000" cy="822960"/>
+          </a:xfrm>
+          <a:prstGeom prst="rect">
+            <a:avLst/>
+          </a:prstGeom>
+          <a:noFill/>
+        </p:spPr>
+        <p:txBody>
+          <a:bodyPr wrap="square" anchor="t">
+            <a:spAutoFit/>
+          </a:bodyPr>
+          <a:lstStyle/>
+          <a:p>
+            <a:pPr algn="ctr">
+              <a:lnSpc>
+                <a:spcPct val="100000"/>
+              </a:lnSpc>
+            </a:pPr>
+            <a:r>
+              <a:rPr sz="4000" b="1" i="0">
+                <a:solidFill>
+                  <a:srgbClr val="00D4AA"/>
+                </a:solidFill>
+                <a:latin typeface="Calibri"/>
+              </a:rPr>
+              <a:t>2</a:t>
+            </a:r>
+          </a:p>
+        </p:txBody>
+      </p:sp>
+      <p:sp>
+        <p:nvSpPr>
+          <p:cNvPr id="21" name="TextBox 20"/>
+          <p:cNvSpPr txBox="1"/>
+          <p:nvPr/>
+        </p:nvSpPr>
+        <p:spPr>
+          <a:xfrm>
+            <a:off x="4251960" y="4480560"/>
+            <a:ext cx="3429000" cy="548640"/>
+          </a:xfrm>
+          <a:prstGeom prst="rect">
+            <a:avLst/>
+          </a:prstGeom>
+          <a:noFill/>
+        </p:spPr>
+        <p:txBody>
+          <a:bodyPr wrap="square" anchor="t">
+            <a:spAutoFit/>
+          </a:bodyPr>
+          <a:lstStyle/>
+          <a:p>
+            <a:pPr algn="ctr">
+              <a:lnSpc>
+                <a:spcPct val="100000"/>
+              </a:lnSpc>
+            </a:pPr>
+            <a:r>
+              <a:rPr sz="1400" b="0" i="0">
+                <a:solidFill>
+                  <a:srgbClr val="B0B8C2"/>
+                </a:solidFill>
+                <a:latin typeface="Calibri"/>
+              </a:rPr>
+              <a:t>registries (ghcr.io + Docker Hub)</a:t>
+            </a:r>
+          </a:p>
+        </p:txBody>
+      </p:sp>
+      <p:sp>
+        <p:nvSpPr>
+          <p:cNvPr id="22" name="Rounded Rectangle 21"/>
+          <p:cNvSpPr/>
+          <p:nvPr/>
+        </p:nvSpPr>
+        <p:spPr>
+          <a:xfrm>
+            <a:off x="7955280" y="3474720"/>
+            <a:ext cx="3429000" cy="1645920"/>
+          </a:xfrm>
+          <a:prstGeom prst="roundRect">
+            <a:avLst/>
+          </a:prstGeom>
+          <a:solidFill>
+            <a:srgbClr val="1B2129"/>
+          </a:solidFill>
+          <a:ln w="12700">
+            <a:solidFill>
+              <a:srgbClr val="00D4AA"/>
+            </a:solidFill>
+          </a:ln>
+          <a:effectLst/>
+        </p:spPr>
+        <p:style>
+          <a:lnRef idx="1">
+            <a:schemeClr val="accent1"/>
+          </a:lnRef>
+          <a:fillRef idx="3">
+            <a:schemeClr val="accent1"/>
+          </a:fillRef>
+          <a:effectRef idx="2">
+            <a:schemeClr val="accent1"/>
+          </a:effectRef>
+          <a:fontRef idx="minor">
+            <a:schemeClr val="lt1"/>
+          </a:fontRef>
+        </p:style>
+        <p:txBody>
+          <a:bodyPr rtlCol="0" anchor="ctr"/>
+          <a:lstStyle/>
+          <a:p>
+            <a:pPr algn="ctr"/>
+          </a:p>
+        </p:txBody>
+      </p:sp>
+      <p:sp>
+        <p:nvSpPr>
+          <p:cNvPr id="23" name="TextBox 22"/>
+          <p:cNvSpPr txBox="1"/>
+          <p:nvPr/>
+        </p:nvSpPr>
+        <p:spPr>
+          <a:xfrm>
+            <a:off x="7955280" y="3657600"/>
+            <a:ext cx="3429000" cy="822960"/>
+          </a:xfrm>
+          <a:prstGeom prst="rect">
+            <a:avLst/>
+          </a:prstGeom>
+          <a:noFill/>
+        </p:spPr>
+        <p:txBody>
+          <a:bodyPr wrap="square" anchor="t">
+            <a:spAutoFit/>
+          </a:bodyPr>
+          <a:lstStyle/>
+          <a:p>
+            <a:pPr algn="ctr">
+              <a:lnSpc>
+                <a:spcPct val="100000"/>
+              </a:lnSpc>
+            </a:pPr>
+            <a:r>
+              <a:rPr sz="4000" b="1" i="0">
+                <a:solidFill>
+                  <a:srgbClr val="00D4AA"/>
+                </a:solidFill>
+                <a:latin typeface="Calibri"/>
+              </a:rPr>
+              <a:t>10+</a:t>
+            </a:r>
+          </a:p>
+        </p:txBody>
+      </p:sp>
+      <p:sp>
+        <p:nvSpPr>
+          <p:cNvPr id="24" name="TextBox 23"/>
+          <p:cNvSpPr txBox="1"/>
+          <p:nvPr/>
+        </p:nvSpPr>
+        <p:spPr>
+          <a:xfrm>
+            <a:off x="7955280" y="4480560"/>
+            <a:ext cx="3429000" cy="548640"/>
+          </a:xfrm>
+          <a:prstGeom prst="rect">
+            <a:avLst/>
+          </a:prstGeom>
+          <a:noFill/>
+        </p:spPr>
+        <p:txBody>
+          <a:bodyPr wrap="square" anchor="t">
+            <a:spAutoFit/>
+          </a:bodyPr>
+          <a:lstStyle/>
+          <a:p>
+            <a:pPr algn="ctr">
+              <a:lnSpc>
+                <a:spcPct val="100000"/>
+              </a:lnSpc>
+            </a:pPr>
+            <a:r>
+              <a:rPr sz="1400" b="0" i="0">
+                <a:solidFill>
+                  <a:srgbClr val="B0B8C2"/>
+                </a:solidFill>
+                <a:latin typeface="Calibri"/>
+              </a:rPr>
+              <a:t>telas no app Android</a:t>
+            </a:r>
+          </a:p>
+        </p:txBody>
+      </p:sp>
+    </p:spTree>
+  </p:cSld>
+  <p:clrMapOvr>
+    <a:masterClrMapping/>
+  </p:clrMapOvr>
+</p:sld>
+</file>
+
+<file path=ppt/slides/slide17.xml><?xml version="1.0" encoding="utf-8"?>
+<p:sld xmlns:a="http://schemas.openxmlformats.org/drawingml/2006/main" xmlns:p="http://schemas.openxmlformats.org/presentationml/2006/main" xmlns:r="http://schemas.openxmlformats.org/officeDocument/2006/relationships">
+  <p:cSld>
+    <p:bg>
+      <p:bgPr>
+        <a:solidFill>
+          <a:srgbClr val="161B22"/>
+        </a:solidFill>
+        <a:effectLst/>
+      </p:bgPr>
+    </p:bg>
+    <p:spTree>
+      <p:nvGrpSpPr>
+        <p:cNvPr id="1" name=""/>
+        <p:cNvGrpSpPr/>
+        <p:nvPr/>
+      </p:nvGrpSpPr>
+      <p:grpSpPr/>
+      <p:sp>
+        <p:nvSpPr>
+          <p:cNvPr id="2" name="Rectangle 1"/>
+          <p:cNvSpPr/>
+          <p:nvPr/>
+        </p:nvSpPr>
+        <p:spPr>
+          <a:xfrm>
+            <a:off x="0" y="0"/>
+            <a:ext cx="12191695" cy="1051560"/>
+          </a:xfrm>
+          <a:prstGeom prst="rect">
+            <a:avLst/>
+          </a:prstGeom>
+          <a:solidFill>
+            <a:srgbClr val="0D1117"/>
+          </a:solidFill>
+          <a:ln>
+            <a:noFill/>
+          </a:ln>
+          <a:effectLst/>
+        </p:spPr>
+        <p:style>
+          <a:lnRef idx="1">
+            <a:schemeClr val="accent1"/>
+          </a:lnRef>
+          <a:fillRef idx="3">
+            <a:schemeClr val="accent1"/>
+          </a:fillRef>
+          <a:effectRef idx="2">
+            <a:schemeClr val="accent1"/>
+          </a:effectRef>
+          <a:fontRef idx="minor">
+            <a:schemeClr val="lt1"/>
+          </a:fontRef>
+        </p:style>
+        <p:txBody>
+          <a:bodyPr rtlCol="0" anchor="ctr"/>
+          <a:lstStyle/>
+          <a:p>
+            <a:pPr algn="ctr"/>
+          </a:p>
+        </p:txBody>
+      </p:sp>
+      <p:sp>
+        <p:nvSpPr>
+          <p:cNvPr id="3" name="Rectangle 2"/>
+          <p:cNvSpPr/>
+          <p:nvPr/>
+        </p:nvSpPr>
+        <p:spPr>
+          <a:xfrm>
+            <a:off x="0" y="1051560"/>
+            <a:ext cx="12191695" cy="25400"/>
+          </a:xfrm>
+          <a:prstGeom prst="rect">
+            <a:avLst/>
+          </a:prstGeom>
+          <a:solidFill>
+            <a:srgbClr val="00D4AA"/>
+          </a:solidFill>
+          <a:ln>
+            <a:noFill/>
+          </a:ln>
+          <a:effectLst/>
+        </p:spPr>
+        <p:style>
+          <a:lnRef idx="1">
+            <a:schemeClr val="accent1"/>
+          </a:lnRef>
+          <a:fillRef idx="3">
+            <a:schemeClr val="accent1"/>
+          </a:fillRef>
+          <a:effectRef idx="2">
+            <a:schemeClr val="accent1"/>
+          </a:effectRef>
+          <a:fontRef idx="minor">
+            <a:schemeClr val="lt1"/>
+          </a:fontRef>
+        </p:style>
+        <p:txBody>
+          <a:bodyPr rtlCol="0" anchor="ctr"/>
+          <a:lstStyle/>
+          <a:p>
+            <a:pPr algn="ctr"/>
+          </a:p>
+        </p:txBody>
+      </p:sp>
+      <p:sp>
+        <p:nvSpPr>
+          <p:cNvPr id="4" name="TextBox 3"/>
+          <p:cNvSpPr txBox="1"/>
+          <p:nvPr/>
+        </p:nvSpPr>
+        <p:spPr>
+          <a:xfrm>
+            <a:off x="548640" y="320040"/>
+            <a:ext cx="8229600" cy="365760"/>
+          </a:xfrm>
+          <a:prstGeom prst="rect">
+            <a:avLst/>
+          </a:prstGeom>
+          <a:noFill/>
+        </p:spPr>
+        <p:txBody>
+          <a:bodyPr wrap="square" anchor="t">
+            <a:spAutoFit/>
+          </a:bodyPr>
+          <a:lstStyle/>
+          <a:p>
+            <a:pPr algn="l">
+              <a:lnSpc>
+                <a:spcPct val="100000"/>
+              </a:lnSpc>
+            </a:pPr>
+            <a:r>
+              <a:rPr sz="1400" b="1" i="0">
+                <a:solidFill>
+                  <a:srgbClr val="00D4AA"/>
+                </a:solidFill>
+                <a:latin typeface="Calibri"/>
+              </a:rPr>
+              <a:t>PRÓXIMOS PASSOS</a:t>
+            </a:r>
+          </a:p>
+        </p:txBody>
+      </p:sp>
+      <p:sp>
+        <p:nvSpPr>
+          <p:cNvPr id="5" name="TextBox 4"/>
+          <p:cNvSpPr txBox="1"/>
+          <p:nvPr/>
+        </p:nvSpPr>
+        <p:spPr>
+          <a:xfrm>
+            <a:off x="548640" y="566928"/>
+            <a:ext cx="10515600" cy="548640"/>
+          </a:xfrm>
+          <a:prstGeom prst="rect">
+            <a:avLst/>
+          </a:prstGeom>
+          <a:noFill/>
+        </p:spPr>
+        <p:txBody>
+          <a:bodyPr wrap="square" anchor="t">
+            <a:spAutoFit/>
+          </a:bodyPr>
+          <a:lstStyle/>
+          <a:p>
+            <a:pPr algn="l">
+              <a:lnSpc>
+                <a:spcPct val="100000"/>
+              </a:lnSpc>
+            </a:pPr>
+            <a:r>
+              <a:rPr sz="2600" b="1" i="0">
+                <a:solidFill>
+                  <a:srgbClr val="FFFFFF"/>
+                </a:solidFill>
+                <a:latin typeface="Calibri"/>
+              </a:rPr>
+              <a:t>Pendências em aberto</a:t>
+            </a:r>
+          </a:p>
+        </p:txBody>
+      </p:sp>
+      <p:sp>
+        <p:nvSpPr>
+          <p:cNvPr id="6" name="TextBox 5"/>
+          <p:cNvSpPr txBox="1"/>
+          <p:nvPr/>
+        </p:nvSpPr>
+        <p:spPr>
+          <a:xfrm>
+            <a:off x="11277295" y="6446520"/>
+            <a:ext cx="640080" cy="320040"/>
+          </a:xfrm>
+          <a:prstGeom prst="rect">
+            <a:avLst/>
+          </a:prstGeom>
+          <a:noFill/>
+        </p:spPr>
+        <p:txBody>
+          <a:bodyPr wrap="square" anchor="t">
+            <a:spAutoFit/>
+          </a:bodyPr>
+          <a:lstStyle/>
+          <a:p>
+            <a:pPr algn="r">
+              <a:lnSpc>
+                <a:spcPct val="100000"/>
+              </a:lnSpc>
+            </a:pPr>
+            <a:r>
+              <a:rPr sz="1100" b="0" i="0">
+                <a:solidFill>
+                  <a:srgbClr val="B0B8C2"/>
+                </a:solidFill>
+                <a:latin typeface="Calibri"/>
+              </a:rPr>
+              <a:t>17</a:t>
+            </a:r>
+          </a:p>
+        </p:txBody>
+      </p:sp>
+      <p:sp>
+        <p:nvSpPr>
+          <p:cNvPr id="7" name="TextBox 6"/>
+          <p:cNvSpPr txBox="1"/>
+          <p:nvPr/>
+        </p:nvSpPr>
+        <p:spPr>
+          <a:xfrm>
+            <a:off x="548640" y="1463040"/>
+            <a:ext cx="10789920" cy="4572000"/>
+          </a:xfrm>
+          <a:prstGeom prst="rect">
+            <a:avLst/>
+          </a:prstGeom>
+          <a:noFill/>
+        </p:spPr>
+        <p:txBody>
+          <a:bodyPr wrap="square">
+            <a:spAutoFit/>
+          </a:bodyPr>
+          <a:lstStyle/>
+          <a:p>
+            <a:pPr>
+              <a:lnSpc>
+                <a:spcPct val="112000"/>
+              </a:lnSpc>
+              <a:spcAft>
+                <a:spcPts val="800"/>
+              </a:spcAft>
+            </a:pPr>
+            <a:r>
+              <a:rPr sz="1800">
+                <a:solidFill>
+                  <a:srgbClr val="FFFFFF"/>
+                </a:solidFill>
+                <a:latin typeface="Calibri"/>
+              </a:rPr>
+              <a:t>•  Configurar secrets DOCKERHUB_USERNAME / DOCKERHUB_TOKEN no GitHub para o build-and-push publicar de fato</a:t>
+            </a:r>
+          </a:p>
+          <a:p>
+            <a:pPr>
+              <a:lnSpc>
+                <a:spcPct val="112000"/>
+              </a:lnSpc>
+              <a:spcAft>
+                <a:spcPts val="800"/>
+              </a:spcAft>
+            </a:pPr>
+            <a:r>
+              <a:rPr sz="1800">
+                <a:solidFill>
+                  <a:srgbClr val="FFFFFF"/>
+                </a:solidFill>
+                <a:latin typeface="Calibri"/>
+              </a:rPr>
+              <a:t>•  Decidir o destino de pose-service/ai/dataset_generator.py (imports não usados de thresholds de LUNGE/ROW — início de uma extensão da IA desconectada)</a:t>
+            </a:r>
+          </a:p>
+          <a:p>
+            <a:pPr>
+              <a:lnSpc>
+                <a:spcPct val="112000"/>
+              </a:lnSpc>
+              <a:spcAft>
+                <a:spcPts val="800"/>
+              </a:spcAft>
+            </a:pPr>
+            <a:r>
+              <a:rPr sz="1800">
+                <a:solidFill>
+                  <a:srgbClr val="FFFFFF"/>
+                </a:solidFill>
+                <a:latin typeface="Calibri"/>
+              </a:rPr>
+              <a:t>•  Configurar secrets STAGING_HOST/USER/SSH_KEY para habilitar o deploy automático em staging</a:t>
+            </a:r>
+          </a:p>
+          <a:p>
+            <a:pPr>
+              <a:lnSpc>
+                <a:spcPct val="112000"/>
+              </a:lnSpc>
+              <a:spcAft>
+                <a:spcPts val="800"/>
+              </a:spcAft>
+            </a:pPr>
+            <a:r>
+              <a:rPr sz="1800">
+                <a:solidFill>
+                  <a:srgbClr val="FFFFFF"/>
+                </a:solidFill>
+                <a:latin typeface="Calibri"/>
+              </a:rPr>
+              <a:t>•  Iniciar Sprint 2 (produto/experiência) e Sprint 3 (plataforma/escala)</a:t>
+            </a:r>
+          </a:p>
+          <a:p>
+            <a:pPr>
+              <a:lnSpc>
+                <a:spcPct val="112000"/>
+              </a:lnSpc>
+              <a:spcAft>
+                <a:spcPts val="800"/>
+              </a:spcAft>
+            </a:pPr>
+            <a:r>
+              <a:rPr sz="1800">
+                <a:solidFill>
+                  <a:srgbClr val="FFFFFF"/>
+                </a:solidFill>
+                <a:latin typeface="Calibri"/>
+              </a:rPr>
+              <a:t>•  Avaliar retomar o motor de IA no futuro, mas treinado com dados reais anotados (não sintéticos)</a:t>
+            </a:r>
+          </a:p>
+        </p:txBody>
+      </p:sp>
+    </p:spTree>
+  </p:cSld>
+  <p:clrMapOvr>
+    <a:masterClrMapping/>
+  </p:clrMapOvr>
+</p:sld>
+</file>
+
+<file path=ppt/slides/slide18.xml><?xml version="1.0" encoding="utf-8"?>
 <p:sld xmlns:a="http://schemas.openxmlformats.org/drawingml/2006/main" xmlns:p="http://schemas.openxmlformats.org/presentationml/2006/main" xmlns:r="http://schemas.openxmlformats.org/officeDocument/2006/relationships">
   <p:cSld>
     <p:bg>
@@ -6907,7 +7692,7 @@
                 </a:solidFill>
                 <a:latin typeface="Calibri"/>
               </a:rPr>
-              <a:t>GymVision — histórico do projeto até o CI/CD</a:t>
+              <a:t>GymVision — do Sprint 0 ao CI/CD</a:t>
             </a:r>
           </a:p>
         </p:txBody>
@@ -6946,7 +7731,7 @@
                 </a:solidFill>
                 <a:latin typeface="Calibri"/>
               </a:rPr>
-              <a:t>16</a:t>
+              <a:t>18</a:t>
             </a:r>
           </a:p>
         </p:txBody>
@@ -7074,7 +7859,7 @@
         <p:spPr>
           <a:xfrm>
             <a:off x="548640" y="320040"/>
-            <a:ext cx="7315200" cy="365760"/>
+            <a:ext cx="8229600" cy="365760"/>
           </a:xfrm>
           <a:prstGeom prst="rect">
             <a:avLst/>
@@ -7443,7 +8228,7 @@
         <p:spPr>
           <a:xfrm>
             <a:off x="548640" y="320040"/>
-            <a:ext cx="7315200" cy="365760"/>
+            <a:ext cx="8229600" cy="365760"/>
           </a:xfrm>
           <a:prstGeom prst="rect">
             <a:avLst/>
@@ -8215,7 +9000,7 @@
         <p:spPr>
           <a:xfrm>
             <a:off x="548640" y="320040"/>
-            <a:ext cx="7315200" cy="365760"/>
+            <a:ext cx="8229600" cy="365760"/>
           </a:xfrm>
           <a:prstGeom prst="rect">
             <a:avLst/>
@@ -8279,7 +9064,7 @@
                 </a:solidFill>
                 <a:latin typeface="Calibri"/>
               </a:rPr>
-              <a:t>Do primeiro commit ao CI/CD</a:t>
+              <a:t>Organização por Sprints</a:t>
             </a:r>
           </a:p>
         </p:txBody>
@@ -8325,20 +9110,144 @@
       </p:sp>
       <p:sp>
         <p:nvSpPr>
-          <p:cNvPr id="7" name="Rectangle 6"/>
+          <p:cNvPr id="7" name="TextBox 6"/>
+          <p:cNvSpPr txBox="1"/>
+          <p:nvPr/>
+        </p:nvSpPr>
+        <p:spPr>
+          <a:xfrm>
+            <a:off x="548640" y="1481328"/>
+            <a:ext cx="2377440" cy="365760"/>
+          </a:xfrm>
+          <a:prstGeom prst="rect">
+            <a:avLst/>
+          </a:prstGeom>
+          <a:noFill/>
+        </p:spPr>
+        <p:txBody>
+          <a:bodyPr wrap="square" anchor="t">
+            <a:spAutoFit/>
+          </a:bodyPr>
+          <a:lstStyle/>
+          <a:p>
+            <a:pPr algn="l">
+              <a:lnSpc>
+                <a:spcPct val="100000"/>
+              </a:lnSpc>
+            </a:pPr>
+            <a:r>
+              <a:rPr sz="1600" b="1" i="0">
+                <a:solidFill>
+                  <a:srgbClr val="FFFFFF"/>
+                </a:solidFill>
+                <a:latin typeface="Calibri"/>
+              </a:rPr>
+              <a:t>Sprint 0</a:t>
+            </a:r>
+          </a:p>
+        </p:txBody>
+      </p:sp>
+      <p:sp>
+        <p:nvSpPr>
+          <p:cNvPr id="8" name="Rounded Rectangle 7"/>
           <p:cNvSpPr/>
           <p:nvPr/>
         </p:nvSpPr>
         <p:spPr>
           <a:xfrm>
-            <a:off x="640080" y="2331720"/>
-            <a:ext cx="10881360" cy="38100"/>
-          </a:xfrm>
-          <a:prstGeom prst="rect">
+            <a:off x="3108960" y="1417320"/>
+            <a:ext cx="6400800" cy="502920"/>
+          </a:xfrm>
+          <a:prstGeom prst="roundRect">
             <a:avLst/>
           </a:prstGeom>
           <a:solidFill>
-            <a:srgbClr val="00D4AA"/>
+            <a:srgbClr val="22C55E"/>
+          </a:solidFill>
+          <a:ln w="19050">
+            <a:solidFill>
+              <a:srgbClr val="00D4AA"/>
+            </a:solidFill>
+          </a:ln>
+          <a:effectLst/>
+        </p:spPr>
+        <p:style>
+          <a:lnRef idx="1">
+            <a:schemeClr val="accent1"/>
+          </a:lnRef>
+          <a:fillRef idx="3">
+            <a:schemeClr val="accent1"/>
+          </a:fillRef>
+          <a:effectRef idx="2">
+            <a:schemeClr val="accent1"/>
+          </a:effectRef>
+          <a:fontRef idx="minor">
+            <a:schemeClr val="lt1"/>
+          </a:fontRef>
+        </p:style>
+        <p:txBody>
+          <a:bodyPr rtlCol="0" anchor="ctr"/>
+          <a:lstStyle/>
+          <a:p>
+            <a:pPr algn="ctr"/>
+          </a:p>
+        </p:txBody>
+      </p:sp>
+      <p:sp>
+        <p:nvSpPr>
+          <p:cNvPr id="9" name="TextBox 8"/>
+          <p:cNvSpPr txBox="1"/>
+          <p:nvPr/>
+        </p:nvSpPr>
+        <p:spPr>
+          <a:xfrm>
+            <a:off x="3246120" y="1481328"/>
+            <a:ext cx="6126480" cy="365760"/>
+          </a:xfrm>
+          <a:prstGeom prst="rect">
+            <a:avLst/>
+          </a:prstGeom>
+          <a:noFill/>
+        </p:spPr>
+        <p:txBody>
+          <a:bodyPr wrap="square" anchor="t">
+            <a:spAutoFit/>
+          </a:bodyPr>
+          <a:lstStyle/>
+          <a:p>
+            <a:pPr algn="l">
+              <a:lnSpc>
+                <a:spcPct val="100000"/>
+              </a:lnSpc>
+            </a:pPr>
+            <a:r>
+              <a:rPr sz="1250" b="0" i="0">
+                <a:solidFill>
+                  <a:srgbClr val="FFFFFF"/>
+                </a:solidFill>
+                <a:latin typeface="Calibri"/>
+              </a:rPr>
+              <a:t>MVP — fundação do produto (23 itens)</a:t>
+            </a:r>
+          </a:p>
+        </p:txBody>
+      </p:sp>
+      <p:sp>
+        <p:nvSpPr>
+          <p:cNvPr id="10" name="Rounded Rectangle 9"/>
+          <p:cNvSpPr/>
+          <p:nvPr/>
+        </p:nvSpPr>
+        <p:spPr>
+          <a:xfrm>
+            <a:off x="9738360" y="1481328"/>
+            <a:ext cx="1554480" cy="365760"/>
+          </a:xfrm>
+          <a:prstGeom prst="roundRect">
+            <a:avLst/>
+          </a:prstGeom>
+          <a:solidFill>
+            <a:srgbClr val="22C55E"/>
           </a:solidFill>
           <a:ln>
             <a:noFill/>
@@ -8364,25 +9273,157 @@
           <a:lstStyle/>
           <a:p>
             <a:pPr algn="ctr"/>
-          </a:p>
-        </p:txBody>
-      </p:sp>
-      <p:sp>
-        <p:nvSpPr>
-          <p:cNvPr id="8" name="Oval 7"/>
+            <a:r>
+              <a:rPr sz="1200" b="1">
+                <a:solidFill>
+                  <a:srgbClr val="FFFFFF"/>
+                </a:solidFill>
+              </a:rPr>
+              <a:t>CONCLUÍDO</a:t>
+            </a:r>
+          </a:p>
+        </p:txBody>
+      </p:sp>
+      <p:sp>
+        <p:nvSpPr>
+          <p:cNvPr id="11" name="TextBox 10"/>
+          <p:cNvSpPr txBox="1"/>
+          <p:nvPr/>
+        </p:nvSpPr>
+        <p:spPr>
+          <a:xfrm>
+            <a:off x="548640" y="2350008"/>
+            <a:ext cx="2377440" cy="365760"/>
+          </a:xfrm>
+          <a:prstGeom prst="rect">
+            <a:avLst/>
+          </a:prstGeom>
+          <a:noFill/>
+        </p:spPr>
+        <p:txBody>
+          <a:bodyPr wrap="square" anchor="t">
+            <a:spAutoFit/>
+          </a:bodyPr>
+          <a:lstStyle/>
+          <a:p>
+            <a:pPr algn="l">
+              <a:lnSpc>
+                <a:spcPct val="100000"/>
+              </a:lnSpc>
+            </a:pPr>
+            <a:r>
+              <a:rPr sz="1600" b="1" i="0">
+                <a:solidFill>
+                  <a:srgbClr val="FFFFFF"/>
+                </a:solidFill>
+                <a:latin typeface="Calibri"/>
+              </a:rPr>
+              <a:t>Sprint 1</a:t>
+            </a:r>
+          </a:p>
+        </p:txBody>
+      </p:sp>
+      <p:sp>
+        <p:nvSpPr>
+          <p:cNvPr id="12" name="Rounded Rectangle 11"/>
           <p:cNvSpPr/>
           <p:nvPr/>
         </p:nvSpPr>
         <p:spPr>
           <a:xfrm>
-            <a:off x="1464564" y="2249424"/>
-            <a:ext cx="164592" cy="164592"/>
-          </a:xfrm>
-          <a:prstGeom prst="ellipse">
+            <a:off x="3108960" y="2286000"/>
+            <a:ext cx="6400800" cy="502920"/>
+          </a:xfrm>
+          <a:prstGeom prst="roundRect">
             <a:avLst/>
           </a:prstGeom>
           <a:solidFill>
-            <a:srgbClr val="00D4AA"/>
+            <a:srgbClr val="22C55E"/>
+          </a:solidFill>
+          <a:ln w="19050">
+            <a:solidFill>
+              <a:srgbClr val="00D4AA"/>
+            </a:solidFill>
+          </a:ln>
+          <a:effectLst/>
+        </p:spPr>
+        <p:style>
+          <a:lnRef idx="1">
+            <a:schemeClr val="accent1"/>
+          </a:lnRef>
+          <a:fillRef idx="3">
+            <a:schemeClr val="accent1"/>
+          </a:fillRef>
+          <a:effectRef idx="2">
+            <a:schemeClr val="accent1"/>
+          </a:effectRef>
+          <a:fontRef idx="minor">
+            <a:schemeClr val="lt1"/>
+          </a:fontRef>
+        </p:style>
+        <p:txBody>
+          <a:bodyPr rtlCol="0" anchor="ctr"/>
+          <a:lstStyle/>
+          <a:p>
+            <a:pPr algn="ctr"/>
+          </a:p>
+        </p:txBody>
+      </p:sp>
+      <p:sp>
+        <p:nvSpPr>
+          <p:cNvPr id="13" name="TextBox 12"/>
+          <p:cNvSpPr txBox="1"/>
+          <p:nvPr/>
+        </p:nvSpPr>
+        <p:spPr>
+          <a:xfrm>
+            <a:off x="3246120" y="2350008"/>
+            <a:ext cx="6126480" cy="365760"/>
+          </a:xfrm>
+          <a:prstGeom prst="rect">
+            <a:avLst/>
+          </a:prstGeom>
+          <a:noFill/>
+        </p:spPr>
+        <p:txBody>
+          <a:bodyPr wrap="square" anchor="t">
+            <a:spAutoFit/>
+          </a:bodyPr>
+          <a:lstStyle/>
+          <a:p>
+            <a:pPr algn="l">
+              <a:lnSpc>
+                <a:spcPct val="100000"/>
+              </a:lnSpc>
+            </a:pPr>
+            <a:r>
+              <a:rPr sz="1250" b="0" i="0">
+                <a:solidFill>
+                  <a:srgbClr val="FFFFFF"/>
+                </a:solidFill>
+                <a:latin typeface="Calibri"/>
+              </a:rPr>
+              <a:t>Fundação e Segurança + experimento de IA</a:t>
+            </a:r>
+          </a:p>
+        </p:txBody>
+      </p:sp>
+      <p:sp>
+        <p:nvSpPr>
+          <p:cNvPr id="14" name="Rounded Rectangle 13"/>
+          <p:cNvSpPr/>
+          <p:nvPr/>
+        </p:nvSpPr>
+        <p:spPr>
+          <a:xfrm>
+            <a:off x="9738360" y="2350008"/>
+            <a:ext cx="1554480" cy="365760"/>
+          </a:xfrm>
+          <a:prstGeom prst="roundRect">
+            <a:avLst/>
+          </a:prstGeom>
+          <a:solidFill>
+            <a:srgbClr val="22C55E"/>
           </a:solidFill>
           <a:ln>
             <a:noFill/>
@@ -8408,19 +9449,27 @@
           <a:lstStyle/>
           <a:p>
             <a:pPr algn="ctr"/>
-          </a:p>
-        </p:txBody>
-      </p:sp>
-      <p:sp>
-        <p:nvSpPr>
-          <p:cNvPr id="9" name="TextBox 8"/>
+            <a:r>
+              <a:rPr sz="1200" b="1">
+                <a:solidFill>
+                  <a:srgbClr val="FFFFFF"/>
+                </a:solidFill>
+              </a:rPr>
+              <a:t>CONCLUÍDO</a:t>
+            </a:r>
+          </a:p>
+        </p:txBody>
+      </p:sp>
+      <p:sp>
+        <p:nvSpPr>
+          <p:cNvPr id="15" name="TextBox 14"/>
           <p:cNvSpPr txBox="1"/>
           <p:nvPr/>
         </p:nvSpPr>
         <p:spPr>
           <a:xfrm>
-            <a:off x="640080" y="1783080"/>
-            <a:ext cx="1813560" cy="365760"/>
+            <a:off x="548640" y="3218688"/>
+            <a:ext cx="2377440" cy="365760"/>
           </a:xfrm>
           <a:prstGeom prst="rect">
             <a:avLst/>
@@ -8433,33 +9482,79 @@
           </a:bodyPr>
           <a:lstStyle/>
           <a:p>
-            <a:pPr algn="ctr">
+            <a:pPr algn="l">
               <a:lnSpc>
                 <a:spcPct val="100000"/>
               </a:lnSpc>
             </a:pPr>
             <a:r>
-              <a:rPr sz="1300" b="1" i="0">
-                <a:solidFill>
-                  <a:srgbClr val="00D4AA"/>
-                </a:solidFill>
-                <a:latin typeface="Calibri"/>
-              </a:rPr>
-              <a:t>15-19/05</a:t>
-            </a:r>
-          </a:p>
-        </p:txBody>
-      </p:sp>
-      <p:sp>
-        <p:nvSpPr>
-          <p:cNvPr id="10" name="TextBox 9"/>
+              <a:rPr sz="1600" b="1" i="0">
+                <a:solidFill>
+                  <a:srgbClr val="FFFFFF"/>
+                </a:solidFill>
+                <a:latin typeface="Calibri"/>
+              </a:rPr>
+              <a:t>Sprint 1 (hardening)</a:t>
+            </a:r>
+          </a:p>
+        </p:txBody>
+      </p:sp>
+      <p:sp>
+        <p:nvSpPr>
+          <p:cNvPr id="16" name="Rounded Rectangle 15"/>
+          <p:cNvSpPr/>
+          <p:nvPr/>
+        </p:nvSpPr>
+        <p:spPr>
+          <a:xfrm>
+            <a:off x="3108960" y="3154680"/>
+            <a:ext cx="6400800" cy="502920"/>
+          </a:xfrm>
+          <a:prstGeom prst="roundRect">
+            <a:avLst/>
+          </a:prstGeom>
+          <a:solidFill>
+            <a:srgbClr val="22C55E"/>
+          </a:solidFill>
+          <a:ln w="19050">
+            <a:solidFill>
+              <a:srgbClr val="00D4AA"/>
+            </a:solidFill>
+          </a:ln>
+          <a:effectLst/>
+        </p:spPr>
+        <p:style>
+          <a:lnRef idx="1">
+            <a:schemeClr val="accent1"/>
+          </a:lnRef>
+          <a:fillRef idx="3">
+            <a:schemeClr val="accent1"/>
+          </a:fillRef>
+          <a:effectRef idx="2">
+            <a:schemeClr val="accent1"/>
+          </a:effectRef>
+          <a:fontRef idx="minor">
+            <a:schemeClr val="lt1"/>
+          </a:fontRef>
+        </p:style>
+        <p:txBody>
+          <a:bodyPr rtlCol="0" anchor="ctr"/>
+          <a:lstStyle/>
+          <a:p>
+            <a:pPr algn="ctr"/>
+          </a:p>
+        </p:txBody>
+      </p:sp>
+      <p:sp>
+        <p:nvSpPr>
+          <p:cNvPr id="17" name="TextBox 16"/>
           <p:cNvSpPr txBox="1"/>
           <p:nvPr/>
         </p:nvSpPr>
         <p:spPr>
           <a:xfrm>
-            <a:off x="685800" y="2697480"/>
-            <a:ext cx="1722120" cy="457200"/>
+            <a:off x="3246120" y="3218688"/>
+            <a:ext cx="6126480" cy="365760"/>
           </a:xfrm>
           <a:prstGeom prst="rect">
             <a:avLst/>
@@ -8472,78 +9567,39 @@
           </a:bodyPr>
           <a:lstStyle/>
           <a:p>
-            <a:pPr algn="ctr">
+            <a:pPr algn="l">
               <a:lnSpc>
                 <a:spcPct val="100000"/>
               </a:lnSpc>
             </a:pPr>
             <a:r>
-              <a:rPr sz="1500" b="1" i="0">
+              <a:rPr sz="1250" b="0" i="0">
                 <a:solidFill>
                   <a:srgbClr val="FFFFFF"/>
                 </a:solidFill>
                 <a:latin typeface="Calibri"/>
               </a:rPr>
-              <a:t>Fundação</a:t>
-            </a:r>
-          </a:p>
-        </p:txBody>
-      </p:sp>
-      <p:sp>
-        <p:nvSpPr>
-          <p:cNvPr id="11" name="TextBox 10"/>
-          <p:cNvSpPr txBox="1"/>
-          <p:nvPr/>
-        </p:nvSpPr>
-        <p:spPr>
-          <a:xfrm>
-            <a:off x="685800" y="3154680"/>
-            <a:ext cx="1722120" cy="1188720"/>
-          </a:xfrm>
-          <a:prstGeom prst="rect">
-            <a:avLst/>
-          </a:prstGeom>
-          <a:noFill/>
-        </p:spPr>
-        <p:txBody>
-          <a:bodyPr wrap="square" anchor="t">
-            <a:spAutoFit/>
-          </a:bodyPr>
-          <a:lstStyle/>
-          <a:p>
-            <a:pPr algn="ctr">
-              <a:lnSpc>
-                <a:spcPct val="115000"/>
-              </a:lnSpc>
-            </a:pPr>
-            <a:r>
-              <a:rPr sz="1150" b="0" i="0">
-                <a:solidFill>
-                  <a:srgbClr val="B0B8C2"/>
-                </a:solidFill>
-                <a:latin typeface="Calibri"/>
-              </a:rPr>
-              <a:t>Pose-service + detecção de landmarks</a:t>
-            </a:r>
-          </a:p>
-        </p:txBody>
-      </p:sp>
-      <p:sp>
-        <p:nvSpPr>
-          <p:cNvPr id="12" name="Oval 11"/>
+              <a:t>Reversão da IA, correções reais, CI/CD + Docker Hub</a:t>
+            </a:r>
+          </a:p>
+        </p:txBody>
+      </p:sp>
+      <p:sp>
+        <p:nvSpPr>
+          <p:cNvPr id="18" name="Rounded Rectangle 17"/>
           <p:cNvSpPr/>
           <p:nvPr/>
         </p:nvSpPr>
         <p:spPr>
           <a:xfrm>
-            <a:off x="3278124" y="2249424"/>
-            <a:ext cx="164592" cy="164592"/>
-          </a:xfrm>
-          <a:prstGeom prst="ellipse">
+            <a:off x="9738360" y="3218688"/>
+            <a:ext cx="1554480" cy="365760"/>
+          </a:xfrm>
+          <a:prstGeom prst="roundRect">
             <a:avLst/>
           </a:prstGeom>
           <a:solidFill>
-            <a:srgbClr val="00D4AA"/>
+            <a:srgbClr val="22C55E"/>
           </a:solidFill>
           <a:ln>
             <a:noFill/>
@@ -8569,19 +9625,27 @@
           <a:lstStyle/>
           <a:p>
             <a:pPr algn="ctr"/>
-          </a:p>
-        </p:txBody>
-      </p:sp>
-      <p:sp>
-        <p:nvSpPr>
-          <p:cNvPr id="13" name="TextBox 12"/>
+            <a:r>
+              <a:rPr sz="1200" b="1">
+                <a:solidFill>
+                  <a:srgbClr val="FFFFFF"/>
+                </a:solidFill>
+              </a:rPr>
+              <a:t>CONCLUÍDO</a:t>
+            </a:r>
+          </a:p>
+        </p:txBody>
+      </p:sp>
+      <p:sp>
+        <p:nvSpPr>
+          <p:cNvPr id="19" name="TextBox 18"/>
           <p:cNvSpPr txBox="1"/>
           <p:nvPr/>
         </p:nvSpPr>
         <p:spPr>
           <a:xfrm>
-            <a:off x="2453640" y="1783080"/>
-            <a:ext cx="1813560" cy="365760"/>
+            <a:off x="548640" y="4087368"/>
+            <a:ext cx="2377440" cy="365760"/>
           </a:xfrm>
           <a:prstGeom prst="rect">
             <a:avLst/>
@@ -8594,33 +9658,77 @@
           </a:bodyPr>
           <a:lstStyle/>
           <a:p>
-            <a:pPr algn="ctr">
+            <a:pPr algn="l">
               <a:lnSpc>
                 <a:spcPct val="100000"/>
               </a:lnSpc>
             </a:pPr>
             <a:r>
-              <a:rPr sz="1300" b="1" i="0">
-                <a:solidFill>
-                  <a:srgbClr val="00D4AA"/>
-                </a:solidFill>
-                <a:latin typeface="Calibri"/>
-              </a:rPr>
-              <a:t>09/06</a:t>
-            </a:r>
-          </a:p>
-        </p:txBody>
-      </p:sp>
-      <p:sp>
-        <p:nvSpPr>
-          <p:cNvPr id="14" name="TextBox 13"/>
+              <a:rPr sz="1600" b="1" i="0">
+                <a:solidFill>
+                  <a:srgbClr val="FFFFFF"/>
+                </a:solidFill>
+                <a:latin typeface="Calibri"/>
+              </a:rPr>
+              <a:t>Sprint 2</a:t>
+            </a:r>
+          </a:p>
+        </p:txBody>
+      </p:sp>
+      <p:sp>
+        <p:nvSpPr>
+          <p:cNvPr id="20" name="Rounded Rectangle 19"/>
+          <p:cNvSpPr/>
+          <p:nvPr/>
+        </p:nvSpPr>
+        <p:spPr>
+          <a:xfrm>
+            <a:off x="3108960" y="4023360"/>
+            <a:ext cx="3520440" cy="502920"/>
+          </a:xfrm>
+          <a:prstGeom prst="roundRect">
+            <a:avLst/>
+          </a:prstGeom>
+          <a:noFill/>
+          <a:ln w="19050">
+            <a:solidFill>
+              <a:srgbClr val="4A525E"/>
+            </a:solidFill>
+          </a:ln>
+          <a:effectLst/>
+        </p:spPr>
+        <p:style>
+          <a:lnRef idx="1">
+            <a:schemeClr val="accent1"/>
+          </a:lnRef>
+          <a:fillRef idx="3">
+            <a:schemeClr val="accent1"/>
+          </a:fillRef>
+          <a:effectRef idx="2">
+            <a:schemeClr val="accent1"/>
+          </a:effectRef>
+          <a:fontRef idx="minor">
+            <a:schemeClr val="lt1"/>
+          </a:fontRef>
+        </p:style>
+        <p:txBody>
+          <a:bodyPr rtlCol="0" anchor="ctr"/>
+          <a:lstStyle/>
+          <a:p>
+            <a:pPr algn="ctr"/>
+          </a:p>
+        </p:txBody>
+      </p:sp>
+      <p:sp>
+        <p:nvSpPr>
+          <p:cNvPr id="21" name="TextBox 20"/>
           <p:cNvSpPr txBox="1"/>
           <p:nvPr/>
         </p:nvSpPr>
         <p:spPr>
           <a:xfrm>
-            <a:off x="2499360" y="2697480"/>
-            <a:ext cx="1722120" cy="457200"/>
+            <a:off x="3246120" y="4087368"/>
+            <a:ext cx="3246120" cy="365760"/>
           </a:xfrm>
           <a:prstGeom prst="rect">
             <a:avLst/>
@@ -8633,78 +9741,39 @@
           </a:bodyPr>
           <a:lstStyle/>
           <a:p>
-            <a:pPr algn="ctr">
+            <a:pPr algn="l">
               <a:lnSpc>
                 <a:spcPct val="100000"/>
               </a:lnSpc>
             </a:pPr>
             <a:r>
-              <a:rPr sz="1500" b="1" i="0">
-                <a:solidFill>
-                  <a:srgbClr val="FFFFFF"/>
-                </a:solidFill>
-                <a:latin typeface="Calibri"/>
-              </a:rPr>
-              <a:t>Refatoração</a:t>
-            </a:r>
-          </a:p>
-        </p:txBody>
-      </p:sp>
-      <p:sp>
-        <p:nvSpPr>
-          <p:cNvPr id="15" name="TextBox 14"/>
-          <p:cNvSpPr txBox="1"/>
-          <p:nvPr/>
-        </p:nvSpPr>
-        <p:spPr>
-          <a:xfrm>
-            <a:off x="2499360" y="3154680"/>
-            <a:ext cx="1722120" cy="1188720"/>
-          </a:xfrm>
-          <a:prstGeom prst="rect">
-            <a:avLst/>
-          </a:prstGeom>
-          <a:noFill/>
-        </p:spPr>
-        <p:txBody>
-          <a:bodyPr wrap="square" anchor="t">
-            <a:spAutoFit/>
-          </a:bodyPr>
-          <a:lstStyle/>
-          <a:p>
-            <a:pPr algn="ctr">
-              <a:lnSpc>
-                <a:spcPct val="115000"/>
-              </a:lnSpc>
-            </a:pPr>
-            <a:r>
-              <a:rPr sz="1150" b="0" i="0">
+              <a:rPr sz="1250" b="0" i="0">
                 <a:solidFill>
                   <a:srgbClr val="B0B8C2"/>
                 </a:solidFill>
                 <a:latin typeface="Calibri"/>
               </a:rPr>
-              <a:t>Modelo de pose + app Android (Compose)</a:t>
-            </a:r>
-          </a:p>
-        </p:txBody>
-      </p:sp>
-      <p:sp>
-        <p:nvSpPr>
-          <p:cNvPr id="16" name="Oval 15"/>
+              <a:t>Produto e Experiência (relatórios, auto-detecção, FCM)</a:t>
+            </a:r>
+          </a:p>
+        </p:txBody>
+      </p:sp>
+      <p:sp>
+        <p:nvSpPr>
+          <p:cNvPr id="22" name="Rounded Rectangle 21"/>
           <p:cNvSpPr/>
           <p:nvPr/>
         </p:nvSpPr>
         <p:spPr>
           <a:xfrm>
-            <a:off x="5091684" y="2249424"/>
-            <a:ext cx="164592" cy="164592"/>
-          </a:xfrm>
-          <a:prstGeom prst="ellipse">
+            <a:off x="6858000" y="4087368"/>
+            <a:ext cx="1554480" cy="365760"/>
+          </a:xfrm>
+          <a:prstGeom prst="roundRect">
             <a:avLst/>
           </a:prstGeom>
           <a:solidFill>
-            <a:srgbClr val="00D4AA"/>
+            <a:srgbClr val="4A525E"/>
           </a:solidFill>
           <a:ln>
             <a:noFill/>
@@ -8730,19 +9799,27 @@
           <a:lstStyle/>
           <a:p>
             <a:pPr algn="ctr"/>
-          </a:p>
-        </p:txBody>
-      </p:sp>
-      <p:sp>
-        <p:nvSpPr>
-          <p:cNvPr id="17" name="TextBox 16"/>
+            <a:r>
+              <a:rPr sz="1200" b="1">
+                <a:solidFill>
+                  <a:srgbClr val="FFFFFF"/>
+                </a:solidFill>
+              </a:rPr>
+              <a:t>PLANEJADO</a:t>
+            </a:r>
+          </a:p>
+        </p:txBody>
+      </p:sp>
+      <p:sp>
+        <p:nvSpPr>
+          <p:cNvPr id="23" name="TextBox 22"/>
           <p:cNvSpPr txBox="1"/>
           <p:nvPr/>
         </p:nvSpPr>
         <p:spPr>
           <a:xfrm>
-            <a:off x="4267200" y="1783080"/>
-            <a:ext cx="1813560" cy="365760"/>
+            <a:off x="548640" y="4956048"/>
+            <a:ext cx="2377440" cy="365760"/>
           </a:xfrm>
           <a:prstGeom prst="rect">
             <a:avLst/>
@@ -8755,33 +9832,79 @@
           </a:bodyPr>
           <a:lstStyle/>
           <a:p>
-            <a:pPr algn="ctr">
+            <a:pPr algn="l">
               <a:lnSpc>
                 <a:spcPct val="100000"/>
               </a:lnSpc>
             </a:pPr>
             <a:r>
-              <a:rPr sz="1300" b="1" i="0">
-                <a:solidFill>
-                  <a:srgbClr val="00D4AA"/>
-                </a:solidFill>
-                <a:latin typeface="Calibri"/>
-              </a:rPr>
-              <a:t>18/06</a:t>
-            </a:r>
-          </a:p>
-        </p:txBody>
-      </p:sp>
-      <p:sp>
-        <p:nvSpPr>
-          <p:cNvPr id="18" name="TextBox 17"/>
+              <a:rPr sz="1600" b="1" i="0">
+                <a:solidFill>
+                  <a:srgbClr val="FFFFFF"/>
+                </a:solidFill>
+                <a:latin typeface="Calibri"/>
+              </a:rPr>
+              <a:t>Sprint 3</a:t>
+            </a:r>
+          </a:p>
+        </p:txBody>
+      </p:sp>
+      <p:sp>
+        <p:nvSpPr>
+          <p:cNvPr id="24" name="Rounded Rectangle 23"/>
+          <p:cNvSpPr/>
+          <p:nvPr/>
+        </p:nvSpPr>
+        <p:spPr>
+          <a:xfrm>
+            <a:off x="3108960" y="4892040"/>
+            <a:ext cx="4480559" cy="502920"/>
+          </a:xfrm>
+          <a:prstGeom prst="roundRect">
+            <a:avLst/>
+          </a:prstGeom>
+          <a:solidFill>
+            <a:srgbClr val="F59E0B"/>
+          </a:solidFill>
+          <a:ln w="19050">
+            <a:solidFill>
+              <a:srgbClr val="00D4AA"/>
+            </a:solidFill>
+          </a:ln>
+          <a:effectLst/>
+        </p:spPr>
+        <p:style>
+          <a:lnRef idx="1">
+            <a:schemeClr val="accent1"/>
+          </a:lnRef>
+          <a:fillRef idx="3">
+            <a:schemeClr val="accent1"/>
+          </a:fillRef>
+          <a:effectRef idx="2">
+            <a:schemeClr val="accent1"/>
+          </a:effectRef>
+          <a:fontRef idx="minor">
+            <a:schemeClr val="lt1"/>
+          </a:fontRef>
+        </p:style>
+        <p:txBody>
+          <a:bodyPr rtlCol="0" anchor="ctr"/>
+          <a:lstStyle/>
+          <a:p>
+            <a:pPr algn="ctr"/>
+          </a:p>
+        </p:txBody>
+      </p:sp>
+      <p:sp>
+        <p:nvSpPr>
+          <p:cNvPr id="25" name="TextBox 24"/>
           <p:cNvSpPr txBox="1"/>
           <p:nvPr/>
         </p:nvSpPr>
         <p:spPr>
           <a:xfrm>
-            <a:off x="4312920" y="2697480"/>
-            <a:ext cx="1722120" cy="457200"/>
+            <a:off x="3246120" y="4956048"/>
+            <a:ext cx="4206239" cy="365760"/>
           </a:xfrm>
           <a:prstGeom prst="rect">
             <a:avLst/>
@@ -8794,78 +9917,39 @@
           </a:bodyPr>
           <a:lstStyle/>
           <a:p>
-            <a:pPr algn="ctr">
+            <a:pPr algn="l">
               <a:lnSpc>
                 <a:spcPct val="100000"/>
               </a:lnSpc>
             </a:pPr>
             <a:r>
-              <a:rPr sz="1500" b="1" i="0">
+              <a:rPr sz="1250" b="0" i="0">
                 <a:solidFill>
                   <a:srgbClr val="FFFFFF"/>
                 </a:solidFill>
                 <a:latin typeface="Calibri"/>
               </a:rPr>
-              <a:t>Sprint 1 + IA</a:t>
-            </a:r>
-          </a:p>
-        </p:txBody>
-      </p:sp>
-      <p:sp>
-        <p:nvSpPr>
-          <p:cNvPr id="19" name="TextBox 18"/>
-          <p:cNvSpPr txBox="1"/>
-          <p:nvPr/>
-        </p:nvSpPr>
-        <p:spPr>
-          <a:xfrm>
-            <a:off x="4312920" y="3154680"/>
-            <a:ext cx="1722120" cy="1188720"/>
-          </a:xfrm>
-          <a:prstGeom prst="rect">
-            <a:avLst/>
-          </a:prstGeom>
-          <a:noFill/>
-        </p:spPr>
-        <p:txBody>
-          <a:bodyPr wrap="square" anchor="t">
-            <a:spAutoFit/>
-          </a:bodyPr>
-          <a:lstStyle/>
-          <a:p>
-            <a:pPr algn="ctr">
-              <a:lnSpc>
-                <a:spcPct val="115000"/>
-              </a:lnSpc>
-            </a:pPr>
-            <a:r>
-              <a:rPr sz="1150" b="0" i="0">
-                <a:solidFill>
-                  <a:srgbClr val="B0B8C2"/>
-                </a:solidFill>
-                <a:latin typeface="Calibri"/>
-              </a:rPr>
-              <a:t>Segurança, infra, e motor de IA experimental</a:t>
-            </a:r>
-          </a:p>
-        </p:txBody>
-      </p:sp>
-      <p:sp>
-        <p:nvSpPr>
-          <p:cNvPr id="20" name="Oval 19"/>
+              <a:t>Plataforma e Escala (Grafana, PWA, modelo de IA próprio)</a:t>
+            </a:r>
+          </a:p>
+        </p:txBody>
+      </p:sp>
+      <p:sp>
+        <p:nvSpPr>
+          <p:cNvPr id="26" name="Rounded Rectangle 25"/>
           <p:cNvSpPr/>
           <p:nvPr/>
         </p:nvSpPr>
         <p:spPr>
           <a:xfrm>
-            <a:off x="6905244" y="2249424"/>
-            <a:ext cx="164592" cy="164592"/>
-          </a:xfrm>
-          <a:prstGeom prst="ellipse">
+            <a:off x="7818119" y="4956048"/>
+            <a:ext cx="1554480" cy="365760"/>
+          </a:xfrm>
+          <a:prstGeom prst="roundRect">
             <a:avLst/>
           </a:prstGeom>
           <a:solidFill>
-            <a:srgbClr val="00D4AA"/>
+            <a:srgbClr val="F59E0B"/>
           </a:solidFill>
           <a:ln>
             <a:noFill/>
@@ -8891,19 +9975,27 @@
           <a:lstStyle/>
           <a:p>
             <a:pPr algn="ctr"/>
-          </a:p>
-        </p:txBody>
-      </p:sp>
-      <p:sp>
-        <p:nvSpPr>
-          <p:cNvPr id="21" name="TextBox 20"/>
+            <a:r>
+              <a:rPr sz="1200" b="1">
+                <a:solidFill>
+                  <a:srgbClr val="FFFFFF"/>
+                </a:solidFill>
+              </a:rPr>
+              <a:t>PARCIAL</a:t>
+            </a:r>
+          </a:p>
+        </p:txBody>
+      </p:sp>
+      <p:sp>
+        <p:nvSpPr>
+          <p:cNvPr id="27" name="TextBox 26"/>
           <p:cNvSpPr txBox="1"/>
           <p:nvPr/>
         </p:nvSpPr>
         <p:spPr>
           <a:xfrm>
-            <a:off x="6080760" y="1783080"/>
-            <a:ext cx="1813560" cy="365760"/>
+            <a:off x="548640" y="5897880"/>
+            <a:ext cx="10789920" cy="457200"/>
           </a:xfrm>
           <a:prstGeom prst="rect">
             <a:avLst/>
@@ -8916,419 +10008,19 @@
           </a:bodyPr>
           <a:lstStyle/>
           <a:p>
-            <a:pPr algn="ctr">
+            <a:pPr algn="l">
               <a:lnSpc>
                 <a:spcPct val="100000"/>
               </a:lnSpc>
             </a:pPr>
             <a:r>
-              <a:rPr sz="1300" b="1" i="0">
-                <a:solidFill>
-                  <a:srgbClr val="00D4AA"/>
-                </a:solidFill>
-                <a:latin typeface="Calibri"/>
-              </a:rPr>
-              <a:t>23/06 manhã</a:t>
-            </a:r>
-          </a:p>
-        </p:txBody>
-      </p:sp>
-      <p:sp>
-        <p:nvSpPr>
-          <p:cNvPr id="22" name="TextBox 21"/>
-          <p:cNvSpPr txBox="1"/>
-          <p:nvPr/>
-        </p:nvSpPr>
-        <p:spPr>
-          <a:xfrm>
-            <a:off x="6126480" y="2697480"/>
-            <a:ext cx="1722120" cy="457200"/>
-          </a:xfrm>
-          <a:prstGeom prst="rect">
-            <a:avLst/>
-          </a:prstGeom>
-          <a:noFill/>
-        </p:spPr>
-        <p:txBody>
-          <a:bodyPr wrap="square" anchor="t">
-            <a:spAutoFit/>
-          </a:bodyPr>
-          <a:lstStyle/>
-          <a:p>
-            <a:pPr algn="ctr">
-              <a:lnSpc>
-                <a:spcPct val="100000"/>
-              </a:lnSpc>
-            </a:pPr>
-            <a:r>
-              <a:rPr sz="1500" b="1" i="0">
-                <a:solidFill>
-                  <a:srgbClr val="FFFFFF"/>
-                </a:solidFill>
-                <a:latin typeface="Calibri"/>
-              </a:rPr>
-              <a:t>Restauração</a:t>
-            </a:r>
-          </a:p>
-        </p:txBody>
-      </p:sp>
-      <p:sp>
-        <p:nvSpPr>
-          <p:cNvPr id="23" name="TextBox 22"/>
-          <p:cNvSpPr txBox="1"/>
-          <p:nvPr/>
-        </p:nvSpPr>
-        <p:spPr>
-          <a:xfrm>
-            <a:off x="6126480" y="3154680"/>
-            <a:ext cx="1722120" cy="1188720"/>
-          </a:xfrm>
-          <a:prstGeom prst="rect">
-            <a:avLst/>
-          </a:prstGeom>
-          <a:noFill/>
-        </p:spPr>
-        <p:txBody>
-          <a:bodyPr wrap="square" anchor="t">
-            <a:spAutoFit/>
-          </a:bodyPr>
-          <a:lstStyle/>
-          <a:p>
-            <a:pPr algn="ctr">
-              <a:lnSpc>
-                <a:spcPct val="115000"/>
-              </a:lnSpc>
-            </a:pPr>
-            <a:r>
-              <a:rPr sz="1150" b="0" i="0">
+              <a:rPr sz="1300" b="0" i="1">
                 <a:solidFill>
                   <a:srgbClr val="B0B8C2"/>
                 </a:solidFill>
                 <a:latin typeface="Calibri"/>
               </a:rPr>
-              <a:t>Feature "Testar Vídeo" de volta</a:t>
-            </a:r>
-          </a:p>
-        </p:txBody>
-      </p:sp>
-      <p:sp>
-        <p:nvSpPr>
-          <p:cNvPr id="24" name="Oval 23"/>
-          <p:cNvSpPr/>
-          <p:nvPr/>
-        </p:nvSpPr>
-        <p:spPr>
-          <a:xfrm>
-            <a:off x="8718804" y="2249424"/>
-            <a:ext cx="164592" cy="164592"/>
-          </a:xfrm>
-          <a:prstGeom prst="ellipse">
-            <a:avLst/>
-          </a:prstGeom>
-          <a:solidFill>
-            <a:srgbClr val="00D4AA"/>
-          </a:solidFill>
-          <a:ln>
-            <a:noFill/>
-          </a:ln>
-          <a:effectLst/>
-        </p:spPr>
-        <p:style>
-          <a:lnRef idx="1">
-            <a:schemeClr val="accent1"/>
-          </a:lnRef>
-          <a:fillRef idx="3">
-            <a:schemeClr val="accent1"/>
-          </a:fillRef>
-          <a:effectRef idx="2">
-            <a:schemeClr val="accent1"/>
-          </a:effectRef>
-          <a:fontRef idx="minor">
-            <a:schemeClr val="lt1"/>
-          </a:fontRef>
-        </p:style>
-        <p:txBody>
-          <a:bodyPr rtlCol="0" anchor="ctr"/>
-          <a:lstStyle/>
-          <a:p>
-            <a:pPr algn="ctr"/>
-          </a:p>
-        </p:txBody>
-      </p:sp>
-      <p:sp>
-        <p:nvSpPr>
-          <p:cNvPr id="25" name="TextBox 24"/>
-          <p:cNvSpPr txBox="1"/>
-          <p:nvPr/>
-        </p:nvSpPr>
-        <p:spPr>
-          <a:xfrm>
-            <a:off x="7894320" y="1783080"/>
-            <a:ext cx="1813560" cy="365760"/>
-          </a:xfrm>
-          <a:prstGeom prst="rect">
-            <a:avLst/>
-          </a:prstGeom>
-          <a:noFill/>
-        </p:spPr>
-        <p:txBody>
-          <a:bodyPr wrap="square" anchor="t">
-            <a:spAutoFit/>
-          </a:bodyPr>
-          <a:lstStyle/>
-          <a:p>
-            <a:pPr algn="ctr">
-              <a:lnSpc>
-                <a:spcPct val="100000"/>
-              </a:lnSpc>
-            </a:pPr>
-            <a:r>
-              <a:rPr sz="1300" b="1" i="0">
-                <a:solidFill>
-                  <a:srgbClr val="00D4AA"/>
-                </a:solidFill>
-                <a:latin typeface="Calibri"/>
-              </a:rPr>
-              <a:t>23/06 tarde</a:t>
-            </a:r>
-          </a:p>
-        </p:txBody>
-      </p:sp>
-      <p:sp>
-        <p:nvSpPr>
-          <p:cNvPr id="26" name="TextBox 25"/>
-          <p:cNvSpPr txBox="1"/>
-          <p:nvPr/>
-        </p:nvSpPr>
-        <p:spPr>
-          <a:xfrm>
-            <a:off x="7940040" y="2697480"/>
-            <a:ext cx="1722120" cy="457200"/>
-          </a:xfrm>
-          <a:prstGeom prst="rect">
-            <a:avLst/>
-          </a:prstGeom>
-          <a:noFill/>
-        </p:spPr>
-        <p:txBody>
-          <a:bodyPr wrap="square" anchor="t">
-            <a:spAutoFit/>
-          </a:bodyPr>
-          <a:lstStyle/>
-          <a:p>
-            <a:pPr algn="ctr">
-              <a:lnSpc>
-                <a:spcPct val="100000"/>
-              </a:lnSpc>
-            </a:pPr>
-            <a:r>
-              <a:rPr sz="1500" b="1" i="0">
-                <a:solidFill>
-                  <a:srgbClr val="FFFFFF"/>
-                </a:solidFill>
-                <a:latin typeface="Calibri"/>
-              </a:rPr>
-              <a:t>Reversão</a:t>
-            </a:r>
-          </a:p>
-        </p:txBody>
-      </p:sp>
-      <p:sp>
-        <p:nvSpPr>
-          <p:cNvPr id="27" name="TextBox 26"/>
-          <p:cNvSpPr txBox="1"/>
-          <p:nvPr/>
-        </p:nvSpPr>
-        <p:spPr>
-          <a:xfrm>
-            <a:off x="7940040" y="3154680"/>
-            <a:ext cx="1722120" cy="1188720"/>
-          </a:xfrm>
-          <a:prstGeom prst="rect">
-            <a:avLst/>
-          </a:prstGeom>
-          <a:noFill/>
-        </p:spPr>
-        <p:txBody>
-          <a:bodyPr wrap="square" anchor="t">
-            <a:spAutoFit/>
-          </a:bodyPr>
-          <a:lstStyle/>
-          <a:p>
-            <a:pPr algn="ctr">
-              <a:lnSpc>
-                <a:spcPct val="115000"/>
-              </a:lnSpc>
-            </a:pPr>
-            <a:r>
-              <a:rPr sz="1150" b="0" i="0">
-                <a:solidFill>
-                  <a:srgbClr val="B0B8C2"/>
-                </a:solidFill>
-                <a:latin typeface="Calibri"/>
-              </a:rPr>
-              <a:t>IA → motor de regras (avisos brandos)</a:t>
-            </a:r>
-          </a:p>
-        </p:txBody>
-      </p:sp>
-      <p:sp>
-        <p:nvSpPr>
-          <p:cNvPr id="28" name="Oval 27"/>
-          <p:cNvSpPr/>
-          <p:nvPr/>
-        </p:nvSpPr>
-        <p:spPr>
-          <a:xfrm>
-            <a:off x="10532364" y="2249424"/>
-            <a:ext cx="164592" cy="164592"/>
-          </a:xfrm>
-          <a:prstGeom prst="ellipse">
-            <a:avLst/>
-          </a:prstGeom>
-          <a:solidFill>
-            <a:srgbClr val="00D4AA"/>
-          </a:solidFill>
-          <a:ln>
-            <a:noFill/>
-          </a:ln>
-          <a:effectLst/>
-        </p:spPr>
-        <p:style>
-          <a:lnRef idx="1">
-            <a:schemeClr val="accent1"/>
-          </a:lnRef>
-          <a:fillRef idx="3">
-            <a:schemeClr val="accent1"/>
-          </a:fillRef>
-          <a:effectRef idx="2">
-            <a:schemeClr val="accent1"/>
-          </a:effectRef>
-          <a:fontRef idx="minor">
-            <a:schemeClr val="lt1"/>
-          </a:fontRef>
-        </p:style>
-        <p:txBody>
-          <a:bodyPr rtlCol="0" anchor="ctr"/>
-          <a:lstStyle/>
-          <a:p>
-            <a:pPr algn="ctr"/>
-          </a:p>
-        </p:txBody>
-      </p:sp>
-      <p:sp>
-        <p:nvSpPr>
-          <p:cNvPr id="29" name="TextBox 28"/>
-          <p:cNvSpPr txBox="1"/>
-          <p:nvPr/>
-        </p:nvSpPr>
-        <p:spPr>
-          <a:xfrm>
-            <a:off x="9707880" y="1783080"/>
-            <a:ext cx="1813560" cy="365760"/>
-          </a:xfrm>
-          <a:prstGeom prst="rect">
-            <a:avLst/>
-          </a:prstGeom>
-          <a:noFill/>
-        </p:spPr>
-        <p:txBody>
-          <a:bodyPr wrap="square" anchor="t">
-            <a:spAutoFit/>
-          </a:bodyPr>
-          <a:lstStyle/>
-          <a:p>
-            <a:pPr algn="ctr">
-              <a:lnSpc>
-                <a:spcPct val="100000"/>
-              </a:lnSpc>
-            </a:pPr>
-            <a:r>
-              <a:rPr sz="1300" b="1" i="0">
-                <a:solidFill>
-                  <a:srgbClr val="00D4AA"/>
-                </a:solidFill>
-                <a:latin typeface="Calibri"/>
-              </a:rPr>
-              <a:t>23/06 noite</a:t>
-            </a:r>
-          </a:p>
-        </p:txBody>
-      </p:sp>
-      <p:sp>
-        <p:nvSpPr>
-          <p:cNvPr id="30" name="TextBox 29"/>
-          <p:cNvSpPr txBox="1"/>
-          <p:nvPr/>
-        </p:nvSpPr>
-        <p:spPr>
-          <a:xfrm>
-            <a:off x="9753600" y="2697480"/>
-            <a:ext cx="1722120" cy="457200"/>
-          </a:xfrm>
-          <a:prstGeom prst="rect">
-            <a:avLst/>
-          </a:prstGeom>
-          <a:noFill/>
-        </p:spPr>
-        <p:txBody>
-          <a:bodyPr wrap="square" anchor="t">
-            <a:spAutoFit/>
-          </a:bodyPr>
-          <a:lstStyle/>
-          <a:p>
-            <a:pPr algn="ctr">
-              <a:lnSpc>
-                <a:spcPct val="100000"/>
-              </a:lnSpc>
-            </a:pPr>
-            <a:r>
-              <a:rPr sz="1500" b="1" i="0">
-                <a:solidFill>
-                  <a:srgbClr val="FFFFFF"/>
-                </a:solidFill>
-                <a:latin typeface="Calibri"/>
-              </a:rPr>
-              <a:t>Hardening</a:t>
-            </a:r>
-          </a:p>
-        </p:txBody>
-      </p:sp>
-      <p:sp>
-        <p:nvSpPr>
-          <p:cNvPr id="31" name="TextBox 30"/>
-          <p:cNvSpPr txBox="1"/>
-          <p:nvPr/>
-        </p:nvSpPr>
-        <p:spPr>
-          <a:xfrm>
-            <a:off x="9753600" y="3154680"/>
-            <a:ext cx="1722120" cy="1188720"/>
-          </a:xfrm>
-          <a:prstGeom prst="rect">
-            <a:avLst/>
-          </a:prstGeom>
-          <a:noFill/>
-        </p:spPr>
-        <p:txBody>
-          <a:bodyPr wrap="square" anchor="t">
-            <a:spAutoFit/>
-          </a:bodyPr>
-          <a:lstStyle/>
-          <a:p>
-            <a:pPr algn="ctr">
-              <a:lnSpc>
-                <a:spcPct val="115000"/>
-              </a:lnSpc>
-            </a:pPr>
-            <a:r>
-              <a:rPr sz="1150" b="0" i="0">
-                <a:solidFill>
-                  <a:srgbClr val="B0B8C2"/>
-                </a:solidFill>
-                <a:latin typeface="Calibri"/>
-              </a:rPr>
-              <a:t>Bugs reais corrigidos + CI/CD + Docker Hub</a:t>
+              <a:t>Sprints 0 e 1 concluídos integralmente. Sprint 2 ainda não iniciado. Sprint 3: o item "modelo de IA próprio" foi antecipado e testado durante o Sprint 1, mas revertido após validação real.</a:t>
             </a:r>
           </a:p>
         </p:txBody>
@@ -9456,7 +10148,7 @@
         <p:spPr>
           <a:xfrm>
             <a:off x="548640" y="320040"/>
-            <a:ext cx="7315200" cy="365760"/>
+            <a:ext cx="8229600" cy="365760"/>
           </a:xfrm>
           <a:prstGeom prst="rect">
             <a:avLst/>
@@ -9481,7 +10173,7 @@
                 </a:solidFill>
                 <a:latin typeface="Calibri"/>
               </a:rPr>
-              <a:t>FASE 1 · FUNDAÇÃO</a:t>
+              <a:t>SPRINT 0 · MVP (1/2)</a:t>
             </a:r>
           </a:p>
         </p:txBody>
@@ -9520,7 +10212,7 @@
                 </a:solidFill>
                 <a:latin typeface="Calibri"/>
               </a:rPr>
-              <a:t>Primeira versão do projeto</a:t>
+              <a:t>A base do produto — fundação técnica e UX</a:t>
             </a:r>
           </a:p>
         </p:txBody>
@@ -9572,8 +10264,8 @@
         </p:nvSpPr>
         <p:spPr>
           <a:xfrm>
-            <a:off x="10180015" y="365760"/>
-            <a:ext cx="1554480" cy="411480"/>
+            <a:off x="10088575" y="365760"/>
+            <a:ext cx="1645920" cy="411480"/>
           </a:xfrm>
           <a:prstGeom prst="roundRect">
             <a:avLst/>
@@ -9601,7 +10293,7 @@
           </a:fontRef>
         </p:style>
         <p:txBody>
-          <a:bodyPr rtlCol="0" anchor="ctr" wrap="none" lIns="50800" rIns="50800"/>
+          <a:bodyPr rtlCol="0" anchor="ctr"/>
           <a:lstStyle/>
           <a:p>
             <a:pPr algn="ctr"/>
@@ -9611,7 +10303,7 @@
                   <a:srgbClr val="FFFFFF"/>
                 </a:solidFill>
               </a:rPr>
-              <a:t>15–19/05</a:t>
+              <a:t>Itens 1–12</a:t>
             </a:r>
           </a:p>
         </p:txBody>
@@ -9625,7 +10317,7 @@
         <p:spPr>
           <a:xfrm>
             <a:off x="548640" y="1463040"/>
-            <a:ext cx="10789920" cy="4572000"/>
+            <a:ext cx="5394960" cy="4572000"/>
           </a:xfrm>
           <a:prstGeom prst="rect">
             <a:avLst/>
@@ -9647,13 +10339,13 @@
               </a:spcAft>
             </a:pPr>
             <a:r>
-              <a:rPr sz="1800">
+              <a:rPr sz="1600">
                 <a:solidFill>
                   <a:srgbClr val="FFFFFF"/>
                 </a:solidFill>
                 <a:latin typeface="Calibri"/>
               </a:rPr>
-              <a:t>•  Commit inicial: estrutura base dos microsserviços e do pose-service em Python/FastAPI</a:t>
+              <a:t>•  Infraestrutura básica:</a:t>
             </a:r>
           </a:p>
           <a:p>
@@ -9666,13 +10358,13 @@
               </a:spcAft>
             </a:pPr>
             <a:r>
-              <a:rPr sz="1800">
-                <a:solidFill>
-                  <a:srgbClr val="FFFFFF"/>
-                </a:solidFill>
-                <a:latin typeface="Calibri"/>
-              </a:rPr>
-              <a:t>•  Detecção de landmarks corporais (MediaPipe BlazePose) e cálculo de ângulos articulares</a:t>
+              <a:rPr sz="1400">
+                <a:solidFill>
+                  <a:srgbClr val="B0B8C2"/>
+                </a:solidFill>
+                <a:latin typeface="Calibri"/>
+              </a:rPr>
+              <a:t>    ‣  healthcheck do pose-service, logs estruturados em JSON, rate limiting no Kong</a:t>
             </a:r>
           </a:p>
           <a:p>
@@ -9685,13 +10377,13 @@
               </a:spcAft>
             </a:pPr>
             <a:r>
-              <a:rPr sz="1800">
+              <a:rPr sz="1600">
                 <a:solidFill>
                   <a:srgbClr val="FFFFFF"/>
                 </a:solidFill>
                 <a:latin typeface="Calibri"/>
               </a:rPr>
-              <a:t>•  Motor de regras biomecânicas (exercise_analyzer.py): squat, deadlift, lunge</a:t>
+              <a:t>•  Experiência do app Android:</a:t>
             </a:r>
           </a:p>
           <a:p>
@@ -9704,13 +10396,169 @@
               </a:spcAft>
             </a:pPr>
             <a:r>
-              <a:rPr sz="1800">
+              <a:rPr sz="1400">
+                <a:solidFill>
+                  <a:srgbClr val="B0B8C2"/>
+                </a:solidFill>
+                <a:latin typeface="Calibri"/>
+              </a:rPr>
+              <a:t>    ‣  feedback de voz (TextToSpeech PT-BR), contador de repetições em tempo real</a:t>
+            </a:r>
+          </a:p>
+          <a:p>
+            <a:pPr>
+              <a:lnSpc>
+                <a:spcPct val="112000"/>
+              </a:lnSpc>
+              <a:spcAft>
+                <a:spcPts val="800"/>
+              </a:spcAft>
+            </a:pPr>
+            <a:r>
+              <a:rPr sz="1600">
                 <a:solidFill>
                   <a:srgbClr val="FFFFFF"/>
                 </a:solidFill>
                 <a:latin typeface="Calibri"/>
               </a:rPr>
-              <a:t>•  Correções logo em seguida: ajustes e melhorias completas no projeto, correção de detecção de landmarks em imagens reais (vs. apenas sintéticas)</a:t>
+              <a:t>•  Dashboard web:</a:t>
+            </a:r>
+          </a:p>
+          <a:p>
+            <a:pPr>
+              <a:lnSpc>
+                <a:spcPct val="112000"/>
+              </a:lnSpc>
+              <a:spcAft>
+                <a:spcPts val="800"/>
+              </a:spcAft>
+            </a:pPr>
+            <a:r>
+              <a:rPr sz="1400">
+                <a:solidFill>
+                  <a:srgbClr val="B0B8C2"/>
+                </a:solidFill>
+                <a:latin typeface="Calibri"/>
+              </a:rPr>
+              <a:t>    ‣  tela de login com JWT (antes, acesso era livre)</a:t>
+            </a:r>
+          </a:p>
+        </p:txBody>
+      </p:sp>
+      <p:sp>
+        <p:nvSpPr>
+          <p:cNvPr id="9" name="TextBox 8"/>
+          <p:cNvSpPr txBox="1"/>
+          <p:nvPr/>
+        </p:nvSpPr>
+        <p:spPr>
+          <a:xfrm>
+            <a:off x="6217920" y="1463040"/>
+            <a:ext cx="5394960" cy="4572000"/>
+          </a:xfrm>
+          <a:prstGeom prst="rect">
+            <a:avLst/>
+          </a:prstGeom>
+          <a:noFill/>
+        </p:spPr>
+        <p:txBody>
+          <a:bodyPr wrap="square">
+            <a:spAutoFit/>
+          </a:bodyPr>
+          <a:lstStyle/>
+          <a:p>
+            <a:pPr>
+              <a:lnSpc>
+                <a:spcPct val="112000"/>
+              </a:lnSpc>
+              <a:spcAft>
+                <a:spcPts val="800"/>
+              </a:spcAft>
+            </a:pPr>
+            <a:r>
+              <a:rPr sz="1600">
+                <a:solidFill>
+                  <a:srgbClr val="FFFFFF"/>
+                </a:solidFill>
+                <a:latin typeface="Calibri"/>
+              </a:rPr>
+              <a:t>•  Novos exercícios:</a:t>
+            </a:r>
+          </a:p>
+          <a:p>
+            <a:pPr>
+              <a:lnSpc>
+                <a:spcPct val="112000"/>
+              </a:lnSpc>
+              <a:spcAft>
+                <a:spcPts val="800"/>
+              </a:spcAft>
+            </a:pPr>
+            <a:r>
+              <a:rPr sz="1400">
+                <a:solidFill>
+                  <a:srgbClr val="B0B8C2"/>
+                </a:solidFill>
+                <a:latin typeface="Calibri"/>
+              </a:rPr>
+              <a:t>    ‣  Bench Press (cotovelo aberto, pulso dobrado, arco lombar)</a:t>
+            </a:r>
+          </a:p>
+          <a:p>
+            <a:pPr>
+              <a:lnSpc>
+                <a:spcPct val="112000"/>
+              </a:lnSpc>
+              <a:spcAft>
+                <a:spcPts val="800"/>
+              </a:spcAft>
+            </a:pPr>
+            <a:r>
+              <a:rPr sz="1400">
+                <a:solidFill>
+                  <a:srgbClr val="B0B8C2"/>
+                </a:solidFill>
+                <a:latin typeface="Calibri"/>
+              </a:rPr>
+              <a:t>    ‣  Bent-over Row (coluna arredondada, amplitude insuficiente)</a:t>
+            </a:r>
+          </a:p>
+          <a:p>
+            <a:pPr>
+              <a:lnSpc>
+                <a:spcPct val="112000"/>
+              </a:lnSpc>
+              <a:spcAft>
+                <a:spcPts val="800"/>
+              </a:spcAft>
+            </a:pPr>
+            <a:r>
+              <a:rPr sz="1600">
+                <a:solidFill>
+                  <a:srgbClr val="FFFFFF"/>
+                </a:solidFill>
+                <a:latin typeface="Calibri"/>
+              </a:rPr>
+              <a:t>•  Comunicação e visualização:</a:t>
+            </a:r>
+          </a:p>
+          <a:p>
+            <a:pPr>
+              <a:lnSpc>
+                <a:spcPct val="112000"/>
+              </a:lnSpc>
+              <a:spcAft>
+                <a:spcPts val="800"/>
+              </a:spcAft>
+            </a:pPr>
+            <a:r>
+              <a:rPr sz="1400">
+                <a:solidFill>
+                  <a:srgbClr val="B0B8C2"/>
+                </a:solidFill>
+                <a:latin typeface="Calibri"/>
+              </a:rPr>
+              <a:t>    ‣  relatório pós-treino por e-mail, mapa de calor de erros, comparação entre sessões, Web Push</a:t>
             </a:r>
           </a:p>
         </p:txBody>
@@ -9838,7 +10686,7 @@
         <p:spPr>
           <a:xfrm>
             <a:off x="548640" y="320040"/>
-            <a:ext cx="7315200" cy="365760"/>
+            <a:ext cx="8229600" cy="365760"/>
           </a:xfrm>
           <a:prstGeom prst="rect">
             <a:avLst/>
@@ -9863,7 +10711,7 @@
                 </a:solidFill>
                 <a:latin typeface="Calibri"/>
               </a:rPr>
-              <a:t>FASE 2 · REFATORAÇÃO</a:t>
+              <a:t>SPRINT 0 · MVP (2/2)</a:t>
             </a:r>
           </a:p>
         </p:txBody>
@@ -9902,7 +10750,7 @@
                 </a:solidFill>
                 <a:latin typeface="Calibri"/>
               </a:rPr>
-              <a:t>Modelo de pose + App Android em Compose</a:t>
+              <a:t>Escala, robustez e funcionalidades avançadas</a:t>
             </a:r>
           </a:p>
         </p:txBody>
@@ -9954,8 +10802,8 @@
         </p:nvSpPr>
         <p:spPr>
           <a:xfrm>
-            <a:off x="10180015" y="365760"/>
-            <a:ext cx="1554480" cy="411480"/>
+            <a:off x="10088575" y="365760"/>
+            <a:ext cx="1645920" cy="411480"/>
           </a:xfrm>
           <a:prstGeom prst="roundRect">
             <a:avLst/>
@@ -9983,7 +10831,7 @@
           </a:fontRef>
         </p:style>
         <p:txBody>
-          <a:bodyPr rtlCol="0" anchor="ctr" wrap="none" lIns="50800" rIns="50800"/>
+          <a:bodyPr rtlCol="0" anchor="ctr"/>
           <a:lstStyle/>
           <a:p>
             <a:pPr algn="ctr"/>
@@ -9993,7 +10841,7 @@
                   <a:srgbClr val="FFFFFF"/>
                 </a:solidFill>
               </a:rPr>
-              <a:t>09/06</a:t>
+              <a:t>Itens 13–23</a:t>
             </a:r>
           </a:p>
         </p:txBody>
@@ -10007,7 +10855,7 @@
         <p:spPr>
           <a:xfrm>
             <a:off x="548640" y="1463040"/>
-            <a:ext cx="10789920" cy="4572000"/>
+            <a:ext cx="5394960" cy="4572000"/>
           </a:xfrm>
           <a:prstGeom prst="rect">
             <a:avLst/>
@@ -10029,13 +10877,13 @@
               </a:spcAft>
             </a:pPr>
             <a:r>
-              <a:rPr sz="1800">
+              <a:rPr sz="1600">
                 <a:solidFill>
                   <a:srgbClr val="FFFFFF"/>
                 </a:solidFill>
                 <a:latin typeface="Calibri"/>
               </a:rPr>
-              <a:t>•  Atualização do modelo de pose (MoveNet Thunder via TensorFlow Serving) para melhorar a detecção de landmarks</a:t>
+              <a:t>•  Escalabilidade do pose-service:</a:t>
             </a:r>
           </a:p>
           <a:p>
@@ -10048,13 +10896,13 @@
               </a:spcAft>
             </a:pPr>
             <a:r>
-              <a:rPr sz="1800">
-                <a:solidFill>
-                  <a:srgbClr val="FFFFFF"/>
-                </a:solidFill>
-                <a:latin typeface="Calibri"/>
-              </a:rPr>
-              <a:t>•  App Android totalmente refeito em Jetpack Compose + Material 3 (era anterior em XML/Views)</a:t>
+              <a:rPr sz="1400">
+                <a:solidFill>
+                  <a:srgbClr val="B0B8C2"/>
+                </a:solidFill>
+                <a:latin typeface="Calibri"/>
+              </a:rPr>
+              <a:t>    ‣  cache Redis por hash MD5 do vídeo, fila assíncrona (asyncio.Queue), armazenamento de vídeos no MinIO</a:t>
             </a:r>
           </a:p>
           <a:p>
@@ -10067,13 +10915,169 @@
               </a:spcAft>
             </a:pPr>
             <a:r>
-              <a:rPr sz="1800">
+              <a:rPr sz="1600">
                 <a:solidFill>
                   <a:srgbClr val="FFFFFF"/>
                 </a:solidFill>
                 <a:latin typeface="Calibri"/>
               </a:rPr>
-              <a:t>•  Base para as telas atuais: câmera ao vivo, progresso, perfil</a:t>
+              <a:t>•  Guia visual de posicionamento de câmera no app</a:t>
+            </a:r>
+          </a:p>
+          <a:p>
+            <a:pPr>
+              <a:lnSpc>
+                <a:spcPct val="112000"/>
+              </a:lnSpc>
+              <a:spcAft>
+                <a:spcPts val="800"/>
+              </a:spcAft>
+            </a:pPr>
+            <a:r>
+              <a:rPr sz="1600">
+                <a:solidFill>
+                  <a:srgbClr val="FFFFFF"/>
+                </a:solidFill>
+                <a:latin typeface="Calibri"/>
+              </a:rPr>
+              <a:t>•  Gestão de alunos no dashboard (CRUD)</a:t>
+            </a:r>
+          </a:p>
+          <a:p>
+            <a:pPr>
+              <a:lnSpc>
+                <a:spcPct val="112000"/>
+              </a:lnSpc>
+              <a:spcAft>
+                <a:spcPts val="800"/>
+              </a:spcAft>
+            </a:pPr>
+            <a:r>
+              <a:rPr sz="1600">
+                <a:solidFill>
+                  <a:srgbClr val="FFFFFF"/>
+                </a:solidFill>
+                <a:latin typeface="Calibri"/>
+              </a:rPr>
+              <a:t>•  Gamificação completa: pontos, nível, streak, 12 conquistas, ranking da academia</a:t>
+            </a:r>
+          </a:p>
+        </p:txBody>
+      </p:sp>
+      <p:sp>
+        <p:nvSpPr>
+          <p:cNvPr id="9" name="TextBox 8"/>
+          <p:cNvSpPr txBox="1"/>
+          <p:nvPr/>
+        </p:nvSpPr>
+        <p:spPr>
+          <a:xfrm>
+            <a:off x="6217920" y="1463040"/>
+            <a:ext cx="5394960" cy="4572000"/>
+          </a:xfrm>
+          <a:prstGeom prst="rect">
+            <a:avLst/>
+          </a:prstGeom>
+          <a:noFill/>
+        </p:spPr>
+        <p:txBody>
+          <a:bodyPr wrap="square">
+            <a:spAutoFit/>
+          </a:bodyPr>
+          <a:lstStyle/>
+          <a:p>
+            <a:pPr>
+              <a:lnSpc>
+                <a:spcPct val="112000"/>
+              </a:lnSpc>
+              <a:spcAft>
+                <a:spcPts val="800"/>
+              </a:spcAft>
+            </a:pPr>
+            <a:r>
+              <a:rPr sz="1600">
+                <a:solidFill>
+                  <a:srgbClr val="FFFFFF"/>
+                </a:solidFill>
+                <a:latin typeface="Calibri"/>
+              </a:rPr>
+              <a:t>•  Modo offline no Android (ML Kit on-device + sincronização via WorkManager)</a:t>
+            </a:r>
+          </a:p>
+          <a:p>
+            <a:pPr>
+              <a:lnSpc>
+                <a:spcPct val="112000"/>
+              </a:lnSpc>
+              <a:spcAft>
+                <a:spcPts val="800"/>
+              </a:spcAft>
+            </a:pPr>
+            <a:r>
+              <a:rPr sz="1600">
+                <a:solidFill>
+                  <a:srgbClr val="FFFFFF"/>
+                </a:solidFill>
+                <a:latin typeface="Calibri"/>
+              </a:rPr>
+              <a:t>•  34 testes automatizados (pose-service)</a:t>
+            </a:r>
+          </a:p>
+          <a:p>
+            <a:pPr>
+              <a:lnSpc>
+                <a:spcPct val="112000"/>
+              </a:lnSpc>
+              <a:spcAft>
+                <a:spcPts val="800"/>
+              </a:spcAft>
+            </a:pPr>
+            <a:r>
+              <a:rPr sz="1600">
+                <a:solidFill>
+                  <a:srgbClr val="FFFFFF"/>
+                </a:solidFill>
+                <a:latin typeface="Calibri"/>
+              </a:rPr>
+              <a:t>•  Plano de treino integrado (professor cria, app monitora)</a:t>
+            </a:r>
+          </a:p>
+          <a:p>
+            <a:pPr>
+              <a:lnSpc>
+                <a:spcPct val="112000"/>
+              </a:lnSpc>
+              <a:spcAft>
+                <a:spcPts val="800"/>
+              </a:spcAft>
+            </a:pPr>
+            <a:r>
+              <a:rPr sz="1600">
+                <a:solidFill>
+                  <a:srgbClr val="FFFFFF"/>
+                </a:solidFill>
+                <a:latin typeface="Calibri"/>
+              </a:rPr>
+              <a:t>•  Multi-tenancy: isolamento completo por academia (tenant_id)</a:t>
+            </a:r>
+          </a:p>
+          <a:p>
+            <a:pPr>
+              <a:lnSpc>
+                <a:spcPct val="112000"/>
+              </a:lnSpc>
+              <a:spcAft>
+                <a:spcPts val="800"/>
+              </a:spcAft>
+            </a:pPr>
+            <a:r>
+              <a:rPr sz="1600">
+                <a:solidFill>
+                  <a:srgbClr val="FFFFFF"/>
+                </a:solidFill>
+                <a:latin typeface="Calibri"/>
+              </a:rPr>
+              <a:t>•  Relatório PDF mensal por aluno, enviado automaticamente por e-mail</a:t>
             </a:r>
           </a:p>
         </p:txBody>
@@ -10201,7 +11205,7 @@
         <p:spPr>
           <a:xfrm>
             <a:off x="548640" y="320040"/>
-            <a:ext cx="7315200" cy="365760"/>
+            <a:ext cx="8229600" cy="365760"/>
           </a:xfrm>
           <a:prstGeom prst="rect">
             <a:avLst/>
@@ -10226,7 +11230,7 @@
                 </a:solidFill>
                 <a:latin typeface="Calibri"/>
               </a:rPr>
-              <a:t>FASE 3 · SPRINT 1</a:t>
+              <a:t>SPRINT 1 · FUNDAÇÃO E SEGURANÇA</a:t>
             </a:r>
           </a:p>
         </p:txBody>
@@ -10265,7 +11269,7 @@
                 </a:solidFill>
                 <a:latin typeface="Calibri"/>
               </a:rPr>
-              <a:t>Segurança, infraestrutura e motor de IA</a:t>
+              <a:t>Estabilidade, compliance e qualidade</a:t>
             </a:r>
           </a:p>
         </p:txBody>
@@ -10317,8 +11321,8 @@
         </p:nvSpPr>
         <p:spPr>
           <a:xfrm>
-            <a:off x="10180015" y="365760"/>
-            <a:ext cx="1554480" cy="411480"/>
+            <a:off x="10088575" y="365760"/>
+            <a:ext cx="1645920" cy="411480"/>
           </a:xfrm>
           <a:prstGeom prst="roundRect">
             <a:avLst/>
@@ -10346,7 +11350,7 @@
           </a:fontRef>
         </p:style>
         <p:txBody>
-          <a:bodyPr rtlCol="0" anchor="ctr" wrap="none" lIns="50800" rIns="50800"/>
+          <a:bodyPr rtlCol="0" anchor="ctr"/>
           <a:lstStyle/>
           <a:p>
             <a:pPr algn="ctr"/>
@@ -10369,7 +11373,106 @@
         </p:nvSpPr>
         <p:spPr>
           <a:xfrm>
-            <a:off x="548640" y="1325880"/>
+            <a:off x="548640" y="1463040"/>
+            <a:ext cx="10789920" cy="2743200"/>
+          </a:xfrm>
+          <a:prstGeom prst="rect">
+            <a:avLst/>
+          </a:prstGeom>
+          <a:noFill/>
+        </p:spPr>
+        <p:txBody>
+          <a:bodyPr wrap="square">
+            <a:spAutoFit/>
+          </a:bodyPr>
+          <a:lstStyle/>
+          <a:p>
+            <a:pPr>
+              <a:lnSpc>
+                <a:spcPct val="112000"/>
+              </a:lnSpc>
+              <a:spcAft>
+                <a:spcPts val="800"/>
+              </a:spcAft>
+            </a:pPr>
+            <a:r>
+              <a:rPr sz="1700">
+                <a:solidFill>
+                  <a:srgbClr val="FFFFFF"/>
+                </a:solidFill>
+                <a:latin typeface="Calibri"/>
+              </a:rPr>
+              <a:t>•  CI/CD inicial com GitHub Actions (testes, builds, geração de APK)</a:t>
+            </a:r>
+          </a:p>
+          <a:p>
+            <a:pPr>
+              <a:lnSpc>
+                <a:spcPct val="112000"/>
+              </a:lnSpc>
+              <a:spcAft>
+                <a:spcPts val="800"/>
+              </a:spcAft>
+            </a:pPr>
+            <a:r>
+              <a:rPr sz="1700">
+                <a:solidFill>
+                  <a:srgbClr val="FFFFFF"/>
+                </a:solidFill>
+                <a:latin typeface="Calibri"/>
+              </a:rPr>
+              <a:t>•  Backup automático: pg_dump + mongo export → MinIO, diário às 03:00 UTC, retenção de 30 dias</a:t>
+            </a:r>
+          </a:p>
+          <a:p>
+            <a:pPr>
+              <a:lnSpc>
+                <a:spcPct val="112000"/>
+              </a:lnSpc>
+              <a:spcAft>
+                <a:spcPts val="800"/>
+              </a:spcAft>
+            </a:pPr>
+            <a:r>
+              <a:rPr sz="1700">
+                <a:solidFill>
+                  <a:srgbClr val="FFFFFF"/>
+                </a:solidFill>
+                <a:latin typeface="Calibri"/>
+              </a:rPr>
+              <a:t>•  Refresh token rotation: token anterior é revogado a cada renovação (token roubado não pode ser reutilizado)</a:t>
+            </a:r>
+          </a:p>
+          <a:p>
+            <a:pPr>
+              <a:lnSpc>
+                <a:spcPct val="112000"/>
+              </a:lnSpc>
+              <a:spcAft>
+                <a:spcPts val="800"/>
+              </a:spcAft>
+            </a:pPr>
+            <a:r>
+              <a:rPr sz="1700">
+                <a:solidFill>
+                  <a:srgbClr val="FFFFFF"/>
+                </a:solidFill>
+                <a:latin typeface="Calibri"/>
+              </a:rPr>
+              <a:t>•  LGPD compliance: exportação e exclusão de dados do usuário, com tela dedicada no app</a:t>
+            </a:r>
+          </a:p>
+        </p:txBody>
+      </p:sp>
+      <p:sp>
+        <p:nvSpPr>
+          <p:cNvPr id="9" name="TextBox 8"/>
+          <p:cNvSpPr txBox="1"/>
+          <p:nvPr/>
+        </p:nvSpPr>
+        <p:spPr>
+          <a:xfrm>
+            <a:off x="548640" y="4572000"/>
             <a:ext cx="10789920" cy="365760"/>
           </a:xfrm>
           <a:prstGeom prst="rect">
@@ -10389,27 +11492,27 @@
               </a:lnSpc>
             </a:pPr>
             <a:r>
-              <a:rPr sz="1500" b="0" i="0">
-                <a:solidFill>
-                  <a:srgbClr val="B0B8C2"/>
-                </a:solidFill>
-                <a:latin typeface="Calibri"/>
-              </a:rPr>
-              <a:t>Maior commit do projeto até então — entregas em paralelo:</a:t>
-            </a:r>
-          </a:p>
-        </p:txBody>
-      </p:sp>
-      <p:sp>
-        <p:nvSpPr>
-          <p:cNvPr id="9" name="TextBox 8"/>
+              <a:rPr sz="1400" b="1" i="0">
+                <a:solidFill>
+                  <a:srgbClr val="F59E0B"/>
+                </a:solidFill>
+                <a:latin typeface="Calibri"/>
+              </a:rPr>
+              <a:t>ENTREGUE NO MESMO COMMIT (fora do escopo formal do Sprint 1):</a:t>
+            </a:r>
+          </a:p>
+        </p:txBody>
+      </p:sp>
+      <p:sp>
+        <p:nvSpPr>
+          <p:cNvPr id="10" name="TextBox 9"/>
           <p:cNvSpPr txBox="1"/>
           <p:nvPr/>
         </p:nvSpPr>
         <p:spPr>
           <a:xfrm>
-            <a:off x="548640" y="1783080"/>
-            <a:ext cx="5212080" cy="4297680"/>
+            <a:off x="548640" y="4983480"/>
+            <a:ext cx="10789920" cy="1463040"/>
           </a:xfrm>
           <a:prstGeom prst="rect">
             <a:avLst/>
@@ -10431,13 +11534,13 @@
               </a:spcAft>
             </a:pPr>
             <a:r>
-              <a:rPr sz="1600">
+              <a:rPr sz="1500">
                 <a:solidFill>
                   <a:srgbClr val="FFFFFF"/>
                 </a:solidFill>
                 <a:latin typeface="Calibri"/>
               </a:rPr>
-              <a:t>•  CI/CD inicial (GitHub Actions) expandido</a:t>
+              <a:t>•  Redesign completo do app Android (Jetpack Compose + Material 3) e modo offline</a:t>
             </a:r>
           </a:p>
           <a:p>
@@ -10450,188 +11553,13 @@
               </a:spcAft>
             </a:pPr>
             <a:r>
-              <a:rPr sz="1600">
+              <a:rPr sz="1500">
                 <a:solidFill>
                   <a:srgbClr val="FFFFFF"/>
                 </a:solidFill>
                 <a:latin typeface="Calibri"/>
               </a:rPr>
-              <a:t>•  Backup automático (backup-service, cron 03:00 UTC)</a:t>
-            </a:r>
-          </a:p>
-          <a:p>
-            <a:pPr>
-              <a:lnSpc>
-                <a:spcPct val="112000"/>
-              </a:lnSpc>
-              <a:spcAft>
-                <a:spcPts val="800"/>
-              </a:spcAft>
-            </a:pPr>
-            <a:r>
-              <a:rPr sz="1600">
-                <a:solidFill>
-                  <a:srgbClr val="FFFFFF"/>
-                </a:solidFill>
-                <a:latin typeface="Calibri"/>
-              </a:rPr>
-              <a:t>•  Refresh token rotation no user-service</a:t>
-            </a:r>
-          </a:p>
-          <a:p>
-            <a:pPr>
-              <a:lnSpc>
-                <a:spcPct val="112000"/>
-              </a:lnSpc>
-              <a:spcAft>
-                <a:spcPts val="800"/>
-              </a:spcAft>
-            </a:pPr>
-            <a:r>
-              <a:rPr sz="1600">
-                <a:solidFill>
-                  <a:srgbClr val="FFFFFF"/>
-                </a:solidFill>
-                <a:latin typeface="Calibri"/>
-              </a:rPr>
-              <a:t>•  LGPD: exportação e exclusão de dados do usuário</a:t>
-            </a:r>
-          </a:p>
-          <a:p>
-            <a:pPr>
-              <a:lnSpc>
-                <a:spcPct val="112000"/>
-              </a:lnSpc>
-              <a:spcAft>
-                <a:spcPts val="800"/>
-              </a:spcAft>
-            </a:pPr>
-            <a:r>
-              <a:rPr sz="1600">
-                <a:solidFill>
-                  <a:srgbClr val="FFFFFF"/>
-                </a:solidFill>
-                <a:latin typeface="Calibri"/>
-              </a:rPr>
-              <a:t>•  Relatório PDF mensal por e-mail (analytics-service)</a:t>
-            </a:r>
-          </a:p>
-        </p:txBody>
-      </p:sp>
-      <p:sp>
-        <p:nvSpPr>
-          <p:cNvPr id="10" name="TextBox 9"/>
-          <p:cNvSpPr txBox="1"/>
-          <p:nvPr/>
-        </p:nvSpPr>
-        <p:spPr>
-          <a:xfrm>
-            <a:off x="6035040" y="1783080"/>
-            <a:ext cx="5394960" cy="4297680"/>
-          </a:xfrm>
-          <a:prstGeom prst="rect">
-            <a:avLst/>
-          </a:prstGeom>
-          <a:noFill/>
-        </p:spPr>
-        <p:txBody>
-          <a:bodyPr wrap="square">
-            <a:spAutoFit/>
-          </a:bodyPr>
-          <a:lstStyle/>
-          <a:p>
-            <a:pPr>
-              <a:lnSpc>
-                <a:spcPct val="112000"/>
-              </a:lnSpc>
-              <a:spcAft>
-                <a:spcPts val="800"/>
-              </a:spcAft>
-            </a:pPr>
-            <a:r>
-              <a:rPr sz="1600">
-                <a:solidFill>
-                  <a:srgbClr val="FFFFFF"/>
-                </a:solidFill>
-                <a:latin typeface="Calibri"/>
-              </a:rPr>
-              <a:t>•  App Android redesenhado (Compose + Material 3)</a:t>
-            </a:r>
-          </a:p>
-          <a:p>
-            <a:pPr>
-              <a:lnSpc>
-                <a:spcPct val="112000"/>
-              </a:lnSpc>
-              <a:spcAft>
-                <a:spcPts val="800"/>
-              </a:spcAft>
-            </a:pPr>
-            <a:r>
-              <a:rPr sz="1600">
-                <a:solidFill>
-                  <a:srgbClr val="FFFFFF"/>
-                </a:solidFill>
-                <a:latin typeface="Calibri"/>
-              </a:rPr>
-              <a:t>•  Modo offline com ML Kit (análise local sem internet)</a:t>
-            </a:r>
-          </a:p>
-          <a:p>
-            <a:pPr>
-              <a:lnSpc>
-                <a:spcPct val="112000"/>
-              </a:lnSpc>
-              <a:spcAft>
-                <a:spcPts val="800"/>
-              </a:spcAft>
-            </a:pPr>
-            <a:r>
-              <a:rPr sz="1600">
-                <a:solidFill>
-                  <a:srgbClr val="FFFFFF"/>
-                </a:solidFill>
-                <a:latin typeface="Calibri"/>
-              </a:rPr>
-              <a:t>•  Motor de exercícios migrado para IA (RandomForest)</a:t>
-            </a:r>
-          </a:p>
-          <a:p>
-            <a:pPr>
-              <a:lnSpc>
-                <a:spcPct val="112000"/>
-              </a:lnSpc>
-              <a:spcAft>
-                <a:spcPts val="800"/>
-              </a:spcAft>
-            </a:pPr>
-            <a:r>
-              <a:rPr sz="1400">
-                <a:solidFill>
-                  <a:srgbClr val="B0B8C2"/>
-                </a:solidFill>
-                <a:latin typeface="Calibri"/>
-              </a:rPr>
-              <a:t>    ‣  Classificador + analisador treinados em dataset sintético</a:t>
-            </a:r>
-          </a:p>
-          <a:p>
-            <a:pPr>
-              <a:lnSpc>
-                <a:spcPct val="112000"/>
-              </a:lnSpc>
-              <a:spcAft>
-                <a:spcPts val="800"/>
-              </a:spcAft>
-            </a:pPr>
-            <a:r>
-              <a:rPr sz="1400">
-                <a:solidFill>
-                  <a:srgbClr val="B0B8C2"/>
-                </a:solidFill>
-                <a:latin typeface="Calibri"/>
-              </a:rPr>
-              <a:t>    ‣  Cobertura completa: SQUAT, DEADLIFT, BENCH_PRESS</a:t>
+              <a:t>•  Motor de exercícios migrado para IA — item do Sprint 3, antecipado (ver próximo slide)</a:t>
             </a:r>
           </a:p>
         </p:txBody>
@@ -10721,7 +11649,7 @@
             <a:avLst/>
           </a:prstGeom>
           <a:solidFill>
-            <a:srgbClr val="00D4AA"/>
+            <a:srgbClr val="F59E0B"/>
           </a:solidFill>
           <a:ln>
             <a:noFill/>
@@ -10759,7 +11687,7 @@
         <p:spPr>
           <a:xfrm>
             <a:off x="548640" y="320040"/>
-            <a:ext cx="7315200" cy="365760"/>
+            <a:ext cx="8229600" cy="365760"/>
           </a:xfrm>
           <a:prstGeom prst="rect">
             <a:avLst/>
@@ -10780,11 +11708,11 @@
             <a:r>
               <a:rPr sz="1400" b="1" i="0">
                 <a:solidFill>
-                  <a:srgbClr val="00D4AA"/>
-                </a:solidFill>
-                <a:latin typeface="Calibri"/>
-              </a:rPr>
-              <a:t>FASE 3 · MOTOR DE IA</a:t>
+                  <a:srgbClr val="F59E0B"/>
+                </a:solidFill>
+                <a:latin typeface="Calibri"/>
+              </a:rPr>
+              <a:t>SPRINT 1 · EXPERIMENTO</a:t>
             </a:r>
           </a:p>
         </p:txBody>
@@ -10823,7 +11751,7 @@
                 </a:solidFill>
                 <a:latin typeface="Calibri"/>
               </a:rPr>
-              <a:t>Por que substituir as regras por IA?</a:t>
+              <a:t>Por que antecipamos o item de IA (Sprint 3)?</a:t>
             </a:r>
           </a:p>
         </p:txBody>
@@ -11089,7 +12017,7 @@
             <a:avLst/>
           </a:prstGeom>
           <a:solidFill>
-            <a:srgbClr val="00D4AA"/>
+            <a:srgbClr val="F59E0B"/>
           </a:solidFill>
           <a:ln>
             <a:noFill/>
@@ -11127,7 +12055,7 @@
         <p:spPr>
           <a:xfrm>
             <a:off x="548640" y="320040"/>
-            <a:ext cx="7315200" cy="365760"/>
+            <a:ext cx="8229600" cy="365760"/>
           </a:xfrm>
           <a:prstGeom prst="rect">
             <a:avLst/>
@@ -11148,11 +12076,11 @@
             <a:r>
               <a:rPr sz="1400" b="1" i="0">
                 <a:solidFill>
-                  <a:srgbClr val="00D4AA"/>
-                </a:solidFill>
-                <a:latin typeface="Calibri"/>
-              </a:rPr>
-              <a:t>FASE 4 · RESTAURAÇÃO</a:t>
+                  <a:srgbClr val="F59E0B"/>
+                </a:solidFill>
+                <a:latin typeface="Calibri"/>
+              </a:rPr>
+              <a:t>SPRINT 1 · HARDENING</a:t>
             </a:r>
           </a:p>
         </p:txBody>
@@ -11191,7 +12119,7 @@
                 </a:solidFill>
                 <a:latin typeface="Calibri"/>
               </a:rPr>
-              <a:t>Feature "Testar Vídeo" de volta ao app</a:t>
+              <a:t>Restauração da feature "Testar Vídeo"</a:t>
             </a:r>
           </a:p>
         </p:txBody>
@@ -11243,14 +12171,14 @@
         </p:nvSpPr>
         <p:spPr>
           <a:xfrm>
-            <a:off x="10180015" y="365760"/>
-            <a:ext cx="1554480" cy="411480"/>
+            <a:off x="10088575" y="365760"/>
+            <a:ext cx="1645920" cy="411480"/>
           </a:xfrm>
           <a:prstGeom prst="roundRect">
             <a:avLst/>
           </a:prstGeom>
           <a:solidFill>
-            <a:srgbClr val="008F73"/>
+            <a:srgbClr val="F59E0B"/>
           </a:solidFill>
           <a:ln>
             <a:noFill/>
@@ -11272,7 +12200,7 @@
           </a:fontRef>
         </p:style>
         <p:txBody>
-          <a:bodyPr rtlCol="0" anchor="ctr" wrap="none" lIns="50800" rIns="50800"/>
+          <a:bodyPr rtlCol="0" anchor="ctr"/>
           <a:lstStyle/>
           <a:p>
             <a:pPr algn="ctr"/>

--- a/GymVision_Historico_Projeto.pptx
+++ b/GymVision_Historico_Projeto.pptx
@@ -21,8 +21,6 @@
     <p:sldId id="269" r:id="rId20"/>
     <p:sldId id="270" r:id="rId21"/>
     <p:sldId id="271" r:id="rId22"/>
-    <p:sldId id="272" r:id="rId23"/>
-    <p:sldId id="273" r:id="rId24"/>
   </p:sldIdLst>
   <p:sldSz cx="12191695" cy="6858000" type="screen4x3"/>
   <p:notesSz cx="6858000" cy="9144000"/>
@@ -3230,7 +3228,7 @@
                 </a:solidFill>
                 <a:latin typeface="Calibri"/>
               </a:rPr>
-              <a:t>Histórico completo do projeto, organizado por Sprints — do Sprint 0 ao CI/CD</a:t>
+              <a:t>Do app Android monolítico original ao CI/CD — evolução real do código, sprint a sprint</a:t>
             </a:r>
           </a:p>
         </p:txBody>
@@ -3461,7 +3459,7 @@
                 </a:solidFill>
                 <a:latin typeface="Calibri"/>
               </a:rPr>
-              <a:t>SPRINT 1 · HARDENING</a:t>
+              <a:t>SPRINT 4 · HARDENING (1/4)</a:t>
             </a:r>
           </a:p>
         </p:txBody>
@@ -3500,7 +3498,7 @@
                 </a:solidFill>
                 <a:latin typeface="Calibri"/>
               </a:rPr>
-              <a:t>Decisão: reverter o motor de IA para regras</a:t>
+              <a:t>Restauração da feature "Testar Vídeo"</a:t>
             </a:r>
           </a:p>
         </p:txBody>
@@ -3604,86 +3602,8 @@
         </p:nvSpPr>
         <p:spPr>
           <a:xfrm>
-            <a:off x="548640" y="1371600"/>
-            <a:ext cx="10789920" cy="822960"/>
-          </a:xfrm>
-          <a:prstGeom prst="rect">
-            <a:avLst/>
-          </a:prstGeom>
-          <a:noFill/>
-        </p:spPr>
-        <p:txBody>
-          <a:bodyPr wrap="square" anchor="t">
-            <a:spAutoFit/>
-          </a:bodyPr>
-          <a:lstStyle/>
-          <a:p>
-            <a:pPr algn="l">
-              <a:lnSpc>
-                <a:spcPct val="125000"/>
-              </a:lnSpc>
-            </a:pPr>
-            <a:r>
-              <a:rPr sz="1700" b="0" i="0">
-                <a:solidFill>
-                  <a:srgbClr val="FFFFFF"/>
-                </a:solidFill>
-                <a:latin typeface="Calibri"/>
-              </a:rPr>
-              <a:t>Usuário testou o motor de IA com os vídeos reais e achou os avisos de erro visivelmente mais brandos que o motor de regras original.</a:t>
-            </a:r>
-          </a:p>
-        </p:txBody>
-      </p:sp>
-      <p:sp>
-        <p:nvSpPr>
-          <p:cNvPr id="9" name="TextBox 8"/>
-          <p:cNvSpPr txBox="1"/>
-          <p:nvPr/>
-        </p:nvSpPr>
-        <p:spPr>
-          <a:xfrm>
-            <a:off x="548640" y="2331720"/>
-            <a:ext cx="2377440" cy="365760"/>
-          </a:xfrm>
-          <a:prstGeom prst="rect">
-            <a:avLst/>
-          </a:prstGeom>
-          <a:noFill/>
-        </p:spPr>
-        <p:txBody>
-          <a:bodyPr wrap="square" anchor="t">
-            <a:spAutoFit/>
-          </a:bodyPr>
-          <a:lstStyle/>
-          <a:p>
-            <a:pPr algn="l">
-              <a:lnSpc>
-                <a:spcPct val="100000"/>
-              </a:lnSpc>
-            </a:pPr>
-            <a:r>
-              <a:rPr sz="1400" b="1" i="0">
-                <a:solidFill>
-                  <a:srgbClr val="F59E0B"/>
-                </a:solidFill>
-                <a:latin typeface="Calibri"/>
-              </a:rPr>
-              <a:t>CAUSA RAIZ</a:t>
-            </a:r>
-          </a:p>
-        </p:txBody>
-      </p:sp>
-      <p:sp>
-        <p:nvSpPr>
-          <p:cNvPr id="10" name="TextBox 9"/>
-          <p:cNvSpPr txBox="1"/>
-          <p:nvPr/>
-        </p:nvSpPr>
-        <p:spPr>
-          <a:xfrm>
-            <a:off x="548640" y="2743200"/>
-            <a:ext cx="10789920" cy="3017520"/>
+            <a:off x="548640" y="1463040"/>
+            <a:ext cx="10789920" cy="4572000"/>
           </a:xfrm>
           <a:prstGeom prst="rect">
             <a:avLst/>
@@ -3705,13 +3625,13 @@
               </a:spcAft>
             </a:pPr>
             <a:r>
-              <a:rPr sz="1600">
+              <a:rPr sz="1800">
                 <a:solidFill>
                   <a:srgbClr val="FFFFFF"/>
                 </a:solidFill>
                 <a:latin typeface="Calibri"/>
               </a:rPr>
-              <a:t>•  Dataset de treino sintético rotulado pelo próprio motor de regras (weak supervision)</a:t>
+              <a:t>•  Causa raiz: VideoTestScreen/ViewModel já existiam completos desde o Sprint 3, mas nunca</a:t>
             </a:r>
           </a:p>
           <a:p>
@@ -3726,11 +3646,11 @@
             <a:r>
               <a:rPr sz="1600">
                 <a:solidFill>
-                  <a:srgbClr val="FFFFFF"/>
-                </a:solidFill>
-                <a:latin typeface="Calibri"/>
-              </a:rPr>
-              <a:t>•  Um classificador estatístico treinado para imitar regras determinísticas tende a suavizar os extremos (regressão à média) — especialmente a classe HIGH (minoritária)</a:t>
+                  <a:srgbClr val="B0B8C2"/>
+                </a:solidFill>
+                <a:latin typeface="Calibri"/>
+              </a:rPr>
+              <a:t>    ‣  foram adicionados à barra de navegação inferior — rota órfã, sem ponto de entrada na UI</a:t>
             </a:r>
           </a:p>
           <a:p>
@@ -3743,13 +3663,13 @@
               </a:spcAft>
             </a:pPr>
             <a:r>
-              <a:rPr sz="1600">
+              <a:rPr sz="1800">
                 <a:solidFill>
                   <a:srgbClr val="FFFFFF"/>
                 </a:solidFill>
                 <a:latin typeface="Calibri"/>
               </a:rPr>
-              <a:t>•  Conclusão do usuário: a IA nunca superaria as regras nesse desenho — não vale a complexidade adicional</a:t>
+              <a:t>•  Corrigido: item "Testar" adicionado à navegação</a:t>
             </a:r>
           </a:p>
           <a:p>
@@ -3762,13 +3682,32 @@
               </a:spcAft>
             </a:pPr>
             <a:r>
-              <a:rPr sz="1600">
+              <a:rPr sz="1800">
                 <a:solidFill>
                   <a:srgbClr val="FFFFFF"/>
                 </a:solidFill>
                 <a:latin typeface="Calibri"/>
               </a:rPr>
-              <a:t>•  Decisão: revert apenas de import (sem alterar lógica) — código da IA mantido no disco, desconectado, para retomar com dados reais no futuro</a:t>
+              <a:t>•  8 vídeos reais de teste (squat, deadlift, lunge, bench press, bent-over row) embutidos como assets do APK</a:t>
+            </a:r>
+          </a:p>
+          <a:p>
+            <a:pPr>
+              <a:lnSpc>
+                <a:spcPct val="112000"/>
+              </a:lnSpc>
+              <a:spcAft>
+                <a:spcPts val="800"/>
+              </a:spcAft>
+            </a:pPr>
+            <a:r>
+              <a:rPr sz="1800">
+                <a:solidFill>
+                  <a:srgbClr val="FFFFFF"/>
+                </a:solidFill>
+                <a:latin typeface="Calibri"/>
+              </a:rPr>
+              <a:t>•  FileProvider configurado para gerar URIs de conteúdo seguras a partir dos vídeos de exemplo</a:t>
             </a:r>
           </a:p>
         </p:txBody>
@@ -3921,7 +3860,7 @@
                 </a:solidFill>
                 <a:latin typeface="Calibri"/>
               </a:rPr>
-              <a:t>SPRINT 1 · HARDENING</a:t>
+              <a:t>SPRINT 4 · HARDENING (2/4)</a:t>
             </a:r>
           </a:p>
         </p:txBody>
@@ -3960,7 +3899,7 @@
                 </a:solidFill>
                 <a:latin typeface="Calibri"/>
               </a:rPr>
-              <a:t>Bugs reais encontrados após a reversão</a:t>
+              <a:t>Decisão: reverter o motor de IA para regras</a:t>
             </a:r>
           </a:p>
         </p:txBody>
@@ -4065,7 +4004,85 @@
         <p:spPr>
           <a:xfrm>
             <a:off x="548640" y="1371600"/>
-            <a:ext cx="10789920" cy="4846320"/>
+            <a:ext cx="10789920" cy="822960"/>
+          </a:xfrm>
+          <a:prstGeom prst="rect">
+            <a:avLst/>
+          </a:prstGeom>
+          <a:noFill/>
+        </p:spPr>
+        <p:txBody>
+          <a:bodyPr wrap="square" anchor="t">
+            <a:spAutoFit/>
+          </a:bodyPr>
+          <a:lstStyle/>
+          <a:p>
+            <a:pPr algn="l">
+              <a:lnSpc>
+                <a:spcPct val="125000"/>
+              </a:lnSpc>
+            </a:pPr>
+            <a:r>
+              <a:rPr sz="1700" b="0" i="0">
+                <a:solidFill>
+                  <a:srgbClr val="FFFFFF"/>
+                </a:solidFill>
+                <a:latin typeface="Calibri"/>
+              </a:rPr>
+              <a:t>Usuário testou o motor de IA com os vídeos reais e achou os avisos de erro visivelmente mais brandos que o motor de regras original.</a:t>
+            </a:r>
+          </a:p>
+        </p:txBody>
+      </p:sp>
+      <p:sp>
+        <p:nvSpPr>
+          <p:cNvPr id="9" name="TextBox 8"/>
+          <p:cNvSpPr txBox="1"/>
+          <p:nvPr/>
+        </p:nvSpPr>
+        <p:spPr>
+          <a:xfrm>
+            <a:off x="548640" y="2331720"/>
+            <a:ext cx="2377440" cy="365760"/>
+          </a:xfrm>
+          <a:prstGeom prst="rect">
+            <a:avLst/>
+          </a:prstGeom>
+          <a:noFill/>
+        </p:spPr>
+        <p:txBody>
+          <a:bodyPr wrap="square" anchor="t">
+            <a:spAutoFit/>
+          </a:bodyPr>
+          <a:lstStyle/>
+          <a:p>
+            <a:pPr algn="l">
+              <a:lnSpc>
+                <a:spcPct val="100000"/>
+              </a:lnSpc>
+            </a:pPr>
+            <a:r>
+              <a:rPr sz="1400" b="1" i="0">
+                <a:solidFill>
+                  <a:srgbClr val="F59E0B"/>
+                </a:solidFill>
+                <a:latin typeface="Calibri"/>
+              </a:rPr>
+              <a:t>CAUSA RAIZ</a:t>
+            </a:r>
+          </a:p>
+        </p:txBody>
+      </p:sp>
+      <p:sp>
+        <p:nvSpPr>
+          <p:cNvPr id="10" name="TextBox 9"/>
+          <p:cNvSpPr txBox="1"/>
+          <p:nvPr/>
+        </p:nvSpPr>
+        <p:spPr>
+          <a:xfrm>
+            <a:off x="548640" y="2743200"/>
+            <a:ext cx="10789920" cy="3017520"/>
           </a:xfrm>
           <a:prstGeom prst="rect">
             <a:avLst/>
@@ -4093,7 +4110,7 @@
                 </a:solidFill>
                 <a:latin typeface="Calibri"/>
               </a:rPr>
-              <a:t>•  Score zerado em BENCH_PRESS/BENT_OVER_ROW: bug só tinha sido corrigido do lado da IA — calculate_score() zerava score sempre que phase==UNKNOWN (joelho fora de quadro), irrelevante para supino/remada. Corrigido com force_assessable.</a:t>
+              <a:t>•  Dataset de treino sintético rotulado pelo próprio motor de regras (weak supervision)</a:t>
             </a:r>
           </a:p>
           <a:p>
@@ -4112,7 +4129,7 @@
                 </a:solidFill>
                 <a:latin typeface="Calibri"/>
               </a:rPr>
-              <a:t>•  Vídeo "Bad squat form" com valgo visível dava avg_score=100 e zero erros: diagnóstico frame-a-frame no pipeline de produção mostrou desvio real de ~1.8–3.3% no joelho direito durante o movimento, mas o threshold (4.0%) nunca era cruzado. Ajustado para 2.0%, validado sem falso positivo.</a:t>
+              <a:t>•  Classificador estatístico treinado para imitar regras determinísticas tende a suavizar os extremos (regressão à média) — especialmente a classe HIGH (minoritária)</a:t>
             </a:r>
           </a:p>
           <a:p>
@@ -4131,7 +4148,26 @@
                 </a:solidFill>
                 <a:latin typeface="Calibri"/>
               </a:rPr>
-              <a:t>•  Overlay de landmarks invisível no "Testar Vídeo": VideoView faz letterbox do vídeo, mas o overlay desenhava no tamanho cheio do Canvas — esqueleto caía fora da área visível. Corrigido calculando o retângulo real do vídeo e passando para o overlay.</a:t>
+              <a:t>•  Conclusão: a IA nunca superaria as regras nesse desenho — não vale a complexidade adicional</a:t>
+            </a:r>
+          </a:p>
+          <a:p>
+            <a:pPr>
+              <a:lnSpc>
+                <a:spcPct val="112000"/>
+              </a:lnSpc>
+              <a:spcAft>
+                <a:spcPts val="800"/>
+              </a:spcAft>
+            </a:pPr>
+            <a:r>
+              <a:rPr sz="1600">
+                <a:solidFill>
+                  <a:srgbClr val="FFFFFF"/>
+                </a:solidFill>
+                <a:latin typeface="Calibri"/>
+              </a:rPr>
+              <a:t>•  Decisão: revert apenas de import (sem alterar lógica) — código da IA mantido no disco, desconectado</a:t>
             </a:r>
           </a:p>
         </p:txBody>
@@ -4284,7 +4320,7 @@
                 </a:solidFill>
                 <a:latin typeface="Calibri"/>
               </a:rPr>
-              <a:t>SPRINT 1 · HARDENING</a:t>
+              <a:t>SPRINT 4 · HARDENING (3/4)</a:t>
             </a:r>
           </a:p>
         </p:txBody>
@@ -4323,7 +4359,7 @@
                 </a:solidFill>
                 <a:latin typeface="Calibri"/>
               </a:rPr>
-              <a:t>Pipeline CI/CD (GitHub Actions)</a:t>
+              <a:t>Bugs reais encontrados após a reversão</a:t>
             </a:r>
           </a:p>
         </p:txBody>
@@ -4369,14 +4405,66 @@
       </p:sp>
       <p:sp>
         <p:nvSpPr>
-          <p:cNvPr id="7" name="TextBox 6"/>
+          <p:cNvPr id="7" name="Rounded Rectangle 6"/>
+          <p:cNvSpPr/>
+          <p:nvPr/>
+        </p:nvSpPr>
+        <p:spPr>
+          <a:xfrm>
+            <a:off x="10088575" y="365760"/>
+            <a:ext cx="1645920" cy="411480"/>
+          </a:xfrm>
+          <a:prstGeom prst="roundRect">
+            <a:avLst/>
+          </a:prstGeom>
+          <a:solidFill>
+            <a:srgbClr val="F59E0B"/>
+          </a:solidFill>
+          <a:ln>
+            <a:noFill/>
+          </a:ln>
+          <a:effectLst/>
+        </p:spPr>
+        <p:style>
+          <a:lnRef idx="1">
+            <a:schemeClr val="accent1"/>
+          </a:lnRef>
+          <a:fillRef idx="3">
+            <a:schemeClr val="accent1"/>
+          </a:fillRef>
+          <a:effectRef idx="2">
+            <a:schemeClr val="accent1"/>
+          </a:effectRef>
+          <a:fontRef idx="minor">
+            <a:schemeClr val="lt1"/>
+          </a:fontRef>
+        </p:style>
+        <p:txBody>
+          <a:bodyPr rtlCol="0" anchor="ctr"/>
+          <a:lstStyle/>
+          <a:p>
+            <a:pPr algn="ctr"/>
+            <a:r>
+              <a:rPr sz="1300" b="1">
+                <a:solidFill>
+                  <a:srgbClr val="FFFFFF"/>
+                </a:solidFill>
+              </a:rPr>
+              <a:t>23/06</a:t>
+            </a:r>
+          </a:p>
+        </p:txBody>
+      </p:sp>
+      <p:sp>
+        <p:nvSpPr>
+          <p:cNvPr id="8" name="TextBox 7"/>
           <p:cNvSpPr txBox="1"/>
           <p:nvPr/>
         </p:nvSpPr>
         <p:spPr>
           <a:xfrm>
             <a:off x="548640" y="1371600"/>
-            <a:ext cx="5394960" cy="4572000"/>
+            <a:ext cx="10789920" cy="4846320"/>
           </a:xfrm>
           <a:prstGeom prst="rect">
             <a:avLst/>
@@ -4398,13 +4486,13 @@
               </a:spcAft>
             </a:pPr>
             <a:r>
-              <a:rPr sz="1550">
+              <a:rPr sz="1600">
                 <a:solidFill>
                   <a:srgbClr val="FFFFFF"/>
                 </a:solidFill>
                 <a:latin typeface="Calibri"/>
               </a:rPr>
-              <a:t>•  Dispara em push/PR para main, master, develop</a:t>
+              <a:t>•  Score zerado em BENCH_PRESS/BENT_OVER_ROW: bug só tinha sido corrigido do lado da IA — calculate_score() zerava score sempre que phase==UNKNOWN (joelho fora de quadro), irrelevante para supino/remada. Corrigido com force_assessable.</a:t>
             </a:r>
           </a:p>
           <a:p>
@@ -4417,13 +4505,13 @@
               </a:spcAft>
             </a:pPr>
             <a:r>
-              <a:rPr sz="1550">
+              <a:rPr sz="1600">
                 <a:solidFill>
                   <a:srgbClr val="FFFFFF"/>
                 </a:solidFill>
                 <a:latin typeface="Calibri"/>
               </a:rPr>
-              <a:t>•  Jobs de teste por serviço:</a:t>
+              <a:t>•  Vídeo "Bad squat form" com valgo visível dava avg_score=100 e zero erros: diagnóstico frame-a-frame mostrou desvio real de ~1.8–3.3% no joelho direito, mas o threshold (4.0%) nunca era cruzado. Ajustado para 2.0%, validado sem falso positivo.</a:t>
             </a:r>
           </a:p>
           <a:p>
@@ -4436,226 +4524,13 @@
               </a:spcAft>
             </a:pPr>
             <a:r>
-              <a:rPr sz="1350">
-                <a:solidFill>
-                  <a:srgbClr val="B0B8C2"/>
-                </a:solidFill>
-                <a:latin typeface="Calibri"/>
-              </a:rPr>
-              <a:t>    ‣  user-service-test (Gradle + Postgres + Redis)</a:t>
-            </a:r>
-          </a:p>
-          <a:p>
-            <a:pPr>
-              <a:lnSpc>
-                <a:spcPct val="112000"/>
-              </a:lnSpc>
-              <a:spcAft>
-                <a:spcPts val="800"/>
-              </a:spcAft>
-            </a:pPr>
-            <a:r>
-              <a:rPr sz="1350">
-                <a:solidFill>
-                  <a:srgbClr val="B0B8C2"/>
-                </a:solidFill>
-                <a:latin typeface="Calibri"/>
-              </a:rPr>
-              <a:t>    ‣  pose-service-test (pytest)</a:t>
-            </a:r>
-          </a:p>
-          <a:p>
-            <a:pPr>
-              <a:lnSpc>
-                <a:spcPct val="112000"/>
-              </a:lnSpc>
-              <a:spcAft>
-                <a:spcPts val="800"/>
-              </a:spcAft>
-            </a:pPr>
-            <a:r>
-              <a:rPr sz="1350">
-                <a:solidFill>
-                  <a:srgbClr val="B0B8C2"/>
-                </a:solidFill>
-                <a:latin typeface="Calibri"/>
-              </a:rPr>
-              <a:t>    ‣  session-service-build (Gradle)</a:t>
-            </a:r>
-          </a:p>
-          <a:p>
-            <a:pPr>
-              <a:lnSpc>
-                <a:spcPct val="112000"/>
-              </a:lnSpc>
-              <a:spcAft>
-                <a:spcPts val="800"/>
-              </a:spcAft>
-            </a:pPr>
-            <a:r>
-              <a:rPr sz="1350">
-                <a:solidFill>
-                  <a:srgbClr val="B0B8C2"/>
-                </a:solidFill>
-                <a:latin typeface="Calibri"/>
-              </a:rPr>
-              <a:t>    ‣  analytics-service-test (flake8)</a:t>
-            </a:r>
-          </a:p>
-          <a:p>
-            <a:pPr>
-              <a:lnSpc>
-                <a:spcPct val="112000"/>
-              </a:lnSpc>
-              <a:spcAft>
-                <a:spcPts val="800"/>
-              </a:spcAft>
-            </a:pPr>
-            <a:r>
-              <a:rPr sz="1350">
-                <a:solidFill>
-                  <a:srgbClr val="B0B8C2"/>
-                </a:solidFill>
-                <a:latin typeface="Calibri"/>
-              </a:rPr>
-              <a:t>    ‣  dashboard-build (npm + Vite)</a:t>
-            </a:r>
-          </a:p>
-          <a:p>
-            <a:pPr>
-              <a:lnSpc>
-                <a:spcPct val="112000"/>
-              </a:lnSpc>
-              <a:spcAft>
-                <a:spcPts val="800"/>
-              </a:spcAft>
-            </a:pPr>
-            <a:r>
-              <a:rPr sz="1350">
-                <a:solidFill>
-                  <a:srgbClr val="B0B8C2"/>
-                </a:solidFill>
-                <a:latin typeface="Calibri"/>
-              </a:rPr>
-              <a:t>    ‣  android-build (Gradle assembleDebug + artefato)</a:t>
-            </a:r>
-          </a:p>
-          <a:p>
-            <a:pPr>
-              <a:lnSpc>
-                <a:spcPct val="112000"/>
-              </a:lnSpc>
-              <a:spcAft>
-                <a:spcPts val="800"/>
-              </a:spcAft>
-            </a:pPr>
-            <a:r>
-              <a:rPr sz="1350">
-                <a:solidFill>
-                  <a:srgbClr val="B0B8C2"/>
-                </a:solidFill>
-                <a:latin typeface="Calibri"/>
-              </a:rPr>
-              <a:t>    ‣  compose-validate (docker compose config)</a:t>
-            </a:r>
-          </a:p>
-        </p:txBody>
-      </p:sp>
-      <p:sp>
-        <p:nvSpPr>
-          <p:cNvPr id="8" name="TextBox 7"/>
-          <p:cNvSpPr txBox="1"/>
-          <p:nvPr/>
-        </p:nvSpPr>
-        <p:spPr>
-          <a:xfrm>
-            <a:off x="6217920" y="1371600"/>
-            <a:ext cx="5394960" cy="4572000"/>
-          </a:xfrm>
-          <a:prstGeom prst="rect">
-            <a:avLst/>
-          </a:prstGeom>
-          <a:noFill/>
-        </p:spPr>
-        <p:txBody>
-          <a:bodyPr wrap="square">
-            <a:spAutoFit/>
-          </a:bodyPr>
-          <a:lstStyle/>
-          <a:p>
-            <a:pPr>
-              <a:lnSpc>
-                <a:spcPct val="112000"/>
-              </a:lnSpc>
-              <a:spcAft>
-                <a:spcPts val="800"/>
-              </a:spcAft>
-            </a:pPr>
-            <a:r>
-              <a:rPr sz="1550">
+              <a:rPr sz="1600">
                 <a:solidFill>
                   <a:srgbClr val="FFFFFF"/>
                 </a:solidFill>
                 <a:latin typeface="Calibri"/>
               </a:rPr>
-              <a:t>•  build-and-push: builda e publica imagem de cada serviço</a:t>
-            </a:r>
-          </a:p>
-          <a:p>
-            <a:pPr>
-              <a:lnSpc>
-                <a:spcPct val="112000"/>
-              </a:lnSpc>
-              <a:spcAft>
-                <a:spcPts val="800"/>
-              </a:spcAft>
-            </a:pPr>
-            <a:r>
-              <a:rPr sz="1550">
-                <a:solidFill>
-                  <a:srgbClr val="FFFFFF"/>
-                </a:solidFill>
-                <a:latin typeface="Calibri"/>
-              </a:rPr>
-              <a:t>•  deploy-staging: SSH no servidor + docker compose pull/up</a:t>
-            </a:r>
-          </a:p>
-          <a:p>
-            <a:pPr>
-              <a:lnSpc>
-                <a:spcPct val="112000"/>
-              </a:lnSpc>
-              <a:spcAft>
-                <a:spcPts val="800"/>
-              </a:spcAft>
-            </a:pPr>
-            <a:r>
-              <a:rPr sz="1550">
-                <a:solidFill>
-                  <a:srgbClr val="FFFFFF"/>
-                </a:solidFill>
-                <a:latin typeface="Calibri"/>
-              </a:rPr>
-              <a:t>•  Bug encontrado e corrigido nesta sessão:</a:t>
-            </a:r>
-          </a:p>
-          <a:p>
-            <a:pPr>
-              <a:lnSpc>
-                <a:spcPct val="112000"/>
-              </a:lnSpc>
-              <a:spcAft>
-                <a:spcPts val="800"/>
-              </a:spcAft>
-            </a:pPr>
-            <a:r>
-              <a:rPr sz="1350">
-                <a:solidFill>
-                  <a:srgbClr val="B0B8C2"/>
-                </a:solidFill>
-                <a:latin typeface="Calibri"/>
-              </a:rPr>
-              <a:t>    ‣  o trigger só aceitava main/develop — mas o branch real do repo é master. O pipeline nunca tinha publicado nada de fato.</a:t>
+              <a:t>•  Overlay de landmarks invisível no "Testar Vídeo": VideoView faz letterbox do vídeo, mas o overlay desenhava no tamanho cheio do Canvas. Corrigido calculando o retângulo real do vídeo.</a:t>
             </a:r>
           </a:p>
         </p:txBody>
@@ -4808,7 +4683,7 @@
                 </a:solidFill>
                 <a:latin typeface="Calibri"/>
               </a:rPr>
-              <a:t>SPRINT 1 · HARDENING</a:t>
+              <a:t>SPRINT 4 · HARDENING (4/4)</a:t>
             </a:r>
           </a:p>
         </p:txBody>
@@ -4847,7 +4722,7 @@
                 </a:solidFill>
                 <a:latin typeface="Calibri"/>
               </a:rPr>
-              <a:t>Publicação no Docker Hub</a:t>
+              <a:t>CI/CD reforçado e publicação no Docker Hub</a:t>
             </a:r>
           </a:p>
         </p:txBody>
@@ -4893,485 +4768,14 @@
       </p:sp>
       <p:sp>
         <p:nvSpPr>
-          <p:cNvPr id="7" name="Rounded Rectangle 6"/>
-          <p:cNvSpPr/>
-          <p:nvPr/>
-        </p:nvSpPr>
-        <p:spPr>
-          <a:xfrm>
-            <a:off x="548640" y="1463040"/>
-            <a:ext cx="1691640" cy="548640"/>
-          </a:xfrm>
-          <a:prstGeom prst="roundRect">
-            <a:avLst/>
-          </a:prstGeom>
-          <a:solidFill>
-            <a:srgbClr val="161B22"/>
-          </a:solidFill>
-          <a:ln w="12700">
-            <a:solidFill>
-              <a:srgbClr val="00D4AA"/>
-            </a:solidFill>
-          </a:ln>
-          <a:effectLst/>
-        </p:spPr>
-        <p:style>
-          <a:lnRef idx="1">
-            <a:schemeClr val="accent1"/>
-          </a:lnRef>
-          <a:fillRef idx="3">
-            <a:schemeClr val="accent1"/>
-          </a:fillRef>
-          <a:effectRef idx="2">
-            <a:schemeClr val="accent1"/>
-          </a:effectRef>
-          <a:fontRef idx="minor">
-            <a:schemeClr val="lt1"/>
-          </a:fontRef>
-        </p:style>
-        <p:txBody>
-          <a:bodyPr rtlCol="0" anchor="ctr" wrap="square"/>
-          <a:lstStyle/>
-          <a:p>
-            <a:pPr algn="ctr"/>
-            <a:r>
-              <a:rPr sz="1200" b="1">
-                <a:solidFill>
-                  <a:srgbClr val="FFFFFF"/>
-                </a:solidFill>
-              </a:rPr>
-              <a:t>user-service</a:t>
-            </a:r>
-          </a:p>
-        </p:txBody>
-      </p:sp>
-      <p:sp>
-        <p:nvSpPr>
-          <p:cNvPr id="8" name="Rounded Rectangle 7"/>
-          <p:cNvSpPr/>
-          <p:nvPr/>
-        </p:nvSpPr>
-        <p:spPr>
-          <a:xfrm>
-            <a:off x="2377440" y="1463040"/>
-            <a:ext cx="1691640" cy="548640"/>
-          </a:xfrm>
-          <a:prstGeom prst="roundRect">
-            <a:avLst/>
-          </a:prstGeom>
-          <a:solidFill>
-            <a:srgbClr val="161B22"/>
-          </a:solidFill>
-          <a:ln w="12700">
-            <a:solidFill>
-              <a:srgbClr val="00D4AA"/>
-            </a:solidFill>
-          </a:ln>
-          <a:effectLst/>
-        </p:spPr>
-        <p:style>
-          <a:lnRef idx="1">
-            <a:schemeClr val="accent1"/>
-          </a:lnRef>
-          <a:fillRef idx="3">
-            <a:schemeClr val="accent1"/>
-          </a:fillRef>
-          <a:effectRef idx="2">
-            <a:schemeClr val="accent1"/>
-          </a:effectRef>
-          <a:fontRef idx="minor">
-            <a:schemeClr val="lt1"/>
-          </a:fontRef>
-        </p:style>
-        <p:txBody>
-          <a:bodyPr rtlCol="0" anchor="ctr" wrap="square"/>
-          <a:lstStyle/>
-          <a:p>
-            <a:pPr algn="ctr"/>
-            <a:r>
-              <a:rPr sz="1200" b="1">
-                <a:solidFill>
-                  <a:srgbClr val="FFFFFF"/>
-                </a:solidFill>
-              </a:rPr>
-              <a:t>pose-service</a:t>
-            </a:r>
-          </a:p>
-        </p:txBody>
-      </p:sp>
-      <p:sp>
-        <p:nvSpPr>
-          <p:cNvPr id="9" name="Rounded Rectangle 8"/>
-          <p:cNvSpPr/>
-          <p:nvPr/>
-        </p:nvSpPr>
-        <p:spPr>
-          <a:xfrm>
-            <a:off x="4206240" y="1463040"/>
-            <a:ext cx="1691640" cy="548640"/>
-          </a:xfrm>
-          <a:prstGeom prst="roundRect">
-            <a:avLst/>
-          </a:prstGeom>
-          <a:solidFill>
-            <a:srgbClr val="161B22"/>
-          </a:solidFill>
-          <a:ln w="12700">
-            <a:solidFill>
-              <a:srgbClr val="00D4AA"/>
-            </a:solidFill>
-          </a:ln>
-          <a:effectLst/>
-        </p:spPr>
-        <p:style>
-          <a:lnRef idx="1">
-            <a:schemeClr val="accent1"/>
-          </a:lnRef>
-          <a:fillRef idx="3">
-            <a:schemeClr val="accent1"/>
-          </a:fillRef>
-          <a:effectRef idx="2">
-            <a:schemeClr val="accent1"/>
-          </a:effectRef>
-          <a:fontRef idx="minor">
-            <a:schemeClr val="lt1"/>
-          </a:fontRef>
-        </p:style>
-        <p:txBody>
-          <a:bodyPr rtlCol="0" anchor="ctr" wrap="square"/>
-          <a:lstStyle/>
-          <a:p>
-            <a:pPr algn="ctr"/>
-            <a:r>
-              <a:rPr sz="1200" b="1">
-                <a:solidFill>
-                  <a:srgbClr val="FFFFFF"/>
-                </a:solidFill>
-              </a:rPr>
-              <a:t>session-service</a:t>
-            </a:r>
-          </a:p>
-        </p:txBody>
-      </p:sp>
-      <p:sp>
-        <p:nvSpPr>
-          <p:cNvPr id="10" name="Rounded Rectangle 9"/>
-          <p:cNvSpPr/>
-          <p:nvPr/>
-        </p:nvSpPr>
-        <p:spPr>
-          <a:xfrm>
-            <a:off x="548640" y="2240280"/>
-            <a:ext cx="1691640" cy="548640"/>
-          </a:xfrm>
-          <a:prstGeom prst="roundRect">
-            <a:avLst/>
-          </a:prstGeom>
-          <a:solidFill>
-            <a:srgbClr val="161B22"/>
-          </a:solidFill>
-          <a:ln w="12700">
-            <a:solidFill>
-              <a:srgbClr val="00D4AA"/>
-            </a:solidFill>
-          </a:ln>
-          <a:effectLst/>
-        </p:spPr>
-        <p:style>
-          <a:lnRef idx="1">
-            <a:schemeClr val="accent1"/>
-          </a:lnRef>
-          <a:fillRef idx="3">
-            <a:schemeClr val="accent1"/>
-          </a:fillRef>
-          <a:effectRef idx="2">
-            <a:schemeClr val="accent1"/>
-          </a:effectRef>
-          <a:fontRef idx="minor">
-            <a:schemeClr val="lt1"/>
-          </a:fontRef>
-        </p:style>
-        <p:txBody>
-          <a:bodyPr rtlCol="0" anchor="ctr" wrap="square"/>
-          <a:lstStyle/>
-          <a:p>
-            <a:pPr algn="ctr"/>
-            <a:r>
-              <a:rPr sz="1200" b="1">
-                <a:solidFill>
-                  <a:srgbClr val="FFFFFF"/>
-                </a:solidFill>
-              </a:rPr>
-              <a:t>analytics-service</a:t>
-            </a:r>
-          </a:p>
-        </p:txBody>
-      </p:sp>
-      <p:sp>
-        <p:nvSpPr>
-          <p:cNvPr id="11" name="Rounded Rectangle 10"/>
-          <p:cNvSpPr/>
-          <p:nvPr/>
-        </p:nvSpPr>
-        <p:spPr>
-          <a:xfrm>
-            <a:off x="2377440" y="2240280"/>
-            <a:ext cx="1691640" cy="548640"/>
-          </a:xfrm>
-          <a:prstGeom prst="roundRect">
-            <a:avLst/>
-          </a:prstGeom>
-          <a:solidFill>
-            <a:srgbClr val="161B22"/>
-          </a:solidFill>
-          <a:ln w="12700">
-            <a:solidFill>
-              <a:srgbClr val="00D4AA"/>
-            </a:solidFill>
-          </a:ln>
-          <a:effectLst/>
-        </p:spPr>
-        <p:style>
-          <a:lnRef idx="1">
-            <a:schemeClr val="accent1"/>
-          </a:lnRef>
-          <a:fillRef idx="3">
-            <a:schemeClr val="accent1"/>
-          </a:fillRef>
-          <a:effectRef idx="2">
-            <a:schemeClr val="accent1"/>
-          </a:effectRef>
-          <a:fontRef idx="minor">
-            <a:schemeClr val="lt1"/>
-          </a:fontRef>
-        </p:style>
-        <p:txBody>
-          <a:bodyPr rtlCol="0" anchor="ctr" wrap="square"/>
-          <a:lstStyle/>
-          <a:p>
-            <a:pPr algn="ctr"/>
-            <a:r>
-              <a:rPr sz="1200" b="1">
-                <a:solidFill>
-                  <a:srgbClr val="FFFFFF"/>
-                </a:solidFill>
-              </a:rPr>
-              <a:t>backup-service</a:t>
-            </a:r>
-          </a:p>
-        </p:txBody>
-      </p:sp>
-      <p:sp>
-        <p:nvSpPr>
-          <p:cNvPr id="12" name="Rounded Rectangle 11"/>
-          <p:cNvSpPr/>
-          <p:nvPr/>
-        </p:nvSpPr>
-        <p:spPr>
-          <a:xfrm>
-            <a:off x="4206240" y="2240280"/>
-            <a:ext cx="1691640" cy="548640"/>
-          </a:xfrm>
-          <a:prstGeom prst="roundRect">
-            <a:avLst/>
-          </a:prstGeom>
-          <a:solidFill>
-            <a:srgbClr val="161B22"/>
-          </a:solidFill>
-          <a:ln w="12700">
-            <a:solidFill>
-              <a:srgbClr val="00D4AA"/>
-            </a:solidFill>
-          </a:ln>
-          <a:effectLst/>
-        </p:spPr>
-        <p:style>
-          <a:lnRef idx="1">
-            <a:schemeClr val="accent1"/>
-          </a:lnRef>
-          <a:fillRef idx="3">
-            <a:schemeClr val="accent1"/>
-          </a:fillRef>
-          <a:effectRef idx="2">
-            <a:schemeClr val="accent1"/>
-          </a:effectRef>
-          <a:fontRef idx="minor">
-            <a:schemeClr val="lt1"/>
-          </a:fontRef>
-        </p:style>
-        <p:txBody>
-          <a:bodyPr rtlCol="0" anchor="ctr" wrap="square"/>
-          <a:lstStyle/>
-          <a:p>
-            <a:pPr algn="ctr"/>
-            <a:r>
-              <a:rPr sz="1200" b="1">
-                <a:solidFill>
-                  <a:srgbClr val="FFFFFF"/>
-                </a:solidFill>
-              </a:rPr>
-              <a:t>notification-service</a:t>
-            </a:r>
-          </a:p>
-        </p:txBody>
-      </p:sp>
-      <p:sp>
-        <p:nvSpPr>
-          <p:cNvPr id="13" name="TextBox 12"/>
+          <p:cNvPr id="7" name="TextBox 6"/>
           <p:cNvSpPr txBox="1"/>
           <p:nvPr/>
         </p:nvSpPr>
         <p:spPr>
           <a:xfrm>
-            <a:off x="548640" y="3200400"/>
-            <a:ext cx="1828800" cy="365760"/>
-          </a:xfrm>
-          <a:prstGeom prst="rect">
-            <a:avLst/>
-          </a:prstGeom>
-          <a:noFill/>
-        </p:spPr>
-        <p:txBody>
-          <a:bodyPr wrap="square" anchor="t">
-            <a:spAutoFit/>
-          </a:bodyPr>
-          <a:lstStyle/>
-          <a:p>
-            <a:pPr algn="l">
-              <a:lnSpc>
-                <a:spcPct val="100000"/>
-              </a:lnSpc>
-            </a:pPr>
-            <a:r>
-              <a:rPr sz="1300" b="0" i="0">
-                <a:solidFill>
-                  <a:srgbClr val="B0B8C2"/>
-                </a:solidFill>
-                <a:latin typeface="Calibri"/>
-              </a:rPr>
-              <a:t>publica em ▼</a:t>
-            </a:r>
-          </a:p>
-        </p:txBody>
-      </p:sp>
-      <p:sp>
-        <p:nvSpPr>
-          <p:cNvPr id="14" name="Rounded Rectangle 13"/>
-          <p:cNvSpPr/>
-          <p:nvPr/>
-        </p:nvSpPr>
-        <p:spPr>
-          <a:xfrm>
-            <a:off x="548640" y="3657600"/>
-            <a:ext cx="4937760" cy="640080"/>
-          </a:xfrm>
-          <a:prstGeom prst="roundRect">
-            <a:avLst/>
-          </a:prstGeom>
-          <a:solidFill>
-            <a:srgbClr val="24292E"/>
-          </a:solidFill>
-          <a:ln w="12700">
-            <a:solidFill>
-              <a:srgbClr val="00D4AA"/>
-            </a:solidFill>
-          </a:ln>
-          <a:effectLst/>
-        </p:spPr>
-        <p:style>
-          <a:lnRef idx="1">
-            <a:schemeClr val="accent1"/>
-          </a:lnRef>
-          <a:fillRef idx="3">
-            <a:schemeClr val="accent1"/>
-          </a:fillRef>
-          <a:effectRef idx="2">
-            <a:schemeClr val="accent1"/>
-          </a:effectRef>
-          <a:fontRef idx="minor">
-            <a:schemeClr val="lt1"/>
-          </a:fontRef>
-        </p:style>
-        <p:txBody>
-          <a:bodyPr rtlCol="0" anchor="ctr"/>
-          <a:lstStyle/>
-          <a:p>
-            <a:pPr algn="ctr"/>
-            <a:r>
-              <a:rPr sz="1400" b="1">
-                <a:solidFill>
-                  <a:srgbClr val="FFFFFF"/>
-                </a:solidFill>
-              </a:rPr>
-              <a:t>ghcr.io/&lt;owner&gt;/gymvision/&lt;serviço&gt;</a:t>
-            </a:r>
-          </a:p>
-        </p:txBody>
-      </p:sp>
-      <p:sp>
-        <p:nvSpPr>
-          <p:cNvPr id="15" name="Rounded Rectangle 14"/>
-          <p:cNvSpPr/>
-          <p:nvPr/>
-        </p:nvSpPr>
-        <p:spPr>
-          <a:xfrm>
-            <a:off x="5760720" y="3657600"/>
-            <a:ext cx="4937760" cy="640080"/>
-          </a:xfrm>
-          <a:prstGeom prst="roundRect">
-            <a:avLst/>
-          </a:prstGeom>
-          <a:solidFill>
-            <a:srgbClr val="1D63ED"/>
-          </a:solidFill>
-          <a:ln w="12700">
-            <a:solidFill>
-              <a:srgbClr val="00D4AA"/>
-            </a:solidFill>
-          </a:ln>
-          <a:effectLst/>
-        </p:spPr>
-        <p:style>
-          <a:lnRef idx="1">
-            <a:schemeClr val="accent1"/>
-          </a:lnRef>
-          <a:fillRef idx="3">
-            <a:schemeClr val="accent1"/>
-          </a:fillRef>
-          <a:effectRef idx="2">
-            <a:schemeClr val="accent1"/>
-          </a:effectRef>
-          <a:fontRef idx="minor">
-            <a:schemeClr val="lt1"/>
-          </a:fontRef>
-        </p:style>
-        <p:txBody>
-          <a:bodyPr rtlCol="0" anchor="ctr"/>
-          <a:lstStyle/>
-          <a:p>
-            <a:pPr algn="ctr"/>
-            <a:r>
-              <a:rPr sz="1400" b="1">
-                <a:solidFill>
-                  <a:srgbClr val="FFFFFF"/>
-                </a:solidFill>
-              </a:rPr>
-              <a:t>docker.io/souzza-matheus/gymvision-&lt;serviço&gt;</a:t>
-            </a:r>
-          </a:p>
-        </p:txBody>
-      </p:sp>
-      <p:sp>
-        <p:nvSpPr>
-          <p:cNvPr id="16" name="TextBox 15"/>
-          <p:cNvSpPr txBox="1"/>
-          <p:nvPr/>
-        </p:nvSpPr>
-        <p:spPr>
-          <a:xfrm>
-            <a:off x="548640" y="4572000"/>
-            <a:ext cx="10789920" cy="1828800"/>
+            <a:off x="548640" y="1371600"/>
+            <a:ext cx="5394960" cy="4572000"/>
           </a:xfrm>
           <a:prstGeom prst="rect">
             <a:avLst/>
@@ -5393,13 +4797,13 @@
               </a:spcAft>
             </a:pPr>
             <a:r>
-              <a:rPr sz="1500">
+              <a:rPr sz="1600">
                 <a:solidFill>
                   <a:srgbClr val="FFFFFF"/>
                 </a:solidFill>
                 <a:latin typeface="Calibri"/>
               </a:rPr>
-              <a:t>•  Cada serviço publicado nos DOIS registries simultaneamente</a:t>
+              <a:t>•  Bug corrigido: trigger só aceitava main/develop — branch real do repo é master</a:t>
             </a:r>
           </a:p>
           <a:p>
@@ -5412,13 +4816,13 @@
               </a:spcAft>
             </a:pPr>
             <a:r>
-              <a:rPr sz="1500">
+              <a:rPr sz="1600">
                 <a:solidFill>
                   <a:srgbClr val="FFFFFF"/>
                 </a:solidFill>
                 <a:latin typeface="Calibri"/>
               </a:rPr>
-              <a:t>•  notification-service incluído — tinha Dockerfile mas não estava no job de publicação</a:t>
+              <a:t>•  O pipeline nunca tinha publicado nada de fato antes desta correção</a:t>
             </a:r>
           </a:p>
           <a:p>
@@ -5431,13 +4835,131 @@
               </a:spcAft>
             </a:pPr>
             <a:r>
-              <a:rPr sz="1500">
+              <a:rPr sz="1600">
                 <a:solidFill>
                   <a:srgbClr val="FFFFFF"/>
                 </a:solidFill>
                 <a:latin typeface="Calibri"/>
               </a:rPr>
-              <a:t>•  Pendência: criar Access Token no Docker Hub e cadastrar DOCKERHUB_USERNAME / DOCKERHUB_TOKEN nos secrets do GitHub</a:t>
+              <a:t>•  Jobs de teste por serviço + build-and-push + deploy-staging</a:t>
+            </a:r>
+          </a:p>
+        </p:txBody>
+      </p:sp>
+      <p:sp>
+        <p:nvSpPr>
+          <p:cNvPr id="8" name="TextBox 7"/>
+          <p:cNvSpPr txBox="1"/>
+          <p:nvPr/>
+        </p:nvSpPr>
+        <p:spPr>
+          <a:xfrm>
+            <a:off x="6217920" y="1371600"/>
+            <a:ext cx="5394960" cy="4572000"/>
+          </a:xfrm>
+          <a:prstGeom prst="rect">
+            <a:avLst/>
+          </a:prstGeom>
+          <a:noFill/>
+        </p:spPr>
+        <p:txBody>
+          <a:bodyPr wrap="square">
+            <a:spAutoFit/>
+          </a:bodyPr>
+          <a:lstStyle/>
+          <a:p>
+            <a:pPr>
+              <a:lnSpc>
+                <a:spcPct val="112000"/>
+              </a:lnSpc>
+              <a:spcAft>
+                <a:spcPts val="800"/>
+              </a:spcAft>
+            </a:pPr>
+            <a:r>
+              <a:rPr sz="1600">
+                <a:solidFill>
+                  <a:srgbClr val="FFFFFF"/>
+                </a:solidFill>
+                <a:latin typeface="Calibri"/>
+              </a:rPr>
+              <a:t>•  Cada serviço agora publicado em DOIS registries:</a:t>
+            </a:r>
+          </a:p>
+          <a:p>
+            <a:pPr>
+              <a:lnSpc>
+                <a:spcPct val="112000"/>
+              </a:lnSpc>
+              <a:spcAft>
+                <a:spcPts val="800"/>
+              </a:spcAft>
+            </a:pPr>
+            <a:r>
+              <a:rPr sz="1400">
+                <a:solidFill>
+                  <a:srgbClr val="B0B8C2"/>
+                </a:solidFill>
+                <a:latin typeface="Calibri"/>
+              </a:rPr>
+              <a:t>    ‣  ghcr.io/&lt;owner&gt;/gymvision/&lt;serviço&gt;</a:t>
+            </a:r>
+          </a:p>
+          <a:p>
+            <a:pPr>
+              <a:lnSpc>
+                <a:spcPct val="112000"/>
+              </a:lnSpc>
+              <a:spcAft>
+                <a:spcPts val="800"/>
+              </a:spcAft>
+            </a:pPr>
+            <a:r>
+              <a:rPr sz="1400">
+                <a:solidFill>
+                  <a:srgbClr val="B0B8C2"/>
+                </a:solidFill>
+                <a:latin typeface="Calibri"/>
+              </a:rPr>
+              <a:t>    ‣  docker.io/souzza-matheus/gymvision-&lt;serviço&gt;</a:t>
+            </a:r>
+          </a:p>
+          <a:p>
+            <a:pPr>
+              <a:lnSpc>
+                <a:spcPct val="112000"/>
+              </a:lnSpc>
+              <a:spcAft>
+                <a:spcPts val="800"/>
+              </a:spcAft>
+            </a:pPr>
+            <a:r>
+              <a:rPr sz="1600">
+                <a:solidFill>
+                  <a:srgbClr val="FFFFFF"/>
+                </a:solidFill>
+                <a:latin typeface="Calibri"/>
+              </a:rPr>
+              <a:t>•  notification-service incluído (tinha Dockerfile mas não era publicado)</a:t>
+            </a:r>
+          </a:p>
+          <a:p>
+            <a:pPr>
+              <a:lnSpc>
+                <a:spcPct val="112000"/>
+              </a:lnSpc>
+              <a:spcAft>
+                <a:spcPts val="800"/>
+              </a:spcAft>
+            </a:pPr>
+            <a:r>
+              <a:rPr sz="1600">
+                <a:solidFill>
+                  <a:srgbClr val="FFFFFF"/>
+                </a:solidFill>
+                <a:latin typeface="Calibri"/>
+              </a:rPr>
+              <a:t>•  Pendência: secrets DOCKERHUB_USERNAME / DOCKERHUB_TOKEN no GitHub</a:t>
             </a:r>
           </a:p>
         </p:txBody>
@@ -5527,7 +5049,7 @@
             <a:avLst/>
           </a:prstGeom>
           <a:solidFill>
-            <a:srgbClr val="4A525E"/>
+            <a:srgbClr val="00D4AA"/>
           </a:solidFill>
           <a:ln>
             <a:noFill/>
@@ -5586,11 +5108,11 @@
             <a:r>
               <a:rPr sz="1400" b="1" i="0">
                 <a:solidFill>
-                  <a:srgbClr val="4A525E"/>
-                </a:solidFill>
-                <a:latin typeface="Calibri"/>
-              </a:rPr>
-              <a:t>SPRINT 2 · PLANEJADO</a:t>
+                  <a:srgbClr val="00D4AA"/>
+                </a:solidFill>
+                <a:latin typeface="Calibri"/>
+              </a:rPr>
+              <a:t>ESTADO ATUAL</a:t>
             </a:r>
           </a:p>
         </p:txBody>
@@ -5629,7 +5151,7 @@
                 </a:solidFill>
                 <a:latin typeface="Calibri"/>
               </a:rPr>
-              <a:t>Produto e Experiência — ainda não iniciado</a:t>
+              <a:t>Métricas do projeto</a:t>
             </a:r>
           </a:p>
         </p:txBody>
@@ -5681,17 +5203,19 @@
         </p:nvSpPr>
         <p:spPr>
           <a:xfrm>
-            <a:off x="548640" y="1188720"/>
-            <a:ext cx="1554480" cy="365760"/>
+            <a:off x="548640" y="1554480"/>
+            <a:ext cx="3429000" cy="1645920"/>
           </a:xfrm>
           <a:prstGeom prst="roundRect">
             <a:avLst/>
           </a:prstGeom>
           <a:solidFill>
-            <a:srgbClr val="4A525E"/>
+            <a:srgbClr val="1B2129"/>
           </a:solidFill>
-          <a:ln>
-            <a:noFill/>
+          <a:ln w="12700">
+            <a:solidFill>
+              <a:srgbClr val="00D4AA"/>
+            </a:solidFill>
           </a:ln>
           <a:effectLst/>
         </p:spPr>
@@ -5714,14 +5238,6 @@
           <a:lstStyle/>
           <a:p>
             <a:pPr algn="ctr"/>
-            <a:r>
-              <a:rPr sz="1200" b="1">
-                <a:solidFill>
-                  <a:srgbClr val="FFFFFF"/>
-                </a:solidFill>
-              </a:rPr>
-              <a:t>NÃO INICIADO</a:t>
-            </a:r>
           </a:p>
         </p:txBody>
       </p:sp>
@@ -5733,8 +5249,8 @@
         </p:nvSpPr>
         <p:spPr>
           <a:xfrm>
-            <a:off x="548640" y="1828800"/>
-            <a:ext cx="10789920" cy="4114800"/>
+            <a:off x="548640" y="1737360"/>
+            <a:ext cx="3429000" cy="822960"/>
           </a:xfrm>
           <a:prstGeom prst="rect">
             <a:avLst/>
@@ -5742,84 +5258,683 @@
           <a:noFill/>
         </p:spPr>
         <p:txBody>
-          <a:bodyPr wrap="square">
+          <a:bodyPr wrap="square" anchor="t">
             <a:spAutoFit/>
           </a:bodyPr>
           <a:lstStyle/>
           <a:p>
-            <a:pPr>
-              <a:lnSpc>
-                <a:spcPct val="112000"/>
-              </a:lnSpc>
-              <a:spcAft>
-                <a:spcPts val="800"/>
-              </a:spcAft>
-            </a:pPr>
-            <a:r>
-              <a:rPr sz="1800">
-                <a:solidFill>
-                  <a:srgbClr val="FFFFFF"/>
-                </a:solidFill>
-                <a:latin typeface="Calibri"/>
-              </a:rPr>
-              <a:t>•  Relatório semanal gerencial para o professor (e-mail toda segunda-feira)</a:t>
-            </a:r>
-          </a:p>
-          <a:p>
-            <a:pPr>
-              <a:lnSpc>
-                <a:spcPct val="112000"/>
-              </a:lnSpc>
-              <a:spcAft>
-                <a:spcPts val="800"/>
-              </a:spcAft>
-            </a:pPr>
-            <a:r>
-              <a:rPr sz="1800">
-                <a:solidFill>
-                  <a:srgbClr val="FFFFFF"/>
-                </a:solidFill>
-                <a:latin typeface="Calibri"/>
-              </a:rPr>
-              <a:t>•  Auto-detecção de exercício por padrão de landmarks (regras + Random Forest)</a:t>
-            </a:r>
-          </a:p>
-          <a:p>
-            <a:pPr>
-              <a:lnSpc>
-                <a:spcPct val="112000"/>
-              </a:lnSpc>
-              <a:spcAft>
-                <a:spcPts val="800"/>
-              </a:spcAft>
-            </a:pPr>
-            <a:r>
-              <a:rPr sz="1800">
-                <a:solidFill>
-                  <a:srgbClr val="FFFFFF"/>
-                </a:solidFill>
-                <a:latin typeface="Calibri"/>
-              </a:rPr>
-              <a:t>•  Progressão de carga inteligente nos planos de treino</a:t>
-            </a:r>
-          </a:p>
-          <a:p>
-            <a:pPr>
-              <a:lnSpc>
-                <a:spcPct val="112000"/>
-              </a:lnSpc>
-              <a:spcAft>
-                <a:spcPts val="800"/>
-              </a:spcAft>
-            </a:pPr>
-            <a:r>
-              <a:rPr sz="1800">
-                <a:solidFill>
-                  <a:srgbClr val="FFFFFF"/>
-                </a:solidFill>
-                <a:latin typeface="Calibri"/>
-              </a:rPr>
-              <a:t>•  FCM push notifications no Android (alertas mesmo com app em background)</a:t>
+            <a:pPr algn="ctr">
+              <a:lnSpc>
+                <a:spcPct val="100000"/>
+              </a:lnSpc>
+            </a:pPr>
+            <a:r>
+              <a:rPr sz="4000" b="1" i="0">
+                <a:solidFill>
+                  <a:srgbClr val="00D4AA"/>
+                </a:solidFill>
+                <a:latin typeface="Calibri"/>
+              </a:rPr>
+              <a:t>9</a:t>
+            </a:r>
+          </a:p>
+        </p:txBody>
+      </p:sp>
+      <p:sp>
+        <p:nvSpPr>
+          <p:cNvPr id="9" name="TextBox 8"/>
+          <p:cNvSpPr txBox="1"/>
+          <p:nvPr/>
+        </p:nvSpPr>
+        <p:spPr>
+          <a:xfrm>
+            <a:off x="548640" y="2560320"/>
+            <a:ext cx="3429000" cy="548640"/>
+          </a:xfrm>
+          <a:prstGeom prst="rect">
+            <a:avLst/>
+          </a:prstGeom>
+          <a:noFill/>
+        </p:spPr>
+        <p:txBody>
+          <a:bodyPr wrap="square" anchor="t">
+            <a:spAutoFit/>
+          </a:bodyPr>
+          <a:lstStyle/>
+          <a:p>
+            <a:pPr algn="ctr">
+              <a:lnSpc>
+                <a:spcPct val="100000"/>
+              </a:lnSpc>
+            </a:pPr>
+            <a:r>
+              <a:rPr sz="1400" b="0" i="0">
+                <a:solidFill>
+                  <a:srgbClr val="B0B8C2"/>
+                </a:solidFill>
+                <a:latin typeface="Calibri"/>
+              </a:rPr>
+              <a:t>microsserviços</a:t>
+            </a:r>
+          </a:p>
+        </p:txBody>
+      </p:sp>
+      <p:sp>
+        <p:nvSpPr>
+          <p:cNvPr id="10" name="Rounded Rectangle 9"/>
+          <p:cNvSpPr/>
+          <p:nvPr/>
+        </p:nvSpPr>
+        <p:spPr>
+          <a:xfrm>
+            <a:off x="4251960" y="1554480"/>
+            <a:ext cx="3429000" cy="1645920"/>
+          </a:xfrm>
+          <a:prstGeom prst="roundRect">
+            <a:avLst/>
+          </a:prstGeom>
+          <a:solidFill>
+            <a:srgbClr val="1B2129"/>
+          </a:solidFill>
+          <a:ln w="12700">
+            <a:solidFill>
+              <a:srgbClr val="00D4AA"/>
+            </a:solidFill>
+          </a:ln>
+          <a:effectLst/>
+        </p:spPr>
+        <p:style>
+          <a:lnRef idx="1">
+            <a:schemeClr val="accent1"/>
+          </a:lnRef>
+          <a:fillRef idx="3">
+            <a:schemeClr val="accent1"/>
+          </a:fillRef>
+          <a:effectRef idx="2">
+            <a:schemeClr val="accent1"/>
+          </a:effectRef>
+          <a:fontRef idx="minor">
+            <a:schemeClr val="lt1"/>
+          </a:fontRef>
+        </p:style>
+        <p:txBody>
+          <a:bodyPr rtlCol="0" anchor="ctr"/>
+          <a:lstStyle/>
+          <a:p>
+            <a:pPr algn="ctr"/>
+          </a:p>
+        </p:txBody>
+      </p:sp>
+      <p:sp>
+        <p:nvSpPr>
+          <p:cNvPr id="11" name="TextBox 10"/>
+          <p:cNvSpPr txBox="1"/>
+          <p:nvPr/>
+        </p:nvSpPr>
+        <p:spPr>
+          <a:xfrm>
+            <a:off x="4251960" y="1737360"/>
+            <a:ext cx="3429000" cy="822960"/>
+          </a:xfrm>
+          <a:prstGeom prst="rect">
+            <a:avLst/>
+          </a:prstGeom>
+          <a:noFill/>
+        </p:spPr>
+        <p:txBody>
+          <a:bodyPr wrap="square" anchor="t">
+            <a:spAutoFit/>
+          </a:bodyPr>
+          <a:lstStyle/>
+          <a:p>
+            <a:pPr algn="ctr">
+              <a:lnSpc>
+                <a:spcPct val="100000"/>
+              </a:lnSpc>
+            </a:pPr>
+            <a:r>
+              <a:rPr sz="4000" b="1" i="0">
+                <a:solidFill>
+                  <a:srgbClr val="00D4AA"/>
+                </a:solidFill>
+                <a:latin typeface="Calibri"/>
+              </a:rPr>
+              <a:t>5</a:t>
+            </a:r>
+          </a:p>
+        </p:txBody>
+      </p:sp>
+      <p:sp>
+        <p:nvSpPr>
+          <p:cNvPr id="12" name="TextBox 11"/>
+          <p:cNvSpPr txBox="1"/>
+          <p:nvPr/>
+        </p:nvSpPr>
+        <p:spPr>
+          <a:xfrm>
+            <a:off x="4251960" y="2560320"/>
+            <a:ext cx="3429000" cy="548640"/>
+          </a:xfrm>
+          <a:prstGeom prst="rect">
+            <a:avLst/>
+          </a:prstGeom>
+          <a:noFill/>
+        </p:spPr>
+        <p:txBody>
+          <a:bodyPr wrap="square" anchor="t">
+            <a:spAutoFit/>
+          </a:bodyPr>
+          <a:lstStyle/>
+          <a:p>
+            <a:pPr algn="ctr">
+              <a:lnSpc>
+                <a:spcPct val="100000"/>
+              </a:lnSpc>
+            </a:pPr>
+            <a:r>
+              <a:rPr sz="1400" b="0" i="0">
+                <a:solidFill>
+                  <a:srgbClr val="B0B8C2"/>
+                </a:solidFill>
+                <a:latin typeface="Calibri"/>
+              </a:rPr>
+              <a:t>exercícios suportados</a:t>
+            </a:r>
+          </a:p>
+        </p:txBody>
+      </p:sp>
+      <p:sp>
+        <p:nvSpPr>
+          <p:cNvPr id="13" name="Rounded Rectangle 12"/>
+          <p:cNvSpPr/>
+          <p:nvPr/>
+        </p:nvSpPr>
+        <p:spPr>
+          <a:xfrm>
+            <a:off x="7955280" y="1554480"/>
+            <a:ext cx="3429000" cy="1645920"/>
+          </a:xfrm>
+          <a:prstGeom prst="roundRect">
+            <a:avLst/>
+          </a:prstGeom>
+          <a:solidFill>
+            <a:srgbClr val="1B2129"/>
+          </a:solidFill>
+          <a:ln w="12700">
+            <a:solidFill>
+              <a:srgbClr val="00D4AA"/>
+            </a:solidFill>
+          </a:ln>
+          <a:effectLst/>
+        </p:spPr>
+        <p:style>
+          <a:lnRef idx="1">
+            <a:schemeClr val="accent1"/>
+          </a:lnRef>
+          <a:fillRef idx="3">
+            <a:schemeClr val="accent1"/>
+          </a:fillRef>
+          <a:effectRef idx="2">
+            <a:schemeClr val="accent1"/>
+          </a:effectRef>
+          <a:fontRef idx="minor">
+            <a:schemeClr val="lt1"/>
+          </a:fontRef>
+        </p:style>
+        <p:txBody>
+          <a:bodyPr rtlCol="0" anchor="ctr"/>
+          <a:lstStyle/>
+          <a:p>
+            <a:pPr algn="ctr"/>
+          </a:p>
+        </p:txBody>
+      </p:sp>
+      <p:sp>
+        <p:nvSpPr>
+          <p:cNvPr id="14" name="TextBox 13"/>
+          <p:cNvSpPr txBox="1"/>
+          <p:nvPr/>
+        </p:nvSpPr>
+        <p:spPr>
+          <a:xfrm>
+            <a:off x="7955280" y="1737360"/>
+            <a:ext cx="3429000" cy="822960"/>
+          </a:xfrm>
+          <a:prstGeom prst="rect">
+            <a:avLst/>
+          </a:prstGeom>
+          <a:noFill/>
+        </p:spPr>
+        <p:txBody>
+          <a:bodyPr wrap="square" anchor="t">
+            <a:spAutoFit/>
+          </a:bodyPr>
+          <a:lstStyle/>
+          <a:p>
+            <a:pPr algn="ctr">
+              <a:lnSpc>
+                <a:spcPct val="100000"/>
+              </a:lnSpc>
+            </a:pPr>
+            <a:r>
+              <a:rPr sz="4000" b="1" i="0">
+                <a:solidFill>
+                  <a:srgbClr val="00D4AA"/>
+                </a:solidFill>
+                <a:latin typeface="Calibri"/>
+              </a:rPr>
+              <a:t>48/48</a:t>
+            </a:r>
+          </a:p>
+        </p:txBody>
+      </p:sp>
+      <p:sp>
+        <p:nvSpPr>
+          <p:cNvPr id="15" name="TextBox 14"/>
+          <p:cNvSpPr txBox="1"/>
+          <p:nvPr/>
+        </p:nvSpPr>
+        <p:spPr>
+          <a:xfrm>
+            <a:off x="7955280" y="2560320"/>
+            <a:ext cx="3429000" cy="548640"/>
+          </a:xfrm>
+          <a:prstGeom prst="rect">
+            <a:avLst/>
+          </a:prstGeom>
+          <a:noFill/>
+        </p:spPr>
+        <p:txBody>
+          <a:bodyPr wrap="square" anchor="t">
+            <a:spAutoFit/>
+          </a:bodyPr>
+          <a:lstStyle/>
+          <a:p>
+            <a:pPr algn="ctr">
+              <a:lnSpc>
+                <a:spcPct val="100000"/>
+              </a:lnSpc>
+            </a:pPr>
+            <a:r>
+              <a:rPr sz="1400" b="0" i="0">
+                <a:solidFill>
+                  <a:srgbClr val="B0B8C2"/>
+                </a:solidFill>
+                <a:latin typeface="Calibri"/>
+              </a:rPr>
+              <a:t>testes passando</a:t>
+            </a:r>
+          </a:p>
+        </p:txBody>
+      </p:sp>
+      <p:sp>
+        <p:nvSpPr>
+          <p:cNvPr id="16" name="Rounded Rectangle 15"/>
+          <p:cNvSpPr/>
+          <p:nvPr/>
+        </p:nvSpPr>
+        <p:spPr>
+          <a:xfrm>
+            <a:off x="548640" y="3474720"/>
+            <a:ext cx="3429000" cy="1645920"/>
+          </a:xfrm>
+          <a:prstGeom prst="roundRect">
+            <a:avLst/>
+          </a:prstGeom>
+          <a:solidFill>
+            <a:srgbClr val="1B2129"/>
+          </a:solidFill>
+          <a:ln w="12700">
+            <a:solidFill>
+              <a:srgbClr val="00D4AA"/>
+            </a:solidFill>
+          </a:ln>
+          <a:effectLst/>
+        </p:spPr>
+        <p:style>
+          <a:lnRef idx="1">
+            <a:schemeClr val="accent1"/>
+          </a:lnRef>
+          <a:fillRef idx="3">
+            <a:schemeClr val="accent1"/>
+          </a:fillRef>
+          <a:effectRef idx="2">
+            <a:schemeClr val="accent1"/>
+          </a:effectRef>
+          <a:fontRef idx="minor">
+            <a:schemeClr val="lt1"/>
+          </a:fontRef>
+        </p:style>
+        <p:txBody>
+          <a:bodyPr rtlCol="0" anchor="ctr"/>
+          <a:lstStyle/>
+          <a:p>
+            <a:pPr algn="ctr"/>
+          </a:p>
+        </p:txBody>
+      </p:sp>
+      <p:sp>
+        <p:nvSpPr>
+          <p:cNvPr id="17" name="TextBox 16"/>
+          <p:cNvSpPr txBox="1"/>
+          <p:nvPr/>
+        </p:nvSpPr>
+        <p:spPr>
+          <a:xfrm>
+            <a:off x="548640" y="3657600"/>
+            <a:ext cx="3429000" cy="822960"/>
+          </a:xfrm>
+          <a:prstGeom prst="rect">
+            <a:avLst/>
+          </a:prstGeom>
+          <a:noFill/>
+        </p:spPr>
+        <p:txBody>
+          <a:bodyPr wrap="square" anchor="t">
+            <a:spAutoFit/>
+          </a:bodyPr>
+          <a:lstStyle/>
+          <a:p>
+            <a:pPr algn="ctr">
+              <a:lnSpc>
+                <a:spcPct val="100000"/>
+              </a:lnSpc>
+            </a:pPr>
+            <a:r>
+              <a:rPr sz="4000" b="1" i="0">
+                <a:solidFill>
+                  <a:srgbClr val="00D4AA"/>
+                </a:solidFill>
+                <a:latin typeface="Calibri"/>
+              </a:rPr>
+              <a:t>12</a:t>
+            </a:r>
+          </a:p>
+        </p:txBody>
+      </p:sp>
+      <p:sp>
+        <p:nvSpPr>
+          <p:cNvPr id="18" name="TextBox 17"/>
+          <p:cNvSpPr txBox="1"/>
+          <p:nvPr/>
+        </p:nvSpPr>
+        <p:spPr>
+          <a:xfrm>
+            <a:off x="548640" y="4480560"/>
+            <a:ext cx="3429000" cy="548640"/>
+          </a:xfrm>
+          <a:prstGeom prst="rect">
+            <a:avLst/>
+          </a:prstGeom>
+          <a:noFill/>
+        </p:spPr>
+        <p:txBody>
+          <a:bodyPr wrap="square" anchor="t">
+            <a:spAutoFit/>
+          </a:bodyPr>
+          <a:lstStyle/>
+          <a:p>
+            <a:pPr algn="ctr">
+              <a:lnSpc>
+                <a:spcPct val="100000"/>
+              </a:lnSpc>
+            </a:pPr>
+            <a:r>
+              <a:rPr sz="1400" b="0" i="0">
+                <a:solidFill>
+                  <a:srgbClr val="B0B8C2"/>
+                </a:solidFill>
+                <a:latin typeface="Calibri"/>
+              </a:rPr>
+              <a:t>containers Docker</a:t>
+            </a:r>
+          </a:p>
+        </p:txBody>
+      </p:sp>
+      <p:sp>
+        <p:nvSpPr>
+          <p:cNvPr id="19" name="Rounded Rectangle 18"/>
+          <p:cNvSpPr/>
+          <p:nvPr/>
+        </p:nvSpPr>
+        <p:spPr>
+          <a:xfrm>
+            <a:off x="4251960" y="3474720"/>
+            <a:ext cx="3429000" cy="1645920"/>
+          </a:xfrm>
+          <a:prstGeom prst="roundRect">
+            <a:avLst/>
+          </a:prstGeom>
+          <a:solidFill>
+            <a:srgbClr val="1B2129"/>
+          </a:solidFill>
+          <a:ln w="12700">
+            <a:solidFill>
+              <a:srgbClr val="00D4AA"/>
+            </a:solidFill>
+          </a:ln>
+          <a:effectLst/>
+        </p:spPr>
+        <p:style>
+          <a:lnRef idx="1">
+            <a:schemeClr val="accent1"/>
+          </a:lnRef>
+          <a:fillRef idx="3">
+            <a:schemeClr val="accent1"/>
+          </a:fillRef>
+          <a:effectRef idx="2">
+            <a:schemeClr val="accent1"/>
+          </a:effectRef>
+          <a:fontRef idx="minor">
+            <a:schemeClr val="lt1"/>
+          </a:fontRef>
+        </p:style>
+        <p:txBody>
+          <a:bodyPr rtlCol="0" anchor="ctr"/>
+          <a:lstStyle/>
+          <a:p>
+            <a:pPr algn="ctr"/>
+          </a:p>
+        </p:txBody>
+      </p:sp>
+      <p:sp>
+        <p:nvSpPr>
+          <p:cNvPr id="20" name="TextBox 19"/>
+          <p:cNvSpPr txBox="1"/>
+          <p:nvPr/>
+        </p:nvSpPr>
+        <p:spPr>
+          <a:xfrm>
+            <a:off x="4251960" y="3657600"/>
+            <a:ext cx="3429000" cy="822960"/>
+          </a:xfrm>
+          <a:prstGeom prst="rect">
+            <a:avLst/>
+          </a:prstGeom>
+          <a:noFill/>
+        </p:spPr>
+        <p:txBody>
+          <a:bodyPr wrap="square" anchor="t">
+            <a:spAutoFit/>
+          </a:bodyPr>
+          <a:lstStyle/>
+          <a:p>
+            <a:pPr algn="ctr">
+              <a:lnSpc>
+                <a:spcPct val="100000"/>
+              </a:lnSpc>
+            </a:pPr>
+            <a:r>
+              <a:rPr sz="4000" b="1" i="0">
+                <a:solidFill>
+                  <a:srgbClr val="00D4AA"/>
+                </a:solidFill>
+                <a:latin typeface="Calibri"/>
+              </a:rPr>
+              <a:t>2</a:t>
+            </a:r>
+          </a:p>
+        </p:txBody>
+      </p:sp>
+      <p:sp>
+        <p:nvSpPr>
+          <p:cNvPr id="21" name="TextBox 20"/>
+          <p:cNvSpPr txBox="1"/>
+          <p:nvPr/>
+        </p:nvSpPr>
+        <p:spPr>
+          <a:xfrm>
+            <a:off x="4251960" y="4480560"/>
+            <a:ext cx="3429000" cy="548640"/>
+          </a:xfrm>
+          <a:prstGeom prst="rect">
+            <a:avLst/>
+          </a:prstGeom>
+          <a:noFill/>
+        </p:spPr>
+        <p:txBody>
+          <a:bodyPr wrap="square" anchor="t">
+            <a:spAutoFit/>
+          </a:bodyPr>
+          <a:lstStyle/>
+          <a:p>
+            <a:pPr algn="ctr">
+              <a:lnSpc>
+                <a:spcPct val="100000"/>
+              </a:lnSpc>
+            </a:pPr>
+            <a:r>
+              <a:rPr sz="1400" b="0" i="0">
+                <a:solidFill>
+                  <a:srgbClr val="B0B8C2"/>
+                </a:solidFill>
+                <a:latin typeface="Calibri"/>
+              </a:rPr>
+              <a:t>registries (ghcr.io + Docker Hub)</a:t>
+            </a:r>
+          </a:p>
+        </p:txBody>
+      </p:sp>
+      <p:sp>
+        <p:nvSpPr>
+          <p:cNvPr id="22" name="Rounded Rectangle 21"/>
+          <p:cNvSpPr/>
+          <p:nvPr/>
+        </p:nvSpPr>
+        <p:spPr>
+          <a:xfrm>
+            <a:off x="7955280" y="3474720"/>
+            <a:ext cx="3429000" cy="1645920"/>
+          </a:xfrm>
+          <a:prstGeom prst="roundRect">
+            <a:avLst/>
+          </a:prstGeom>
+          <a:solidFill>
+            <a:srgbClr val="1B2129"/>
+          </a:solidFill>
+          <a:ln w="12700">
+            <a:solidFill>
+              <a:srgbClr val="00D4AA"/>
+            </a:solidFill>
+          </a:ln>
+          <a:effectLst/>
+        </p:spPr>
+        <p:style>
+          <a:lnRef idx="1">
+            <a:schemeClr val="accent1"/>
+          </a:lnRef>
+          <a:fillRef idx="3">
+            <a:schemeClr val="accent1"/>
+          </a:fillRef>
+          <a:effectRef idx="2">
+            <a:schemeClr val="accent1"/>
+          </a:effectRef>
+          <a:fontRef idx="minor">
+            <a:schemeClr val="lt1"/>
+          </a:fontRef>
+        </p:style>
+        <p:txBody>
+          <a:bodyPr rtlCol="0" anchor="ctr"/>
+          <a:lstStyle/>
+          <a:p>
+            <a:pPr algn="ctr"/>
+          </a:p>
+        </p:txBody>
+      </p:sp>
+      <p:sp>
+        <p:nvSpPr>
+          <p:cNvPr id="23" name="TextBox 22"/>
+          <p:cNvSpPr txBox="1"/>
+          <p:nvPr/>
+        </p:nvSpPr>
+        <p:spPr>
+          <a:xfrm>
+            <a:off x="7955280" y="3657600"/>
+            <a:ext cx="3429000" cy="822960"/>
+          </a:xfrm>
+          <a:prstGeom prst="rect">
+            <a:avLst/>
+          </a:prstGeom>
+          <a:noFill/>
+        </p:spPr>
+        <p:txBody>
+          <a:bodyPr wrap="square" anchor="t">
+            <a:spAutoFit/>
+          </a:bodyPr>
+          <a:lstStyle/>
+          <a:p>
+            <a:pPr algn="ctr">
+              <a:lnSpc>
+                <a:spcPct val="100000"/>
+              </a:lnSpc>
+            </a:pPr>
+            <a:r>
+              <a:rPr sz="4000" b="1" i="0">
+                <a:solidFill>
+                  <a:srgbClr val="00D4AA"/>
+                </a:solidFill>
+                <a:latin typeface="Calibri"/>
+              </a:rPr>
+              <a:t>6</a:t>
+            </a:r>
+          </a:p>
+        </p:txBody>
+      </p:sp>
+      <p:sp>
+        <p:nvSpPr>
+          <p:cNvPr id="24" name="TextBox 23"/>
+          <p:cNvSpPr txBox="1"/>
+          <p:nvPr/>
+        </p:nvSpPr>
+        <p:spPr>
+          <a:xfrm>
+            <a:off x="7955280" y="4480560"/>
+            <a:ext cx="3429000" cy="548640"/>
+          </a:xfrm>
+          <a:prstGeom prst="rect">
+            <a:avLst/>
+          </a:prstGeom>
+          <a:noFill/>
+        </p:spPr>
+        <p:txBody>
+          <a:bodyPr wrap="square" anchor="t">
+            <a:spAutoFit/>
+          </a:bodyPr>
+          <a:lstStyle/>
+          <a:p>
+            <a:pPr algn="ctr">
+              <a:lnSpc>
+                <a:spcPct val="100000"/>
+              </a:lnSpc>
+            </a:pPr>
+            <a:r>
+              <a:rPr sz="1400" b="0" i="0">
+                <a:solidFill>
+                  <a:srgbClr val="B0B8C2"/>
+                </a:solidFill>
+                <a:latin typeface="Calibri"/>
+              </a:rPr>
+              <a:t>telas Android (de 3 no Sprint 0)</a:t>
             </a:r>
           </a:p>
         </p:txBody>
@@ -5909,7 +6024,7 @@
             <a:avLst/>
           </a:prstGeom>
           <a:solidFill>
-            <a:srgbClr val="F59E0B"/>
+            <a:srgbClr val="00D4AA"/>
           </a:solidFill>
           <a:ln>
             <a:noFill/>
@@ -5968,11 +6083,11 @@
             <a:r>
               <a:rPr sz="1400" b="1" i="0">
                 <a:solidFill>
-                  <a:srgbClr val="F59E0B"/>
-                </a:solidFill>
-                <a:latin typeface="Calibri"/>
-              </a:rPr>
-              <a:t>SPRINT 3 · PLANEJADO</a:t>
+                  <a:srgbClr val="00D4AA"/>
+                </a:solidFill>
+                <a:latin typeface="Calibri"/>
+              </a:rPr>
+              <a:t>PRÓXIMOS PASSOS</a:t>
             </a:r>
           </a:p>
         </p:txBody>
@@ -6011,7 +6126,7 @@
                 </a:solidFill>
                 <a:latin typeface="Calibri"/>
               </a:rPr>
-              <a:t>Plataforma e Escala — parcialmente testado</a:t>
+              <a:t>Pendências em aberto</a:t>
             </a:r>
           </a:p>
         </p:txBody>
@@ -6057,66 +6172,14 @@
       </p:sp>
       <p:sp>
         <p:nvSpPr>
-          <p:cNvPr id="7" name="Rounded Rectangle 6"/>
-          <p:cNvSpPr/>
-          <p:nvPr/>
-        </p:nvSpPr>
-        <p:spPr>
-          <a:xfrm>
-            <a:off x="548640" y="1188720"/>
-            <a:ext cx="1554480" cy="365760"/>
-          </a:xfrm>
-          <a:prstGeom prst="roundRect">
-            <a:avLst/>
-          </a:prstGeom>
-          <a:solidFill>
-            <a:srgbClr val="F59E0B"/>
-          </a:solidFill>
-          <a:ln>
-            <a:noFill/>
-          </a:ln>
-          <a:effectLst/>
-        </p:spPr>
-        <p:style>
-          <a:lnRef idx="1">
-            <a:schemeClr val="accent1"/>
-          </a:lnRef>
-          <a:fillRef idx="3">
-            <a:schemeClr val="accent1"/>
-          </a:fillRef>
-          <a:effectRef idx="2">
-            <a:schemeClr val="accent1"/>
-          </a:effectRef>
-          <a:fontRef idx="minor">
-            <a:schemeClr val="lt1"/>
-          </a:fontRef>
-        </p:style>
-        <p:txBody>
-          <a:bodyPr rtlCol="0" anchor="ctr"/>
-          <a:lstStyle/>
-          <a:p>
-            <a:pPr algn="ctr"/>
-            <a:r>
-              <a:rPr sz="1200" b="1">
-                <a:solidFill>
-                  <a:srgbClr val="FFFFFF"/>
-                </a:solidFill>
-              </a:rPr>
-              <a:t>PARCIAL</a:t>
-            </a:r>
-          </a:p>
-        </p:txBody>
-      </p:sp>
-      <p:sp>
-        <p:nvSpPr>
-          <p:cNvPr id="8" name="TextBox 7"/>
+          <p:cNvPr id="7" name="TextBox 6"/>
           <p:cNvSpPr txBox="1"/>
           <p:nvPr/>
         </p:nvSpPr>
         <p:spPr>
           <a:xfrm>
-            <a:off x="548640" y="1828800"/>
-            <a:ext cx="10789920" cy="4114800"/>
+            <a:off x="548640" y="1463040"/>
+            <a:ext cx="10789920" cy="4572000"/>
           </a:xfrm>
           <a:prstGeom prst="rect">
             <a:avLst/>
@@ -6138,13 +6201,13 @@
               </a:spcAft>
             </a:pPr>
             <a:r>
-              <a:rPr sz="1700">
+              <a:rPr sz="1800">
                 <a:solidFill>
                   <a:srgbClr val="FFFFFF"/>
                 </a:solidFill>
                 <a:latin typeface="Calibri"/>
               </a:rPr>
-              <a:t>•  Prometheus + Grafana (métricas, dashboards, alertas) — não iniciado</a:t>
+              <a:t>•  Configurar secrets DOCKERHUB_USERNAME / DOCKERHUB_TOKEN no GitHub</a:t>
             </a:r>
           </a:p>
           <a:p>
@@ -6157,13 +6220,13 @@
               </a:spcAft>
             </a:pPr>
             <a:r>
-              <a:rPr sz="1700">
+              <a:rPr sz="1800">
                 <a:solidFill>
                   <a:srgbClr val="FFFFFF"/>
                 </a:solidFill>
                 <a:latin typeface="Calibri"/>
               </a:rPr>
-              <a:t>•  PWA de câmera para alunos sem Android — não iniciado</a:t>
+              <a:t>•  Decidir o destino de pose-service/ai/dataset_generator.py (extensão da IA desconectada, não finalizada)</a:t>
             </a:r>
           </a:p>
           <a:p>
@@ -6176,13 +6239,13 @@
               </a:spcAft>
             </a:pPr>
             <a:r>
-              <a:rPr sz="1700">
+              <a:rPr sz="1800">
                 <a:solidFill>
                   <a:srgbClr val="FFFFFF"/>
                 </a:solidFill>
                 <a:latin typeface="Calibri"/>
               </a:rPr>
-              <a:t>•  Modelo de IA próprio — antecipado durante o Sprint 1, validado contra vídeo real e</a:t>
+              <a:t>•  Configurar secrets STAGING_HOST/USER/SSH_KEY para habilitar o deploy automático</a:t>
             </a:r>
           </a:p>
           <a:p>
@@ -6195,32 +6258,13 @@
               </a:spcAft>
             </a:pPr>
             <a:r>
-              <a:rPr sz="1500">
-                <a:solidFill>
-                  <a:srgbClr val="B0B8C2"/>
-                </a:solidFill>
-                <a:latin typeface="Calibri"/>
-              </a:rPr>
-              <a:t>    ‣  REVERTIDO: dataset sintético limitava o modelo a, no máximo, igualar as regras</a:t>
-            </a:r>
-          </a:p>
-          <a:p>
-            <a:pPr>
-              <a:lnSpc>
-                <a:spcPct val="112000"/>
-              </a:lnSpc>
-              <a:spcAft>
-                <a:spcPts val="800"/>
-              </a:spcAft>
-            </a:pPr>
-            <a:r>
-              <a:rPr sz="1500">
-                <a:solidFill>
-                  <a:srgbClr val="B0B8C2"/>
-                </a:solidFill>
-                <a:latin typeface="Calibri"/>
-              </a:rPr>
-              <a:t>    ‣  Código mantido no disco (desconectado) para retomar com dados reais anotados no futuro</a:t>
+              <a:rPr sz="1800">
+                <a:solidFill>
+                  <a:srgbClr val="FFFFFF"/>
+                </a:solidFill>
+                <a:latin typeface="Calibri"/>
+              </a:rPr>
+              <a:t>•  Avaliar retomar o motor de IA no futuro, treinado com dados reais anotados (não sintéticos)</a:t>
             </a:r>
           </a:p>
         </p:txBody>
@@ -6234,1330 +6278,6 @@
 </file>
 
 <file path=ppt/slides/slide16.xml><?xml version="1.0" encoding="utf-8"?>
-<p:sld xmlns:a="http://schemas.openxmlformats.org/drawingml/2006/main" xmlns:p="http://schemas.openxmlformats.org/presentationml/2006/main" xmlns:r="http://schemas.openxmlformats.org/officeDocument/2006/relationships">
-  <p:cSld>
-    <p:bg>
-      <p:bgPr>
-        <a:solidFill>
-          <a:srgbClr val="161B22"/>
-        </a:solidFill>
-        <a:effectLst/>
-      </p:bgPr>
-    </p:bg>
-    <p:spTree>
-      <p:nvGrpSpPr>
-        <p:cNvPr id="1" name=""/>
-        <p:cNvGrpSpPr/>
-        <p:nvPr/>
-      </p:nvGrpSpPr>
-      <p:grpSpPr/>
-      <p:sp>
-        <p:nvSpPr>
-          <p:cNvPr id="2" name="Rectangle 1"/>
-          <p:cNvSpPr/>
-          <p:nvPr/>
-        </p:nvSpPr>
-        <p:spPr>
-          <a:xfrm>
-            <a:off x="0" y="0"/>
-            <a:ext cx="12191695" cy="1051560"/>
-          </a:xfrm>
-          <a:prstGeom prst="rect">
-            <a:avLst/>
-          </a:prstGeom>
-          <a:solidFill>
-            <a:srgbClr val="0D1117"/>
-          </a:solidFill>
-          <a:ln>
-            <a:noFill/>
-          </a:ln>
-          <a:effectLst/>
-        </p:spPr>
-        <p:style>
-          <a:lnRef idx="1">
-            <a:schemeClr val="accent1"/>
-          </a:lnRef>
-          <a:fillRef idx="3">
-            <a:schemeClr val="accent1"/>
-          </a:fillRef>
-          <a:effectRef idx="2">
-            <a:schemeClr val="accent1"/>
-          </a:effectRef>
-          <a:fontRef idx="minor">
-            <a:schemeClr val="lt1"/>
-          </a:fontRef>
-        </p:style>
-        <p:txBody>
-          <a:bodyPr rtlCol="0" anchor="ctr"/>
-          <a:lstStyle/>
-          <a:p>
-            <a:pPr algn="ctr"/>
-          </a:p>
-        </p:txBody>
-      </p:sp>
-      <p:sp>
-        <p:nvSpPr>
-          <p:cNvPr id="3" name="Rectangle 2"/>
-          <p:cNvSpPr/>
-          <p:nvPr/>
-        </p:nvSpPr>
-        <p:spPr>
-          <a:xfrm>
-            <a:off x="0" y="1051560"/>
-            <a:ext cx="12191695" cy="25400"/>
-          </a:xfrm>
-          <a:prstGeom prst="rect">
-            <a:avLst/>
-          </a:prstGeom>
-          <a:solidFill>
-            <a:srgbClr val="00D4AA"/>
-          </a:solidFill>
-          <a:ln>
-            <a:noFill/>
-          </a:ln>
-          <a:effectLst/>
-        </p:spPr>
-        <p:style>
-          <a:lnRef idx="1">
-            <a:schemeClr val="accent1"/>
-          </a:lnRef>
-          <a:fillRef idx="3">
-            <a:schemeClr val="accent1"/>
-          </a:fillRef>
-          <a:effectRef idx="2">
-            <a:schemeClr val="accent1"/>
-          </a:effectRef>
-          <a:fontRef idx="minor">
-            <a:schemeClr val="lt1"/>
-          </a:fontRef>
-        </p:style>
-        <p:txBody>
-          <a:bodyPr rtlCol="0" anchor="ctr"/>
-          <a:lstStyle/>
-          <a:p>
-            <a:pPr algn="ctr"/>
-          </a:p>
-        </p:txBody>
-      </p:sp>
-      <p:sp>
-        <p:nvSpPr>
-          <p:cNvPr id="4" name="TextBox 3"/>
-          <p:cNvSpPr txBox="1"/>
-          <p:nvPr/>
-        </p:nvSpPr>
-        <p:spPr>
-          <a:xfrm>
-            <a:off x="548640" y="320040"/>
-            <a:ext cx="8229600" cy="365760"/>
-          </a:xfrm>
-          <a:prstGeom prst="rect">
-            <a:avLst/>
-          </a:prstGeom>
-          <a:noFill/>
-        </p:spPr>
-        <p:txBody>
-          <a:bodyPr wrap="square" anchor="t">
-            <a:spAutoFit/>
-          </a:bodyPr>
-          <a:lstStyle/>
-          <a:p>
-            <a:pPr algn="l">
-              <a:lnSpc>
-                <a:spcPct val="100000"/>
-              </a:lnSpc>
-            </a:pPr>
-            <a:r>
-              <a:rPr sz="1400" b="1" i="0">
-                <a:solidFill>
-                  <a:srgbClr val="00D4AA"/>
-                </a:solidFill>
-                <a:latin typeface="Calibri"/>
-              </a:rPr>
-              <a:t>ESTADO ATUAL</a:t>
-            </a:r>
-          </a:p>
-        </p:txBody>
-      </p:sp>
-      <p:sp>
-        <p:nvSpPr>
-          <p:cNvPr id="5" name="TextBox 4"/>
-          <p:cNvSpPr txBox="1"/>
-          <p:nvPr/>
-        </p:nvSpPr>
-        <p:spPr>
-          <a:xfrm>
-            <a:off x="548640" y="566928"/>
-            <a:ext cx="10515600" cy="548640"/>
-          </a:xfrm>
-          <a:prstGeom prst="rect">
-            <a:avLst/>
-          </a:prstGeom>
-          <a:noFill/>
-        </p:spPr>
-        <p:txBody>
-          <a:bodyPr wrap="square" anchor="t">
-            <a:spAutoFit/>
-          </a:bodyPr>
-          <a:lstStyle/>
-          <a:p>
-            <a:pPr algn="l">
-              <a:lnSpc>
-                <a:spcPct val="100000"/>
-              </a:lnSpc>
-            </a:pPr>
-            <a:r>
-              <a:rPr sz="2600" b="1" i="0">
-                <a:solidFill>
-                  <a:srgbClr val="FFFFFF"/>
-                </a:solidFill>
-                <a:latin typeface="Calibri"/>
-              </a:rPr>
-              <a:t>Métricas do projeto</a:t>
-            </a:r>
-          </a:p>
-        </p:txBody>
-      </p:sp>
-      <p:sp>
-        <p:nvSpPr>
-          <p:cNvPr id="6" name="TextBox 5"/>
-          <p:cNvSpPr txBox="1"/>
-          <p:nvPr/>
-        </p:nvSpPr>
-        <p:spPr>
-          <a:xfrm>
-            <a:off x="11277295" y="6446520"/>
-            <a:ext cx="640080" cy="320040"/>
-          </a:xfrm>
-          <a:prstGeom prst="rect">
-            <a:avLst/>
-          </a:prstGeom>
-          <a:noFill/>
-        </p:spPr>
-        <p:txBody>
-          <a:bodyPr wrap="square" anchor="t">
-            <a:spAutoFit/>
-          </a:bodyPr>
-          <a:lstStyle/>
-          <a:p>
-            <a:pPr algn="r">
-              <a:lnSpc>
-                <a:spcPct val="100000"/>
-              </a:lnSpc>
-            </a:pPr>
-            <a:r>
-              <a:rPr sz="1100" b="0" i="0">
-                <a:solidFill>
-                  <a:srgbClr val="B0B8C2"/>
-                </a:solidFill>
-                <a:latin typeface="Calibri"/>
-              </a:rPr>
-              <a:t>16</a:t>
-            </a:r>
-          </a:p>
-        </p:txBody>
-      </p:sp>
-      <p:sp>
-        <p:nvSpPr>
-          <p:cNvPr id="7" name="Rounded Rectangle 6"/>
-          <p:cNvSpPr/>
-          <p:nvPr/>
-        </p:nvSpPr>
-        <p:spPr>
-          <a:xfrm>
-            <a:off x="548640" y="1554480"/>
-            <a:ext cx="3429000" cy="1645920"/>
-          </a:xfrm>
-          <a:prstGeom prst="roundRect">
-            <a:avLst/>
-          </a:prstGeom>
-          <a:solidFill>
-            <a:srgbClr val="1B2129"/>
-          </a:solidFill>
-          <a:ln w="12700">
-            <a:solidFill>
-              <a:srgbClr val="00D4AA"/>
-            </a:solidFill>
-          </a:ln>
-          <a:effectLst/>
-        </p:spPr>
-        <p:style>
-          <a:lnRef idx="1">
-            <a:schemeClr val="accent1"/>
-          </a:lnRef>
-          <a:fillRef idx="3">
-            <a:schemeClr val="accent1"/>
-          </a:fillRef>
-          <a:effectRef idx="2">
-            <a:schemeClr val="accent1"/>
-          </a:effectRef>
-          <a:fontRef idx="minor">
-            <a:schemeClr val="lt1"/>
-          </a:fontRef>
-        </p:style>
-        <p:txBody>
-          <a:bodyPr rtlCol="0" anchor="ctr"/>
-          <a:lstStyle/>
-          <a:p>
-            <a:pPr algn="ctr"/>
-          </a:p>
-        </p:txBody>
-      </p:sp>
-      <p:sp>
-        <p:nvSpPr>
-          <p:cNvPr id="8" name="TextBox 7"/>
-          <p:cNvSpPr txBox="1"/>
-          <p:nvPr/>
-        </p:nvSpPr>
-        <p:spPr>
-          <a:xfrm>
-            <a:off x="548640" y="1737360"/>
-            <a:ext cx="3429000" cy="822960"/>
-          </a:xfrm>
-          <a:prstGeom prst="rect">
-            <a:avLst/>
-          </a:prstGeom>
-          <a:noFill/>
-        </p:spPr>
-        <p:txBody>
-          <a:bodyPr wrap="square" anchor="t">
-            <a:spAutoFit/>
-          </a:bodyPr>
-          <a:lstStyle/>
-          <a:p>
-            <a:pPr algn="ctr">
-              <a:lnSpc>
-                <a:spcPct val="100000"/>
-              </a:lnSpc>
-            </a:pPr>
-            <a:r>
-              <a:rPr sz="4000" b="1" i="0">
-                <a:solidFill>
-                  <a:srgbClr val="00D4AA"/>
-                </a:solidFill>
-                <a:latin typeface="Calibri"/>
-              </a:rPr>
-              <a:t>9</a:t>
-            </a:r>
-          </a:p>
-        </p:txBody>
-      </p:sp>
-      <p:sp>
-        <p:nvSpPr>
-          <p:cNvPr id="9" name="TextBox 8"/>
-          <p:cNvSpPr txBox="1"/>
-          <p:nvPr/>
-        </p:nvSpPr>
-        <p:spPr>
-          <a:xfrm>
-            <a:off x="548640" y="2560320"/>
-            <a:ext cx="3429000" cy="548640"/>
-          </a:xfrm>
-          <a:prstGeom prst="rect">
-            <a:avLst/>
-          </a:prstGeom>
-          <a:noFill/>
-        </p:spPr>
-        <p:txBody>
-          <a:bodyPr wrap="square" anchor="t">
-            <a:spAutoFit/>
-          </a:bodyPr>
-          <a:lstStyle/>
-          <a:p>
-            <a:pPr algn="ctr">
-              <a:lnSpc>
-                <a:spcPct val="100000"/>
-              </a:lnSpc>
-            </a:pPr>
-            <a:r>
-              <a:rPr sz="1400" b="0" i="0">
-                <a:solidFill>
-                  <a:srgbClr val="B0B8C2"/>
-                </a:solidFill>
-                <a:latin typeface="Calibri"/>
-              </a:rPr>
-              <a:t>microsserviços</a:t>
-            </a:r>
-          </a:p>
-        </p:txBody>
-      </p:sp>
-      <p:sp>
-        <p:nvSpPr>
-          <p:cNvPr id="10" name="Rounded Rectangle 9"/>
-          <p:cNvSpPr/>
-          <p:nvPr/>
-        </p:nvSpPr>
-        <p:spPr>
-          <a:xfrm>
-            <a:off x="4251960" y="1554480"/>
-            <a:ext cx="3429000" cy="1645920"/>
-          </a:xfrm>
-          <a:prstGeom prst="roundRect">
-            <a:avLst/>
-          </a:prstGeom>
-          <a:solidFill>
-            <a:srgbClr val="1B2129"/>
-          </a:solidFill>
-          <a:ln w="12700">
-            <a:solidFill>
-              <a:srgbClr val="00D4AA"/>
-            </a:solidFill>
-          </a:ln>
-          <a:effectLst/>
-        </p:spPr>
-        <p:style>
-          <a:lnRef idx="1">
-            <a:schemeClr val="accent1"/>
-          </a:lnRef>
-          <a:fillRef idx="3">
-            <a:schemeClr val="accent1"/>
-          </a:fillRef>
-          <a:effectRef idx="2">
-            <a:schemeClr val="accent1"/>
-          </a:effectRef>
-          <a:fontRef idx="minor">
-            <a:schemeClr val="lt1"/>
-          </a:fontRef>
-        </p:style>
-        <p:txBody>
-          <a:bodyPr rtlCol="0" anchor="ctr"/>
-          <a:lstStyle/>
-          <a:p>
-            <a:pPr algn="ctr"/>
-          </a:p>
-        </p:txBody>
-      </p:sp>
-      <p:sp>
-        <p:nvSpPr>
-          <p:cNvPr id="11" name="TextBox 10"/>
-          <p:cNvSpPr txBox="1"/>
-          <p:nvPr/>
-        </p:nvSpPr>
-        <p:spPr>
-          <a:xfrm>
-            <a:off x="4251960" y="1737360"/>
-            <a:ext cx="3429000" cy="822960"/>
-          </a:xfrm>
-          <a:prstGeom prst="rect">
-            <a:avLst/>
-          </a:prstGeom>
-          <a:noFill/>
-        </p:spPr>
-        <p:txBody>
-          <a:bodyPr wrap="square" anchor="t">
-            <a:spAutoFit/>
-          </a:bodyPr>
-          <a:lstStyle/>
-          <a:p>
-            <a:pPr algn="ctr">
-              <a:lnSpc>
-                <a:spcPct val="100000"/>
-              </a:lnSpc>
-            </a:pPr>
-            <a:r>
-              <a:rPr sz="4000" b="1" i="0">
-                <a:solidFill>
-                  <a:srgbClr val="00D4AA"/>
-                </a:solidFill>
-                <a:latin typeface="Calibri"/>
-              </a:rPr>
-              <a:t>5</a:t>
-            </a:r>
-          </a:p>
-        </p:txBody>
-      </p:sp>
-      <p:sp>
-        <p:nvSpPr>
-          <p:cNvPr id="12" name="TextBox 11"/>
-          <p:cNvSpPr txBox="1"/>
-          <p:nvPr/>
-        </p:nvSpPr>
-        <p:spPr>
-          <a:xfrm>
-            <a:off x="4251960" y="2560320"/>
-            <a:ext cx="3429000" cy="548640"/>
-          </a:xfrm>
-          <a:prstGeom prst="rect">
-            <a:avLst/>
-          </a:prstGeom>
-          <a:noFill/>
-        </p:spPr>
-        <p:txBody>
-          <a:bodyPr wrap="square" anchor="t">
-            <a:spAutoFit/>
-          </a:bodyPr>
-          <a:lstStyle/>
-          <a:p>
-            <a:pPr algn="ctr">
-              <a:lnSpc>
-                <a:spcPct val="100000"/>
-              </a:lnSpc>
-            </a:pPr>
-            <a:r>
-              <a:rPr sz="1400" b="0" i="0">
-                <a:solidFill>
-                  <a:srgbClr val="B0B8C2"/>
-                </a:solidFill>
-                <a:latin typeface="Calibri"/>
-              </a:rPr>
-              <a:t>exercícios suportados</a:t>
-            </a:r>
-          </a:p>
-        </p:txBody>
-      </p:sp>
-      <p:sp>
-        <p:nvSpPr>
-          <p:cNvPr id="13" name="Rounded Rectangle 12"/>
-          <p:cNvSpPr/>
-          <p:nvPr/>
-        </p:nvSpPr>
-        <p:spPr>
-          <a:xfrm>
-            <a:off x="7955280" y="1554480"/>
-            <a:ext cx="3429000" cy="1645920"/>
-          </a:xfrm>
-          <a:prstGeom prst="roundRect">
-            <a:avLst/>
-          </a:prstGeom>
-          <a:solidFill>
-            <a:srgbClr val="1B2129"/>
-          </a:solidFill>
-          <a:ln w="12700">
-            <a:solidFill>
-              <a:srgbClr val="00D4AA"/>
-            </a:solidFill>
-          </a:ln>
-          <a:effectLst/>
-        </p:spPr>
-        <p:style>
-          <a:lnRef idx="1">
-            <a:schemeClr val="accent1"/>
-          </a:lnRef>
-          <a:fillRef idx="3">
-            <a:schemeClr val="accent1"/>
-          </a:fillRef>
-          <a:effectRef idx="2">
-            <a:schemeClr val="accent1"/>
-          </a:effectRef>
-          <a:fontRef idx="minor">
-            <a:schemeClr val="lt1"/>
-          </a:fontRef>
-        </p:style>
-        <p:txBody>
-          <a:bodyPr rtlCol="0" anchor="ctr"/>
-          <a:lstStyle/>
-          <a:p>
-            <a:pPr algn="ctr"/>
-          </a:p>
-        </p:txBody>
-      </p:sp>
-      <p:sp>
-        <p:nvSpPr>
-          <p:cNvPr id="14" name="TextBox 13"/>
-          <p:cNvSpPr txBox="1"/>
-          <p:nvPr/>
-        </p:nvSpPr>
-        <p:spPr>
-          <a:xfrm>
-            <a:off x="7955280" y="1737360"/>
-            <a:ext cx="3429000" cy="822960"/>
-          </a:xfrm>
-          <a:prstGeom prst="rect">
-            <a:avLst/>
-          </a:prstGeom>
-          <a:noFill/>
-        </p:spPr>
-        <p:txBody>
-          <a:bodyPr wrap="square" anchor="t">
-            <a:spAutoFit/>
-          </a:bodyPr>
-          <a:lstStyle/>
-          <a:p>
-            <a:pPr algn="ctr">
-              <a:lnSpc>
-                <a:spcPct val="100000"/>
-              </a:lnSpc>
-            </a:pPr>
-            <a:r>
-              <a:rPr sz="4000" b="1" i="0">
-                <a:solidFill>
-                  <a:srgbClr val="00D4AA"/>
-                </a:solidFill>
-                <a:latin typeface="Calibri"/>
-              </a:rPr>
-              <a:t>48/48</a:t>
-            </a:r>
-          </a:p>
-        </p:txBody>
-      </p:sp>
-      <p:sp>
-        <p:nvSpPr>
-          <p:cNvPr id="15" name="TextBox 14"/>
-          <p:cNvSpPr txBox="1"/>
-          <p:nvPr/>
-        </p:nvSpPr>
-        <p:spPr>
-          <a:xfrm>
-            <a:off x="7955280" y="2560320"/>
-            <a:ext cx="3429000" cy="548640"/>
-          </a:xfrm>
-          <a:prstGeom prst="rect">
-            <a:avLst/>
-          </a:prstGeom>
-          <a:noFill/>
-        </p:spPr>
-        <p:txBody>
-          <a:bodyPr wrap="square" anchor="t">
-            <a:spAutoFit/>
-          </a:bodyPr>
-          <a:lstStyle/>
-          <a:p>
-            <a:pPr algn="ctr">
-              <a:lnSpc>
-                <a:spcPct val="100000"/>
-              </a:lnSpc>
-            </a:pPr>
-            <a:r>
-              <a:rPr sz="1400" b="0" i="0">
-                <a:solidFill>
-                  <a:srgbClr val="B0B8C2"/>
-                </a:solidFill>
-                <a:latin typeface="Calibri"/>
-              </a:rPr>
-              <a:t>testes passando</a:t>
-            </a:r>
-          </a:p>
-        </p:txBody>
-      </p:sp>
-      <p:sp>
-        <p:nvSpPr>
-          <p:cNvPr id="16" name="Rounded Rectangle 15"/>
-          <p:cNvSpPr/>
-          <p:nvPr/>
-        </p:nvSpPr>
-        <p:spPr>
-          <a:xfrm>
-            <a:off x="548640" y="3474720"/>
-            <a:ext cx="3429000" cy="1645920"/>
-          </a:xfrm>
-          <a:prstGeom prst="roundRect">
-            <a:avLst/>
-          </a:prstGeom>
-          <a:solidFill>
-            <a:srgbClr val="1B2129"/>
-          </a:solidFill>
-          <a:ln w="12700">
-            <a:solidFill>
-              <a:srgbClr val="00D4AA"/>
-            </a:solidFill>
-          </a:ln>
-          <a:effectLst/>
-        </p:spPr>
-        <p:style>
-          <a:lnRef idx="1">
-            <a:schemeClr val="accent1"/>
-          </a:lnRef>
-          <a:fillRef idx="3">
-            <a:schemeClr val="accent1"/>
-          </a:fillRef>
-          <a:effectRef idx="2">
-            <a:schemeClr val="accent1"/>
-          </a:effectRef>
-          <a:fontRef idx="minor">
-            <a:schemeClr val="lt1"/>
-          </a:fontRef>
-        </p:style>
-        <p:txBody>
-          <a:bodyPr rtlCol="0" anchor="ctr"/>
-          <a:lstStyle/>
-          <a:p>
-            <a:pPr algn="ctr"/>
-          </a:p>
-        </p:txBody>
-      </p:sp>
-      <p:sp>
-        <p:nvSpPr>
-          <p:cNvPr id="17" name="TextBox 16"/>
-          <p:cNvSpPr txBox="1"/>
-          <p:nvPr/>
-        </p:nvSpPr>
-        <p:spPr>
-          <a:xfrm>
-            <a:off x="548640" y="3657600"/>
-            <a:ext cx="3429000" cy="822960"/>
-          </a:xfrm>
-          <a:prstGeom prst="rect">
-            <a:avLst/>
-          </a:prstGeom>
-          <a:noFill/>
-        </p:spPr>
-        <p:txBody>
-          <a:bodyPr wrap="square" anchor="t">
-            <a:spAutoFit/>
-          </a:bodyPr>
-          <a:lstStyle/>
-          <a:p>
-            <a:pPr algn="ctr">
-              <a:lnSpc>
-                <a:spcPct val="100000"/>
-              </a:lnSpc>
-            </a:pPr>
-            <a:r>
-              <a:rPr sz="4000" b="1" i="0">
-                <a:solidFill>
-                  <a:srgbClr val="00D4AA"/>
-                </a:solidFill>
-                <a:latin typeface="Calibri"/>
-              </a:rPr>
-              <a:t>12</a:t>
-            </a:r>
-          </a:p>
-        </p:txBody>
-      </p:sp>
-      <p:sp>
-        <p:nvSpPr>
-          <p:cNvPr id="18" name="TextBox 17"/>
-          <p:cNvSpPr txBox="1"/>
-          <p:nvPr/>
-        </p:nvSpPr>
-        <p:spPr>
-          <a:xfrm>
-            <a:off x="548640" y="4480560"/>
-            <a:ext cx="3429000" cy="548640"/>
-          </a:xfrm>
-          <a:prstGeom prst="rect">
-            <a:avLst/>
-          </a:prstGeom>
-          <a:noFill/>
-        </p:spPr>
-        <p:txBody>
-          <a:bodyPr wrap="square" anchor="t">
-            <a:spAutoFit/>
-          </a:bodyPr>
-          <a:lstStyle/>
-          <a:p>
-            <a:pPr algn="ctr">
-              <a:lnSpc>
-                <a:spcPct val="100000"/>
-              </a:lnSpc>
-            </a:pPr>
-            <a:r>
-              <a:rPr sz="1400" b="0" i="0">
-                <a:solidFill>
-                  <a:srgbClr val="B0B8C2"/>
-                </a:solidFill>
-                <a:latin typeface="Calibri"/>
-              </a:rPr>
-              <a:t>containers Docker</a:t>
-            </a:r>
-          </a:p>
-        </p:txBody>
-      </p:sp>
-      <p:sp>
-        <p:nvSpPr>
-          <p:cNvPr id="19" name="Rounded Rectangle 18"/>
-          <p:cNvSpPr/>
-          <p:nvPr/>
-        </p:nvSpPr>
-        <p:spPr>
-          <a:xfrm>
-            <a:off x="4251960" y="3474720"/>
-            <a:ext cx="3429000" cy="1645920"/>
-          </a:xfrm>
-          <a:prstGeom prst="roundRect">
-            <a:avLst/>
-          </a:prstGeom>
-          <a:solidFill>
-            <a:srgbClr val="1B2129"/>
-          </a:solidFill>
-          <a:ln w="12700">
-            <a:solidFill>
-              <a:srgbClr val="00D4AA"/>
-            </a:solidFill>
-          </a:ln>
-          <a:effectLst/>
-        </p:spPr>
-        <p:style>
-          <a:lnRef idx="1">
-            <a:schemeClr val="accent1"/>
-          </a:lnRef>
-          <a:fillRef idx="3">
-            <a:schemeClr val="accent1"/>
-          </a:fillRef>
-          <a:effectRef idx="2">
-            <a:schemeClr val="accent1"/>
-          </a:effectRef>
-          <a:fontRef idx="minor">
-            <a:schemeClr val="lt1"/>
-          </a:fontRef>
-        </p:style>
-        <p:txBody>
-          <a:bodyPr rtlCol="0" anchor="ctr"/>
-          <a:lstStyle/>
-          <a:p>
-            <a:pPr algn="ctr"/>
-          </a:p>
-        </p:txBody>
-      </p:sp>
-      <p:sp>
-        <p:nvSpPr>
-          <p:cNvPr id="20" name="TextBox 19"/>
-          <p:cNvSpPr txBox="1"/>
-          <p:nvPr/>
-        </p:nvSpPr>
-        <p:spPr>
-          <a:xfrm>
-            <a:off x="4251960" y="3657600"/>
-            <a:ext cx="3429000" cy="822960"/>
-          </a:xfrm>
-          <a:prstGeom prst="rect">
-            <a:avLst/>
-          </a:prstGeom>
-          <a:noFill/>
-        </p:spPr>
-        <p:txBody>
-          <a:bodyPr wrap="square" anchor="t">
-            <a:spAutoFit/>
-          </a:bodyPr>
-          <a:lstStyle/>
-          <a:p>
-            <a:pPr algn="ctr">
-              <a:lnSpc>
-                <a:spcPct val="100000"/>
-              </a:lnSpc>
-            </a:pPr>
-            <a:r>
-              <a:rPr sz="4000" b="1" i="0">
-                <a:solidFill>
-                  <a:srgbClr val="00D4AA"/>
-                </a:solidFill>
-                <a:latin typeface="Calibri"/>
-              </a:rPr>
-              <a:t>2</a:t>
-            </a:r>
-          </a:p>
-        </p:txBody>
-      </p:sp>
-      <p:sp>
-        <p:nvSpPr>
-          <p:cNvPr id="21" name="TextBox 20"/>
-          <p:cNvSpPr txBox="1"/>
-          <p:nvPr/>
-        </p:nvSpPr>
-        <p:spPr>
-          <a:xfrm>
-            <a:off x="4251960" y="4480560"/>
-            <a:ext cx="3429000" cy="548640"/>
-          </a:xfrm>
-          <a:prstGeom prst="rect">
-            <a:avLst/>
-          </a:prstGeom>
-          <a:noFill/>
-        </p:spPr>
-        <p:txBody>
-          <a:bodyPr wrap="square" anchor="t">
-            <a:spAutoFit/>
-          </a:bodyPr>
-          <a:lstStyle/>
-          <a:p>
-            <a:pPr algn="ctr">
-              <a:lnSpc>
-                <a:spcPct val="100000"/>
-              </a:lnSpc>
-            </a:pPr>
-            <a:r>
-              <a:rPr sz="1400" b="0" i="0">
-                <a:solidFill>
-                  <a:srgbClr val="B0B8C2"/>
-                </a:solidFill>
-                <a:latin typeface="Calibri"/>
-              </a:rPr>
-              <a:t>registries (ghcr.io + Docker Hub)</a:t>
-            </a:r>
-          </a:p>
-        </p:txBody>
-      </p:sp>
-      <p:sp>
-        <p:nvSpPr>
-          <p:cNvPr id="22" name="Rounded Rectangle 21"/>
-          <p:cNvSpPr/>
-          <p:nvPr/>
-        </p:nvSpPr>
-        <p:spPr>
-          <a:xfrm>
-            <a:off x="7955280" y="3474720"/>
-            <a:ext cx="3429000" cy="1645920"/>
-          </a:xfrm>
-          <a:prstGeom prst="roundRect">
-            <a:avLst/>
-          </a:prstGeom>
-          <a:solidFill>
-            <a:srgbClr val="1B2129"/>
-          </a:solidFill>
-          <a:ln w="12700">
-            <a:solidFill>
-              <a:srgbClr val="00D4AA"/>
-            </a:solidFill>
-          </a:ln>
-          <a:effectLst/>
-        </p:spPr>
-        <p:style>
-          <a:lnRef idx="1">
-            <a:schemeClr val="accent1"/>
-          </a:lnRef>
-          <a:fillRef idx="3">
-            <a:schemeClr val="accent1"/>
-          </a:fillRef>
-          <a:effectRef idx="2">
-            <a:schemeClr val="accent1"/>
-          </a:effectRef>
-          <a:fontRef idx="minor">
-            <a:schemeClr val="lt1"/>
-          </a:fontRef>
-        </p:style>
-        <p:txBody>
-          <a:bodyPr rtlCol="0" anchor="ctr"/>
-          <a:lstStyle/>
-          <a:p>
-            <a:pPr algn="ctr"/>
-          </a:p>
-        </p:txBody>
-      </p:sp>
-      <p:sp>
-        <p:nvSpPr>
-          <p:cNvPr id="23" name="TextBox 22"/>
-          <p:cNvSpPr txBox="1"/>
-          <p:nvPr/>
-        </p:nvSpPr>
-        <p:spPr>
-          <a:xfrm>
-            <a:off x="7955280" y="3657600"/>
-            <a:ext cx="3429000" cy="822960"/>
-          </a:xfrm>
-          <a:prstGeom prst="rect">
-            <a:avLst/>
-          </a:prstGeom>
-          <a:noFill/>
-        </p:spPr>
-        <p:txBody>
-          <a:bodyPr wrap="square" anchor="t">
-            <a:spAutoFit/>
-          </a:bodyPr>
-          <a:lstStyle/>
-          <a:p>
-            <a:pPr algn="ctr">
-              <a:lnSpc>
-                <a:spcPct val="100000"/>
-              </a:lnSpc>
-            </a:pPr>
-            <a:r>
-              <a:rPr sz="4000" b="1" i="0">
-                <a:solidFill>
-                  <a:srgbClr val="00D4AA"/>
-                </a:solidFill>
-                <a:latin typeface="Calibri"/>
-              </a:rPr>
-              <a:t>10+</a:t>
-            </a:r>
-          </a:p>
-        </p:txBody>
-      </p:sp>
-      <p:sp>
-        <p:nvSpPr>
-          <p:cNvPr id="24" name="TextBox 23"/>
-          <p:cNvSpPr txBox="1"/>
-          <p:nvPr/>
-        </p:nvSpPr>
-        <p:spPr>
-          <a:xfrm>
-            <a:off x="7955280" y="4480560"/>
-            <a:ext cx="3429000" cy="548640"/>
-          </a:xfrm>
-          <a:prstGeom prst="rect">
-            <a:avLst/>
-          </a:prstGeom>
-          <a:noFill/>
-        </p:spPr>
-        <p:txBody>
-          <a:bodyPr wrap="square" anchor="t">
-            <a:spAutoFit/>
-          </a:bodyPr>
-          <a:lstStyle/>
-          <a:p>
-            <a:pPr algn="ctr">
-              <a:lnSpc>
-                <a:spcPct val="100000"/>
-              </a:lnSpc>
-            </a:pPr>
-            <a:r>
-              <a:rPr sz="1400" b="0" i="0">
-                <a:solidFill>
-                  <a:srgbClr val="B0B8C2"/>
-                </a:solidFill>
-                <a:latin typeface="Calibri"/>
-              </a:rPr>
-              <a:t>telas no app Android</a:t>
-            </a:r>
-          </a:p>
-        </p:txBody>
-      </p:sp>
-    </p:spTree>
-  </p:cSld>
-  <p:clrMapOvr>
-    <a:masterClrMapping/>
-  </p:clrMapOvr>
-</p:sld>
-</file>
-
-<file path=ppt/slides/slide17.xml><?xml version="1.0" encoding="utf-8"?>
-<p:sld xmlns:a="http://schemas.openxmlformats.org/drawingml/2006/main" xmlns:p="http://schemas.openxmlformats.org/presentationml/2006/main" xmlns:r="http://schemas.openxmlformats.org/officeDocument/2006/relationships">
-  <p:cSld>
-    <p:bg>
-      <p:bgPr>
-        <a:solidFill>
-          <a:srgbClr val="161B22"/>
-        </a:solidFill>
-        <a:effectLst/>
-      </p:bgPr>
-    </p:bg>
-    <p:spTree>
-      <p:nvGrpSpPr>
-        <p:cNvPr id="1" name=""/>
-        <p:cNvGrpSpPr/>
-        <p:nvPr/>
-      </p:nvGrpSpPr>
-      <p:grpSpPr/>
-      <p:sp>
-        <p:nvSpPr>
-          <p:cNvPr id="2" name="Rectangle 1"/>
-          <p:cNvSpPr/>
-          <p:nvPr/>
-        </p:nvSpPr>
-        <p:spPr>
-          <a:xfrm>
-            <a:off x="0" y="0"/>
-            <a:ext cx="12191695" cy="1051560"/>
-          </a:xfrm>
-          <a:prstGeom prst="rect">
-            <a:avLst/>
-          </a:prstGeom>
-          <a:solidFill>
-            <a:srgbClr val="0D1117"/>
-          </a:solidFill>
-          <a:ln>
-            <a:noFill/>
-          </a:ln>
-          <a:effectLst/>
-        </p:spPr>
-        <p:style>
-          <a:lnRef idx="1">
-            <a:schemeClr val="accent1"/>
-          </a:lnRef>
-          <a:fillRef idx="3">
-            <a:schemeClr val="accent1"/>
-          </a:fillRef>
-          <a:effectRef idx="2">
-            <a:schemeClr val="accent1"/>
-          </a:effectRef>
-          <a:fontRef idx="minor">
-            <a:schemeClr val="lt1"/>
-          </a:fontRef>
-        </p:style>
-        <p:txBody>
-          <a:bodyPr rtlCol="0" anchor="ctr"/>
-          <a:lstStyle/>
-          <a:p>
-            <a:pPr algn="ctr"/>
-          </a:p>
-        </p:txBody>
-      </p:sp>
-      <p:sp>
-        <p:nvSpPr>
-          <p:cNvPr id="3" name="Rectangle 2"/>
-          <p:cNvSpPr/>
-          <p:nvPr/>
-        </p:nvSpPr>
-        <p:spPr>
-          <a:xfrm>
-            <a:off x="0" y="1051560"/>
-            <a:ext cx="12191695" cy="25400"/>
-          </a:xfrm>
-          <a:prstGeom prst="rect">
-            <a:avLst/>
-          </a:prstGeom>
-          <a:solidFill>
-            <a:srgbClr val="00D4AA"/>
-          </a:solidFill>
-          <a:ln>
-            <a:noFill/>
-          </a:ln>
-          <a:effectLst/>
-        </p:spPr>
-        <p:style>
-          <a:lnRef idx="1">
-            <a:schemeClr val="accent1"/>
-          </a:lnRef>
-          <a:fillRef idx="3">
-            <a:schemeClr val="accent1"/>
-          </a:fillRef>
-          <a:effectRef idx="2">
-            <a:schemeClr val="accent1"/>
-          </a:effectRef>
-          <a:fontRef idx="minor">
-            <a:schemeClr val="lt1"/>
-          </a:fontRef>
-        </p:style>
-        <p:txBody>
-          <a:bodyPr rtlCol="0" anchor="ctr"/>
-          <a:lstStyle/>
-          <a:p>
-            <a:pPr algn="ctr"/>
-          </a:p>
-        </p:txBody>
-      </p:sp>
-      <p:sp>
-        <p:nvSpPr>
-          <p:cNvPr id="4" name="TextBox 3"/>
-          <p:cNvSpPr txBox="1"/>
-          <p:nvPr/>
-        </p:nvSpPr>
-        <p:spPr>
-          <a:xfrm>
-            <a:off x="548640" y="320040"/>
-            <a:ext cx="8229600" cy="365760"/>
-          </a:xfrm>
-          <a:prstGeom prst="rect">
-            <a:avLst/>
-          </a:prstGeom>
-          <a:noFill/>
-        </p:spPr>
-        <p:txBody>
-          <a:bodyPr wrap="square" anchor="t">
-            <a:spAutoFit/>
-          </a:bodyPr>
-          <a:lstStyle/>
-          <a:p>
-            <a:pPr algn="l">
-              <a:lnSpc>
-                <a:spcPct val="100000"/>
-              </a:lnSpc>
-            </a:pPr>
-            <a:r>
-              <a:rPr sz="1400" b="1" i="0">
-                <a:solidFill>
-                  <a:srgbClr val="00D4AA"/>
-                </a:solidFill>
-                <a:latin typeface="Calibri"/>
-              </a:rPr>
-              <a:t>PRÓXIMOS PASSOS</a:t>
-            </a:r>
-          </a:p>
-        </p:txBody>
-      </p:sp>
-      <p:sp>
-        <p:nvSpPr>
-          <p:cNvPr id="5" name="TextBox 4"/>
-          <p:cNvSpPr txBox="1"/>
-          <p:nvPr/>
-        </p:nvSpPr>
-        <p:spPr>
-          <a:xfrm>
-            <a:off x="548640" y="566928"/>
-            <a:ext cx="10515600" cy="548640"/>
-          </a:xfrm>
-          <a:prstGeom prst="rect">
-            <a:avLst/>
-          </a:prstGeom>
-          <a:noFill/>
-        </p:spPr>
-        <p:txBody>
-          <a:bodyPr wrap="square" anchor="t">
-            <a:spAutoFit/>
-          </a:bodyPr>
-          <a:lstStyle/>
-          <a:p>
-            <a:pPr algn="l">
-              <a:lnSpc>
-                <a:spcPct val="100000"/>
-              </a:lnSpc>
-            </a:pPr>
-            <a:r>
-              <a:rPr sz="2600" b="1" i="0">
-                <a:solidFill>
-                  <a:srgbClr val="FFFFFF"/>
-                </a:solidFill>
-                <a:latin typeface="Calibri"/>
-              </a:rPr>
-              <a:t>Pendências em aberto</a:t>
-            </a:r>
-          </a:p>
-        </p:txBody>
-      </p:sp>
-      <p:sp>
-        <p:nvSpPr>
-          <p:cNvPr id="6" name="TextBox 5"/>
-          <p:cNvSpPr txBox="1"/>
-          <p:nvPr/>
-        </p:nvSpPr>
-        <p:spPr>
-          <a:xfrm>
-            <a:off x="11277295" y="6446520"/>
-            <a:ext cx="640080" cy="320040"/>
-          </a:xfrm>
-          <a:prstGeom prst="rect">
-            <a:avLst/>
-          </a:prstGeom>
-          <a:noFill/>
-        </p:spPr>
-        <p:txBody>
-          <a:bodyPr wrap="square" anchor="t">
-            <a:spAutoFit/>
-          </a:bodyPr>
-          <a:lstStyle/>
-          <a:p>
-            <a:pPr algn="r">
-              <a:lnSpc>
-                <a:spcPct val="100000"/>
-              </a:lnSpc>
-            </a:pPr>
-            <a:r>
-              <a:rPr sz="1100" b="0" i="0">
-                <a:solidFill>
-                  <a:srgbClr val="B0B8C2"/>
-                </a:solidFill>
-                <a:latin typeface="Calibri"/>
-              </a:rPr>
-              <a:t>17</a:t>
-            </a:r>
-          </a:p>
-        </p:txBody>
-      </p:sp>
-      <p:sp>
-        <p:nvSpPr>
-          <p:cNvPr id="7" name="TextBox 6"/>
-          <p:cNvSpPr txBox="1"/>
-          <p:nvPr/>
-        </p:nvSpPr>
-        <p:spPr>
-          <a:xfrm>
-            <a:off x="548640" y="1463040"/>
-            <a:ext cx="10789920" cy="4572000"/>
-          </a:xfrm>
-          <a:prstGeom prst="rect">
-            <a:avLst/>
-          </a:prstGeom>
-          <a:noFill/>
-        </p:spPr>
-        <p:txBody>
-          <a:bodyPr wrap="square">
-            <a:spAutoFit/>
-          </a:bodyPr>
-          <a:lstStyle/>
-          <a:p>
-            <a:pPr>
-              <a:lnSpc>
-                <a:spcPct val="112000"/>
-              </a:lnSpc>
-              <a:spcAft>
-                <a:spcPts val="800"/>
-              </a:spcAft>
-            </a:pPr>
-            <a:r>
-              <a:rPr sz="1800">
-                <a:solidFill>
-                  <a:srgbClr val="FFFFFF"/>
-                </a:solidFill>
-                <a:latin typeface="Calibri"/>
-              </a:rPr>
-              <a:t>•  Configurar secrets DOCKERHUB_USERNAME / DOCKERHUB_TOKEN no GitHub para o build-and-push publicar de fato</a:t>
-            </a:r>
-          </a:p>
-          <a:p>
-            <a:pPr>
-              <a:lnSpc>
-                <a:spcPct val="112000"/>
-              </a:lnSpc>
-              <a:spcAft>
-                <a:spcPts val="800"/>
-              </a:spcAft>
-            </a:pPr>
-            <a:r>
-              <a:rPr sz="1800">
-                <a:solidFill>
-                  <a:srgbClr val="FFFFFF"/>
-                </a:solidFill>
-                <a:latin typeface="Calibri"/>
-              </a:rPr>
-              <a:t>•  Decidir o destino de pose-service/ai/dataset_generator.py (imports não usados de thresholds de LUNGE/ROW — início de uma extensão da IA desconectada)</a:t>
-            </a:r>
-          </a:p>
-          <a:p>
-            <a:pPr>
-              <a:lnSpc>
-                <a:spcPct val="112000"/>
-              </a:lnSpc>
-              <a:spcAft>
-                <a:spcPts val="800"/>
-              </a:spcAft>
-            </a:pPr>
-            <a:r>
-              <a:rPr sz="1800">
-                <a:solidFill>
-                  <a:srgbClr val="FFFFFF"/>
-                </a:solidFill>
-                <a:latin typeface="Calibri"/>
-              </a:rPr>
-              <a:t>•  Configurar secrets STAGING_HOST/USER/SSH_KEY para habilitar o deploy automático em staging</a:t>
-            </a:r>
-          </a:p>
-          <a:p>
-            <a:pPr>
-              <a:lnSpc>
-                <a:spcPct val="112000"/>
-              </a:lnSpc>
-              <a:spcAft>
-                <a:spcPts val="800"/>
-              </a:spcAft>
-            </a:pPr>
-            <a:r>
-              <a:rPr sz="1800">
-                <a:solidFill>
-                  <a:srgbClr val="FFFFFF"/>
-                </a:solidFill>
-                <a:latin typeface="Calibri"/>
-              </a:rPr>
-              <a:t>•  Iniciar Sprint 2 (produto/experiência) e Sprint 3 (plataforma/escala)</a:t>
-            </a:r>
-          </a:p>
-          <a:p>
-            <a:pPr>
-              <a:lnSpc>
-                <a:spcPct val="112000"/>
-              </a:lnSpc>
-              <a:spcAft>
-                <a:spcPts val="800"/>
-              </a:spcAft>
-            </a:pPr>
-            <a:r>
-              <a:rPr sz="1800">
-                <a:solidFill>
-                  <a:srgbClr val="FFFFFF"/>
-                </a:solidFill>
-                <a:latin typeface="Calibri"/>
-              </a:rPr>
-              <a:t>•  Avaliar retomar o motor de IA no futuro, mas treinado com dados reais anotados (não sintéticos)</a:t>
-            </a:r>
-          </a:p>
-        </p:txBody>
-      </p:sp>
-    </p:spTree>
-  </p:cSld>
-  <p:clrMapOvr>
-    <a:masterClrMapping/>
-  </p:clrMapOvr>
-</p:sld>
-</file>
-
-<file path=ppt/slides/slide18.xml><?xml version="1.0" encoding="utf-8"?>
 <p:sld xmlns:a="http://schemas.openxmlformats.org/drawingml/2006/main" xmlns:p="http://schemas.openxmlformats.org/presentationml/2006/main" xmlns:r="http://schemas.openxmlformats.org/officeDocument/2006/relationships">
   <p:cSld>
     <p:bg>
@@ -7692,7 +6412,7 @@
                 </a:solidFill>
                 <a:latin typeface="Calibri"/>
               </a:rPr>
-              <a:t>GymVision — do Sprint 0 ao CI/CD</a:t>
+              <a:t>GymVision — do app monolítico ao CI/CD</a:t>
             </a:r>
           </a:p>
         </p:txBody>
@@ -7731,7 +6451,7 @@
                 </a:solidFill>
                 <a:latin typeface="Calibri"/>
               </a:rPr>
-              <a:t>18</a:t>
+              <a:t>16</a:t>
             </a:r>
           </a:p>
         </p:txBody>
@@ -8292,7 +7012,7 @@
                 </a:solidFill>
                 <a:latin typeface="Calibri"/>
               </a:rPr>
-              <a:t>Microsserviços</a:t>
+              <a:t>Microsserviços (estado atual)</a:t>
             </a:r>
           </a:p>
         </p:txBody>
@@ -9064,7 +7784,7 @@
                 </a:solidFill>
                 <a:latin typeface="Calibri"/>
               </a:rPr>
-              <a:t>Organização por Sprints</a:t>
+              <a:t>Sprints — evolução real do código</a:t>
             </a:r>
           </a:p>
         </p:txBody>
@@ -9116,8 +7836,8 @@
         </p:nvSpPr>
         <p:spPr>
           <a:xfrm>
-            <a:off x="548640" y="1481328"/>
-            <a:ext cx="2377440" cy="365760"/>
+            <a:off x="548640" y="1527048"/>
+            <a:ext cx="1554480" cy="365760"/>
           </a:xfrm>
           <a:prstGeom prst="rect">
             <a:avLst/>
@@ -9155,14 +7875,14 @@
         </p:nvSpPr>
         <p:spPr>
           <a:xfrm>
-            <a:off x="3108960" y="1417320"/>
-            <a:ext cx="6400800" cy="502920"/>
+            <a:off x="2286000" y="1463040"/>
+            <a:ext cx="7589520" cy="548640"/>
           </a:xfrm>
           <a:prstGeom prst="roundRect">
             <a:avLst/>
           </a:prstGeom>
           <a:solidFill>
-            <a:srgbClr val="22C55E"/>
+            <a:srgbClr val="008F73"/>
           </a:solidFill>
           <a:ln w="19050">
             <a:solidFill>
@@ -9186,68 +7906,37 @@
           </a:fontRef>
         </p:style>
         <p:txBody>
-          <a:bodyPr rtlCol="0" anchor="ctr"/>
-          <a:lstStyle/>
-          <a:p>
-            <a:pPr algn="ctr"/>
-          </a:p>
-        </p:txBody>
-      </p:sp>
-      <p:sp>
-        <p:nvSpPr>
-          <p:cNvPr id="9" name="TextBox 8"/>
-          <p:cNvSpPr txBox="1"/>
-          <p:nvPr/>
-        </p:nvSpPr>
-        <p:spPr>
-          <a:xfrm>
-            <a:off x="3246120" y="1481328"/>
-            <a:ext cx="6126480" cy="365760"/>
-          </a:xfrm>
-          <a:prstGeom prst="rect">
-            <a:avLst/>
-          </a:prstGeom>
-          <a:noFill/>
-        </p:spPr>
-        <p:txBody>
-          <a:bodyPr wrap="square" anchor="t">
-            <a:spAutoFit/>
-          </a:bodyPr>
-          <a:lstStyle/>
-          <a:p>
-            <a:pPr algn="l">
-              <a:lnSpc>
-                <a:spcPct val="100000"/>
-              </a:lnSpc>
-            </a:pPr>
-            <a:r>
-              <a:rPr sz="1250" b="0" i="0">
+          <a:bodyPr rtlCol="0" anchor="ctr" lIns="177800"/>
+          <a:lstStyle/>
+          <a:p>
+            <a:pPr algn="l"/>
+            <a:r>
+              <a:rPr sz="1400">
                 <a:solidFill>
                   <a:srgbClr val="FFFFFF"/>
                 </a:solidFill>
-                <a:latin typeface="Calibri"/>
-              </a:rPr>
-              <a:t>MVP — fundação do produto (23 itens)</a:t>
-            </a:r>
-          </a:p>
-        </p:txBody>
-      </p:sp>
-      <p:sp>
-        <p:nvSpPr>
-          <p:cNvPr id="10" name="Rounded Rectangle 9"/>
+              </a:rPr>
+              <a:t>App Android monolítico + backend inicial</a:t>
+            </a:r>
+          </a:p>
+        </p:txBody>
+      </p:sp>
+      <p:sp>
+        <p:nvSpPr>
+          <p:cNvPr id="9" name="Rounded Rectangle 8"/>
           <p:cNvSpPr/>
           <p:nvPr/>
         </p:nvSpPr>
         <p:spPr>
           <a:xfrm>
-            <a:off x="9738360" y="1481328"/>
-            <a:ext cx="1554480" cy="365760"/>
+            <a:off x="10149840" y="1554480"/>
+            <a:ext cx="1463040" cy="365760"/>
           </a:xfrm>
           <a:prstGeom prst="roundRect">
             <a:avLst/>
           </a:prstGeom>
           <a:solidFill>
-            <a:srgbClr val="22C55E"/>
+            <a:srgbClr val="4A525E"/>
           </a:solidFill>
           <a:ln>
             <a:noFill/>
@@ -9279,21 +7968,21 @@
                   <a:srgbClr val="FFFFFF"/>
                 </a:solidFill>
               </a:rPr>
-              <a:t>CONCLUÍDO</a:t>
-            </a:r>
-          </a:p>
-        </p:txBody>
-      </p:sp>
-      <p:sp>
-        <p:nvSpPr>
-          <p:cNvPr id="11" name="TextBox 10"/>
+              <a:t>15/05</a:t>
+            </a:r>
+          </a:p>
+        </p:txBody>
+      </p:sp>
+      <p:sp>
+        <p:nvSpPr>
+          <p:cNvPr id="10" name="TextBox 9"/>
           <p:cNvSpPr txBox="1"/>
           <p:nvPr/>
         </p:nvSpPr>
         <p:spPr>
           <a:xfrm>
-            <a:off x="548640" y="2350008"/>
-            <a:ext cx="2377440" cy="365760"/>
+            <a:off x="548640" y="2441448"/>
+            <a:ext cx="1554480" cy="365760"/>
           </a:xfrm>
           <a:prstGeom prst="rect">
             <a:avLst/>
@@ -9325,20 +8014,20 @@
       </p:sp>
       <p:sp>
         <p:nvSpPr>
-          <p:cNvPr id="12" name="Rounded Rectangle 11"/>
+          <p:cNvPr id="11" name="Rounded Rectangle 10"/>
           <p:cNvSpPr/>
           <p:nvPr/>
         </p:nvSpPr>
         <p:spPr>
           <a:xfrm>
-            <a:off x="3108960" y="2286000"/>
-            <a:ext cx="6400800" cy="502920"/>
+            <a:off x="2286000" y="2377440"/>
+            <a:ext cx="7589520" cy="548640"/>
           </a:xfrm>
           <a:prstGeom prst="roundRect">
             <a:avLst/>
           </a:prstGeom>
           <a:solidFill>
-            <a:srgbClr val="22C55E"/>
+            <a:srgbClr val="008F73"/>
           </a:solidFill>
           <a:ln w="19050">
             <a:solidFill>
@@ -9362,68 +8051,37 @@
           </a:fontRef>
         </p:style>
         <p:txBody>
-          <a:bodyPr rtlCol="0" anchor="ctr"/>
-          <a:lstStyle/>
-          <a:p>
-            <a:pPr algn="ctr"/>
-          </a:p>
-        </p:txBody>
-      </p:sp>
-      <p:sp>
-        <p:nvSpPr>
-          <p:cNvPr id="13" name="TextBox 12"/>
-          <p:cNvSpPr txBox="1"/>
-          <p:nvPr/>
-        </p:nvSpPr>
-        <p:spPr>
-          <a:xfrm>
-            <a:off x="3246120" y="2350008"/>
-            <a:ext cx="6126480" cy="365760"/>
-          </a:xfrm>
-          <a:prstGeom prst="rect">
-            <a:avLst/>
-          </a:prstGeom>
-          <a:noFill/>
-        </p:spPr>
-        <p:txBody>
-          <a:bodyPr wrap="square" anchor="t">
-            <a:spAutoFit/>
-          </a:bodyPr>
-          <a:lstStyle/>
-          <a:p>
-            <a:pPr algn="l">
-              <a:lnSpc>
-                <a:spcPct val="100000"/>
-              </a:lnSpc>
-            </a:pPr>
-            <a:r>
-              <a:rPr sz="1250" b="0" i="0">
+          <a:bodyPr rtlCol="0" anchor="ctr" lIns="177800"/>
+          <a:lstStyle/>
+          <a:p>
+            <a:pPr algn="l"/>
+            <a:r>
+              <a:rPr sz="1400">
                 <a:solidFill>
                   <a:srgbClr val="FFFFFF"/>
                 </a:solidFill>
-                <a:latin typeface="Calibri"/>
-              </a:rPr>
-              <a:t>Fundação e Segurança + experimento de IA</a:t>
-            </a:r>
-          </a:p>
-        </p:txBody>
-      </p:sp>
-      <p:sp>
-        <p:nvSpPr>
-          <p:cNvPr id="14" name="Rounded Rectangle 13"/>
+              </a:rPr>
+              <a:t>Correções de detecção real (só backend)</a:t>
+            </a:r>
+          </a:p>
+        </p:txBody>
+      </p:sp>
+      <p:sp>
+        <p:nvSpPr>
+          <p:cNvPr id="12" name="Rounded Rectangle 11"/>
           <p:cNvSpPr/>
           <p:nvPr/>
         </p:nvSpPr>
         <p:spPr>
           <a:xfrm>
-            <a:off x="9738360" y="2350008"/>
-            <a:ext cx="1554480" cy="365760"/>
+            <a:off x="10149840" y="2468880"/>
+            <a:ext cx="1463040" cy="365760"/>
           </a:xfrm>
           <a:prstGeom prst="roundRect">
             <a:avLst/>
           </a:prstGeom>
           <a:solidFill>
-            <a:srgbClr val="22C55E"/>
+            <a:srgbClr val="4A525E"/>
           </a:solidFill>
           <a:ln>
             <a:noFill/>
@@ -9455,21 +8113,21 @@
                   <a:srgbClr val="FFFFFF"/>
                 </a:solidFill>
               </a:rPr>
-              <a:t>CONCLUÍDO</a:t>
-            </a:r>
-          </a:p>
-        </p:txBody>
-      </p:sp>
-      <p:sp>
-        <p:nvSpPr>
-          <p:cNvPr id="15" name="TextBox 14"/>
+              <a:t>19/05</a:t>
+            </a:r>
+          </a:p>
+        </p:txBody>
+      </p:sp>
+      <p:sp>
+        <p:nvSpPr>
+          <p:cNvPr id="13" name="TextBox 12"/>
           <p:cNvSpPr txBox="1"/>
           <p:nvPr/>
         </p:nvSpPr>
         <p:spPr>
           <a:xfrm>
-            <a:off x="548640" y="3218688"/>
-            <a:ext cx="2377440" cy="365760"/>
+            <a:off x="548640" y="3355848"/>
+            <a:ext cx="1554480" cy="365760"/>
           </a:xfrm>
           <a:prstGeom prst="rect">
             <a:avLst/>
@@ -9494,27 +8152,27 @@
                 </a:solidFill>
                 <a:latin typeface="Calibri"/>
               </a:rPr>
-              <a:t>Sprint 1 (hardening)</a:t>
-            </a:r>
-          </a:p>
-        </p:txBody>
-      </p:sp>
-      <p:sp>
-        <p:nvSpPr>
-          <p:cNvPr id="16" name="Rounded Rectangle 15"/>
+              <a:t>Sprint 2</a:t>
+            </a:r>
+          </a:p>
+        </p:txBody>
+      </p:sp>
+      <p:sp>
+        <p:nvSpPr>
+          <p:cNvPr id="14" name="Rounded Rectangle 13"/>
           <p:cNvSpPr/>
           <p:nvPr/>
         </p:nvSpPr>
         <p:spPr>
           <a:xfrm>
-            <a:off x="3108960" y="3154680"/>
-            <a:ext cx="6400800" cy="502920"/>
+            <a:off x="2286000" y="3291840"/>
+            <a:ext cx="7589520" cy="548640"/>
           </a:xfrm>
           <a:prstGeom prst="roundRect">
             <a:avLst/>
           </a:prstGeom>
           <a:solidFill>
-            <a:srgbClr val="22C55E"/>
+            <a:srgbClr val="008F73"/>
           </a:solidFill>
           <a:ln w="19050">
             <a:solidFill>
@@ -9538,236 +8196,31 @@
           </a:fontRef>
         </p:style>
         <p:txBody>
-          <a:bodyPr rtlCol="0" anchor="ctr"/>
-          <a:lstStyle/>
-          <a:p>
-            <a:pPr algn="ctr"/>
-          </a:p>
-        </p:txBody>
-      </p:sp>
-      <p:sp>
-        <p:nvSpPr>
-          <p:cNvPr id="17" name="TextBox 16"/>
-          <p:cNvSpPr txBox="1"/>
-          <p:nvPr/>
-        </p:nvSpPr>
-        <p:spPr>
-          <a:xfrm>
-            <a:off x="3246120" y="3218688"/>
-            <a:ext cx="6126480" cy="365760"/>
-          </a:xfrm>
-          <a:prstGeom prst="rect">
-            <a:avLst/>
-          </a:prstGeom>
-          <a:noFill/>
-        </p:spPr>
-        <p:txBody>
-          <a:bodyPr wrap="square" anchor="t">
-            <a:spAutoFit/>
-          </a:bodyPr>
-          <a:lstStyle/>
-          <a:p>
-            <a:pPr algn="l">
-              <a:lnSpc>
-                <a:spcPct val="100000"/>
-              </a:lnSpc>
-            </a:pPr>
-            <a:r>
-              <a:rPr sz="1250" b="0" i="0">
+          <a:bodyPr rtlCol="0" anchor="ctr" lIns="177800"/>
+          <a:lstStyle/>
+          <a:p>
+            <a:pPr algn="l"/>
+            <a:r>
+              <a:rPr sz="1400">
                 <a:solidFill>
                   <a:srgbClr val="FFFFFF"/>
                 </a:solidFill>
-                <a:latin typeface="Calibri"/>
-              </a:rPr>
-              <a:t>Reversão da IA, correções reais, CI/CD + Docker Hub</a:t>
-            </a:r>
-          </a:p>
-        </p:txBody>
-      </p:sp>
-      <p:sp>
-        <p:nvSpPr>
-          <p:cNvPr id="18" name="Rounded Rectangle 17"/>
+              </a:rPr>
+              <a:t>Refatoração total: Android → Jetpack Compose</a:t>
+            </a:r>
+          </a:p>
+        </p:txBody>
+      </p:sp>
+      <p:sp>
+        <p:nvSpPr>
+          <p:cNvPr id="15" name="Rounded Rectangle 14"/>
           <p:cNvSpPr/>
           <p:nvPr/>
         </p:nvSpPr>
         <p:spPr>
           <a:xfrm>
-            <a:off x="9738360" y="3218688"/>
-            <a:ext cx="1554480" cy="365760"/>
-          </a:xfrm>
-          <a:prstGeom prst="roundRect">
-            <a:avLst/>
-          </a:prstGeom>
-          <a:solidFill>
-            <a:srgbClr val="22C55E"/>
-          </a:solidFill>
-          <a:ln>
-            <a:noFill/>
-          </a:ln>
-          <a:effectLst/>
-        </p:spPr>
-        <p:style>
-          <a:lnRef idx="1">
-            <a:schemeClr val="accent1"/>
-          </a:lnRef>
-          <a:fillRef idx="3">
-            <a:schemeClr val="accent1"/>
-          </a:fillRef>
-          <a:effectRef idx="2">
-            <a:schemeClr val="accent1"/>
-          </a:effectRef>
-          <a:fontRef idx="minor">
-            <a:schemeClr val="lt1"/>
-          </a:fontRef>
-        </p:style>
-        <p:txBody>
-          <a:bodyPr rtlCol="0" anchor="ctr"/>
-          <a:lstStyle/>
-          <a:p>
-            <a:pPr algn="ctr"/>
-            <a:r>
-              <a:rPr sz="1200" b="1">
-                <a:solidFill>
-                  <a:srgbClr val="FFFFFF"/>
-                </a:solidFill>
-              </a:rPr>
-              <a:t>CONCLUÍDO</a:t>
-            </a:r>
-          </a:p>
-        </p:txBody>
-      </p:sp>
-      <p:sp>
-        <p:nvSpPr>
-          <p:cNvPr id="19" name="TextBox 18"/>
-          <p:cNvSpPr txBox="1"/>
-          <p:nvPr/>
-        </p:nvSpPr>
-        <p:spPr>
-          <a:xfrm>
-            <a:off x="548640" y="4087368"/>
-            <a:ext cx="2377440" cy="365760"/>
-          </a:xfrm>
-          <a:prstGeom prst="rect">
-            <a:avLst/>
-          </a:prstGeom>
-          <a:noFill/>
-        </p:spPr>
-        <p:txBody>
-          <a:bodyPr wrap="square" anchor="t">
-            <a:spAutoFit/>
-          </a:bodyPr>
-          <a:lstStyle/>
-          <a:p>
-            <a:pPr algn="l">
-              <a:lnSpc>
-                <a:spcPct val="100000"/>
-              </a:lnSpc>
-            </a:pPr>
-            <a:r>
-              <a:rPr sz="1600" b="1" i="0">
-                <a:solidFill>
-                  <a:srgbClr val="FFFFFF"/>
-                </a:solidFill>
-                <a:latin typeface="Calibri"/>
-              </a:rPr>
-              <a:t>Sprint 2</a:t>
-            </a:r>
-          </a:p>
-        </p:txBody>
-      </p:sp>
-      <p:sp>
-        <p:nvSpPr>
-          <p:cNvPr id="20" name="Rounded Rectangle 19"/>
-          <p:cNvSpPr/>
-          <p:nvPr/>
-        </p:nvSpPr>
-        <p:spPr>
-          <a:xfrm>
-            <a:off x="3108960" y="4023360"/>
-            <a:ext cx="3520440" cy="502920"/>
-          </a:xfrm>
-          <a:prstGeom prst="roundRect">
-            <a:avLst/>
-          </a:prstGeom>
-          <a:noFill/>
-          <a:ln w="19050">
-            <a:solidFill>
-              <a:srgbClr val="4A525E"/>
-            </a:solidFill>
-          </a:ln>
-          <a:effectLst/>
-        </p:spPr>
-        <p:style>
-          <a:lnRef idx="1">
-            <a:schemeClr val="accent1"/>
-          </a:lnRef>
-          <a:fillRef idx="3">
-            <a:schemeClr val="accent1"/>
-          </a:fillRef>
-          <a:effectRef idx="2">
-            <a:schemeClr val="accent1"/>
-          </a:effectRef>
-          <a:fontRef idx="minor">
-            <a:schemeClr val="lt1"/>
-          </a:fontRef>
-        </p:style>
-        <p:txBody>
-          <a:bodyPr rtlCol="0" anchor="ctr"/>
-          <a:lstStyle/>
-          <a:p>
-            <a:pPr algn="ctr"/>
-          </a:p>
-        </p:txBody>
-      </p:sp>
-      <p:sp>
-        <p:nvSpPr>
-          <p:cNvPr id="21" name="TextBox 20"/>
-          <p:cNvSpPr txBox="1"/>
-          <p:nvPr/>
-        </p:nvSpPr>
-        <p:spPr>
-          <a:xfrm>
-            <a:off x="3246120" y="4087368"/>
-            <a:ext cx="3246120" cy="365760"/>
-          </a:xfrm>
-          <a:prstGeom prst="rect">
-            <a:avLst/>
-          </a:prstGeom>
-          <a:noFill/>
-        </p:spPr>
-        <p:txBody>
-          <a:bodyPr wrap="square" anchor="t">
-            <a:spAutoFit/>
-          </a:bodyPr>
-          <a:lstStyle/>
-          <a:p>
-            <a:pPr algn="l">
-              <a:lnSpc>
-                <a:spcPct val="100000"/>
-              </a:lnSpc>
-            </a:pPr>
-            <a:r>
-              <a:rPr sz="1250" b="0" i="0">
-                <a:solidFill>
-                  <a:srgbClr val="B0B8C2"/>
-                </a:solidFill>
-                <a:latin typeface="Calibri"/>
-              </a:rPr>
-              <a:t>Produto e Experiência (relatórios, auto-detecção, FCM)</a:t>
-            </a:r>
-          </a:p>
-        </p:txBody>
-      </p:sp>
-      <p:sp>
-        <p:nvSpPr>
-          <p:cNvPr id="22" name="Rounded Rectangle 21"/>
-          <p:cNvSpPr/>
-          <p:nvPr/>
-        </p:nvSpPr>
-        <p:spPr>
-          <a:xfrm>
-            <a:off x="6858000" y="4087368"/>
-            <a:ext cx="1554480" cy="365760"/>
+            <a:off x="10149840" y="3383280"/>
+            <a:ext cx="1463040" cy="365760"/>
           </a:xfrm>
           <a:prstGeom prst="roundRect">
             <a:avLst/>
@@ -9805,21 +8258,21 @@
                   <a:srgbClr val="FFFFFF"/>
                 </a:solidFill>
               </a:rPr>
-              <a:t>PLANEJADO</a:t>
-            </a:r>
-          </a:p>
-        </p:txBody>
-      </p:sp>
-      <p:sp>
-        <p:nvSpPr>
-          <p:cNvPr id="23" name="TextBox 22"/>
+              <a:t>09/06</a:t>
+            </a:r>
+          </a:p>
+        </p:txBody>
+      </p:sp>
+      <p:sp>
+        <p:nvSpPr>
+          <p:cNvPr id="16" name="TextBox 15"/>
           <p:cNvSpPr txBox="1"/>
           <p:nvPr/>
         </p:nvSpPr>
         <p:spPr>
           <a:xfrm>
-            <a:off x="548640" y="4956048"/>
-            <a:ext cx="2377440" cy="365760"/>
+            <a:off x="548640" y="4270248"/>
+            <a:ext cx="1554480" cy="365760"/>
           </a:xfrm>
           <a:prstGeom prst="rect">
             <a:avLst/>
@@ -9851,20 +8304,20 @@
       </p:sp>
       <p:sp>
         <p:nvSpPr>
-          <p:cNvPr id="24" name="Rounded Rectangle 23"/>
+          <p:cNvPr id="17" name="Rounded Rectangle 16"/>
           <p:cNvSpPr/>
           <p:nvPr/>
         </p:nvSpPr>
         <p:spPr>
           <a:xfrm>
-            <a:off x="3108960" y="4892040"/>
-            <a:ext cx="4480559" cy="502920"/>
+            <a:off x="2286000" y="4206240"/>
+            <a:ext cx="7589520" cy="548640"/>
           </a:xfrm>
           <a:prstGeom prst="roundRect">
             <a:avLst/>
           </a:prstGeom>
           <a:solidFill>
-            <a:srgbClr val="F59E0B"/>
+            <a:srgbClr val="008F73"/>
           </a:solidFill>
           <a:ln w="19050">
             <a:solidFill>
@@ -9888,68 +8341,37 @@
           </a:fontRef>
         </p:style>
         <p:txBody>
-          <a:bodyPr rtlCol="0" anchor="ctr"/>
-          <a:lstStyle/>
-          <a:p>
-            <a:pPr algn="ctr"/>
-          </a:p>
-        </p:txBody>
-      </p:sp>
-      <p:sp>
-        <p:nvSpPr>
-          <p:cNvPr id="25" name="TextBox 24"/>
-          <p:cNvSpPr txBox="1"/>
-          <p:nvPr/>
-        </p:nvSpPr>
-        <p:spPr>
-          <a:xfrm>
-            <a:off x="3246120" y="4956048"/>
-            <a:ext cx="4206239" cy="365760"/>
-          </a:xfrm>
-          <a:prstGeom prst="rect">
-            <a:avLst/>
-          </a:prstGeom>
-          <a:noFill/>
-        </p:spPr>
-        <p:txBody>
-          <a:bodyPr wrap="square" anchor="t">
-            <a:spAutoFit/>
-          </a:bodyPr>
-          <a:lstStyle/>
-          <a:p>
-            <a:pPr algn="l">
-              <a:lnSpc>
-                <a:spcPct val="100000"/>
-              </a:lnSpc>
-            </a:pPr>
-            <a:r>
-              <a:rPr sz="1250" b="0" i="0">
+          <a:bodyPr rtlCol="0" anchor="ctr" lIns="177800"/>
+          <a:lstStyle/>
+          <a:p>
+            <a:pPr algn="l"/>
+            <a:r>
+              <a:rPr sz="1400">
                 <a:solidFill>
                   <a:srgbClr val="FFFFFF"/>
                 </a:solidFill>
-                <a:latin typeface="Calibri"/>
-              </a:rPr>
-              <a:t>Plataforma e Escala (Grafana, PWA, modelo de IA próprio)</a:t>
-            </a:r>
-          </a:p>
-        </p:txBody>
-      </p:sp>
-      <p:sp>
-        <p:nvSpPr>
-          <p:cNvPr id="26" name="Rounded Rectangle 25"/>
+              </a:rPr>
+              <a:t>Expansão de produto, segurança e IA experimental</a:t>
+            </a:r>
+          </a:p>
+        </p:txBody>
+      </p:sp>
+      <p:sp>
+        <p:nvSpPr>
+          <p:cNvPr id="18" name="Rounded Rectangle 17"/>
           <p:cNvSpPr/>
           <p:nvPr/>
         </p:nvSpPr>
         <p:spPr>
           <a:xfrm>
-            <a:off x="7818119" y="4956048"/>
-            <a:ext cx="1554480" cy="365760"/>
+            <a:off x="10149840" y="4297680"/>
+            <a:ext cx="1463040" cy="365760"/>
           </a:xfrm>
           <a:prstGeom prst="roundRect">
             <a:avLst/>
           </a:prstGeom>
           <a:solidFill>
-            <a:srgbClr val="F59E0B"/>
+            <a:srgbClr val="4A525E"/>
           </a:solidFill>
           <a:ln>
             <a:noFill/>
@@ -9981,21 +8403,21 @@
                   <a:srgbClr val="FFFFFF"/>
                 </a:solidFill>
               </a:rPr>
-              <a:t>PARCIAL</a:t>
-            </a:r>
-          </a:p>
-        </p:txBody>
-      </p:sp>
-      <p:sp>
-        <p:nvSpPr>
-          <p:cNvPr id="27" name="TextBox 26"/>
+              <a:t>18/06</a:t>
+            </a:r>
+          </a:p>
+        </p:txBody>
+      </p:sp>
+      <p:sp>
+        <p:nvSpPr>
+          <p:cNvPr id="19" name="TextBox 18"/>
           <p:cNvSpPr txBox="1"/>
           <p:nvPr/>
         </p:nvSpPr>
         <p:spPr>
           <a:xfrm>
-            <a:off x="548640" y="5897880"/>
-            <a:ext cx="10789920" cy="457200"/>
+            <a:off x="548640" y="5184648"/>
+            <a:ext cx="1554480" cy="365760"/>
           </a:xfrm>
           <a:prstGeom prst="rect">
             <a:avLst/>
@@ -10014,13 +8436,158 @@
               </a:lnSpc>
             </a:pPr>
             <a:r>
+              <a:rPr sz="1600" b="1" i="0">
+                <a:solidFill>
+                  <a:srgbClr val="FFFFFF"/>
+                </a:solidFill>
+                <a:latin typeface="Calibri"/>
+              </a:rPr>
+              <a:t>Sprint 4</a:t>
+            </a:r>
+          </a:p>
+        </p:txBody>
+      </p:sp>
+      <p:sp>
+        <p:nvSpPr>
+          <p:cNvPr id="20" name="Rounded Rectangle 19"/>
+          <p:cNvSpPr/>
+          <p:nvPr/>
+        </p:nvSpPr>
+        <p:spPr>
+          <a:xfrm>
+            <a:off x="2286000" y="5120640"/>
+            <a:ext cx="7589520" cy="548640"/>
+          </a:xfrm>
+          <a:prstGeom prst="roundRect">
+            <a:avLst/>
+          </a:prstGeom>
+          <a:solidFill>
+            <a:srgbClr val="008F73"/>
+          </a:solidFill>
+          <a:ln w="19050">
+            <a:solidFill>
+              <a:srgbClr val="00D4AA"/>
+            </a:solidFill>
+          </a:ln>
+          <a:effectLst/>
+        </p:spPr>
+        <p:style>
+          <a:lnRef idx="1">
+            <a:schemeClr val="accent1"/>
+          </a:lnRef>
+          <a:fillRef idx="3">
+            <a:schemeClr val="accent1"/>
+          </a:fillRef>
+          <a:effectRef idx="2">
+            <a:schemeClr val="accent1"/>
+          </a:effectRef>
+          <a:fontRef idx="minor">
+            <a:schemeClr val="lt1"/>
+          </a:fontRef>
+        </p:style>
+        <p:txBody>
+          <a:bodyPr rtlCol="0" anchor="ctr" lIns="177800"/>
+          <a:lstStyle/>
+          <a:p>
+            <a:pPr algn="l"/>
+            <a:r>
+              <a:rPr sz="1400">
+                <a:solidFill>
+                  <a:srgbClr val="FFFFFF"/>
+                </a:solidFill>
+              </a:rPr>
+              <a:t>Hardening: reversão da IA, bugs reais, CI/CD + Docker Hub</a:t>
+            </a:r>
+          </a:p>
+        </p:txBody>
+      </p:sp>
+      <p:sp>
+        <p:nvSpPr>
+          <p:cNvPr id="21" name="Rounded Rectangle 20"/>
+          <p:cNvSpPr/>
+          <p:nvPr/>
+        </p:nvSpPr>
+        <p:spPr>
+          <a:xfrm>
+            <a:off x="10149840" y="5212080"/>
+            <a:ext cx="1463040" cy="365760"/>
+          </a:xfrm>
+          <a:prstGeom prst="roundRect">
+            <a:avLst/>
+          </a:prstGeom>
+          <a:solidFill>
+            <a:srgbClr val="4A525E"/>
+          </a:solidFill>
+          <a:ln>
+            <a:noFill/>
+          </a:ln>
+          <a:effectLst/>
+        </p:spPr>
+        <p:style>
+          <a:lnRef idx="1">
+            <a:schemeClr val="accent1"/>
+          </a:lnRef>
+          <a:fillRef idx="3">
+            <a:schemeClr val="accent1"/>
+          </a:fillRef>
+          <a:effectRef idx="2">
+            <a:schemeClr val="accent1"/>
+          </a:effectRef>
+          <a:fontRef idx="minor">
+            <a:schemeClr val="lt1"/>
+          </a:fontRef>
+        </p:style>
+        <p:txBody>
+          <a:bodyPr rtlCol="0" anchor="ctr"/>
+          <a:lstStyle/>
+          <a:p>
+            <a:pPr algn="ctr"/>
+            <a:r>
+              <a:rPr sz="1200" b="1">
+                <a:solidFill>
+                  <a:srgbClr val="FFFFFF"/>
+                </a:solidFill>
+              </a:rPr>
+              <a:t>23/06</a:t>
+            </a:r>
+          </a:p>
+        </p:txBody>
+      </p:sp>
+      <p:sp>
+        <p:nvSpPr>
+          <p:cNvPr id="22" name="TextBox 21"/>
+          <p:cNvSpPr txBox="1"/>
+          <p:nvPr/>
+        </p:nvSpPr>
+        <p:spPr>
+          <a:xfrm>
+            <a:off x="548640" y="6126480"/>
+            <a:ext cx="10789920" cy="457200"/>
+          </a:xfrm>
+          <a:prstGeom prst="rect">
+            <a:avLst/>
+          </a:prstGeom>
+          <a:noFill/>
+        </p:spPr>
+        <p:txBody>
+          <a:bodyPr wrap="square" anchor="t">
+            <a:spAutoFit/>
+          </a:bodyPr>
+          <a:lstStyle/>
+          <a:p>
+            <a:pPr algn="l">
+              <a:lnSpc>
+                <a:spcPct val="100000"/>
+              </a:lnSpc>
+            </a:pPr>
+            <a:r>
               <a:rPr sz="1300" b="0" i="1">
                 <a:solidFill>
                   <a:srgbClr val="B0B8C2"/>
                 </a:solidFill>
                 <a:latin typeface="Calibri"/>
               </a:rPr>
-              <a:t>Sprints 0 e 1 concluídos integralmente. Sprint 2 ainda não iniciado. Sprint 3: o item "modelo de IA próprio" foi antecipado e testado durante o Sprint 1, mas revertido após validação real.</a:t>
+              <a:t>Divisão construída a partir da própria evolução do código (git log + diffs), não de documentos de planejamento.</a:t>
             </a:r>
           </a:p>
         </p:txBody>
@@ -10173,7 +8740,7 @@
                 </a:solidFill>
                 <a:latin typeface="Calibri"/>
               </a:rPr>
-              <a:t>SPRINT 0 · MVP (1/2)</a:t>
+              <a:t>SPRINT 0 · ORIGEM</a:t>
             </a:r>
           </a:p>
         </p:txBody>
@@ -10212,7 +8779,7 @@
                 </a:solidFill>
                 <a:latin typeface="Calibri"/>
               </a:rPr>
-              <a:t>A base do produto — fundação técnica e UX</a:t>
+              <a:t>O app Android monolítico original</a:t>
             </a:r>
           </a:p>
         </p:txBody>
@@ -10303,7 +8870,7 @@
                   <a:srgbClr val="FFFFFF"/>
                 </a:solidFill>
               </a:rPr>
-              <a:t>Itens 1–12</a:t>
+              <a:t>15/05</a:t>
             </a:r>
           </a:p>
         </p:txBody>
@@ -10345,7 +8912,7 @@
                 </a:solidFill>
                 <a:latin typeface="Calibri"/>
               </a:rPr>
-              <a:t>•  Infraestrutura básica:</a:t>
+              <a:t>•  Arquitetura clássica de Activities + Fragments + XML:</a:t>
             </a:r>
           </a:p>
           <a:p>
@@ -10364,7 +8931,7 @@
                 </a:solidFill>
                 <a:latin typeface="Calibri"/>
               </a:rPr>
-              <a:t>    ‣  healthcheck do pose-service, logs estruturados em JSON, rate limiting no Kong</a:t>
+              <a:t>    ‣  LoginActivity, SessionListActivity, CameraActivity + CameraFragment</a:t>
             </a:r>
           </a:p>
           <a:p>
@@ -10383,7 +8950,7 @@
                 </a:solidFill>
                 <a:latin typeface="Calibri"/>
               </a:rPr>
-              <a:t>•  Experiência do app Android:</a:t>
+              <a:t>•  3 telas no total, sem grafo de navegação — cada tela é uma Activity isolada</a:t>
             </a:r>
           </a:p>
           <a:p>
@@ -10396,15 +8963,38 @@
               </a:spcAft>
             </a:pPr>
             <a:r>
-              <a:rPr sz="1400">
-                <a:solidFill>
-                  <a:srgbClr val="B0B8C2"/>
-                </a:solidFill>
-                <a:latin typeface="Calibri"/>
-              </a:rPr>
-              <a:t>    ‣  feedback de voz (TextToSpeech PT-BR), contador de repetições em tempo real</a:t>
-            </a:r>
-          </a:p>
+              <a:rPr sz="1600">
+                <a:solidFill>
+                  <a:srgbClr val="FFFFFF"/>
+                </a:solidFill>
+                <a:latin typeface="Calibri"/>
+              </a:rPr>
+              <a:t>•  Sem Jetpack Compose, sem Material 3, sem ViewModel por tela dedicado a estado de UI moderno</a:t>
+            </a:r>
+          </a:p>
+        </p:txBody>
+      </p:sp>
+      <p:sp>
+        <p:nvSpPr>
+          <p:cNvPr id="9" name="TextBox 8"/>
+          <p:cNvSpPr txBox="1"/>
+          <p:nvPr/>
+        </p:nvSpPr>
+        <p:spPr>
+          <a:xfrm>
+            <a:off x="6217920" y="1463040"/>
+            <a:ext cx="5394960" cy="4572000"/>
+          </a:xfrm>
+          <a:prstGeom prst="rect">
+            <a:avLst/>
+          </a:prstGeom>
+          <a:noFill/>
+        </p:spPr>
+        <p:txBody>
+          <a:bodyPr wrap="square">
+            <a:spAutoFit/>
+          </a:bodyPr>
+          <a:lstStyle/>
           <a:p>
             <a:pPr>
               <a:lnSpc>
@@ -10421,7 +9011,7 @@
                 </a:solidFill>
                 <a:latin typeface="Calibri"/>
               </a:rPr>
-              <a:t>•  Dashboard web:</a:t>
+              <a:t>•  Backend já nascia como microsserviços (não monolítico):</a:t>
             </a:r>
           </a:p>
           <a:p>
@@ -10440,32 +9030,9 @@
                 </a:solidFill>
                 <a:latin typeface="Calibri"/>
               </a:rPr>
-              <a:t>    ‣  tela de login com JWT (antes, acesso era livre)</a:t>
-            </a:r>
-          </a:p>
-        </p:txBody>
-      </p:sp>
-      <p:sp>
-        <p:nvSpPr>
-          <p:cNvPr id="9" name="TextBox 8"/>
-          <p:cNvSpPr txBox="1"/>
-          <p:nvPr/>
-        </p:nvSpPr>
-        <p:spPr>
-          <a:xfrm>
-            <a:off x="6217920" y="1463040"/>
-            <a:ext cx="5394960" cy="4572000"/>
-          </a:xfrm>
-          <a:prstGeom prst="rect">
-            <a:avLst/>
-          </a:prstGeom>
-          <a:noFill/>
-        </p:spPr>
-        <p:txBody>
-          <a:bodyPr wrap="square">
-            <a:spAutoFit/>
-          </a:bodyPr>
-          <a:lstStyle/>
+              <a:t>    ‣  pose-service (Python/FastAPI) com motor de regras: Squat, Deadlift, Lunge</a:t>
+            </a:r>
+          </a:p>
           <a:p>
             <a:pPr>
               <a:lnSpc>
@@ -10476,13 +9043,13 @@
               </a:spcAft>
             </a:pPr>
             <a:r>
-              <a:rPr sz="1600">
-                <a:solidFill>
-                  <a:srgbClr val="FFFFFF"/>
-                </a:solidFill>
-                <a:latin typeface="Calibri"/>
-              </a:rPr>
-              <a:t>•  Novos exercícios:</a:t>
+              <a:rPr sz="1400">
+                <a:solidFill>
+                  <a:srgbClr val="B0B8C2"/>
+                </a:solidFill>
+                <a:latin typeface="Calibri"/>
+              </a:rPr>
+              <a:t>    ‣  Detecção de landmarks via MediaPipe</a:t>
             </a:r>
           </a:p>
           <a:p>
@@ -10495,70 +9062,13 @@
               </a:spcAft>
             </a:pPr>
             <a:r>
-              <a:rPr sz="1400">
-                <a:solidFill>
-                  <a:srgbClr val="B0B8C2"/>
-                </a:solidFill>
-                <a:latin typeface="Calibri"/>
-              </a:rPr>
-              <a:t>    ‣  Bench Press (cotovelo aberto, pulso dobrado, arco lombar)</a:t>
-            </a:r>
-          </a:p>
-          <a:p>
-            <a:pPr>
-              <a:lnSpc>
-                <a:spcPct val="112000"/>
-              </a:lnSpc>
-              <a:spcAft>
-                <a:spcPts val="800"/>
-              </a:spcAft>
-            </a:pPr>
-            <a:r>
-              <a:rPr sz="1400">
-                <a:solidFill>
-                  <a:srgbClr val="B0B8C2"/>
-                </a:solidFill>
-                <a:latin typeface="Calibri"/>
-              </a:rPr>
-              <a:t>    ‣  Bent-over Row (coluna arredondada, amplitude insuficiente)</a:t>
-            </a:r>
-          </a:p>
-          <a:p>
-            <a:pPr>
-              <a:lnSpc>
-                <a:spcPct val="112000"/>
-              </a:lnSpc>
-              <a:spcAft>
-                <a:spcPts val="800"/>
-              </a:spcAft>
-            </a:pPr>
-            <a:r>
               <a:rPr sz="1600">
                 <a:solidFill>
                   <a:srgbClr val="FFFFFF"/>
                 </a:solidFill>
                 <a:latin typeface="Calibri"/>
               </a:rPr>
-              <a:t>•  Comunicação e visualização:</a:t>
-            </a:r>
-          </a:p>
-          <a:p>
-            <a:pPr>
-              <a:lnSpc>
-                <a:spcPct val="112000"/>
-              </a:lnSpc>
-              <a:spcAft>
-                <a:spcPts val="800"/>
-              </a:spcAft>
-            </a:pPr>
-            <a:r>
-              <a:rPr sz="1400">
-                <a:solidFill>
-                  <a:srgbClr val="B0B8C2"/>
-                </a:solidFill>
-                <a:latin typeface="Calibri"/>
-              </a:rPr>
-              <a:t>    ‣  relatório pós-treino por e-mail, mapa de calor de erros, comparação entre sessões, Web Push</a:t>
+              <a:t>•  Primeira versão do docker-compose.yml orquestrando os serviços base</a:t>
             </a:r>
           </a:p>
         </p:txBody>
@@ -10711,7 +9221,7 @@
                 </a:solidFill>
                 <a:latin typeface="Calibri"/>
               </a:rPr>
-              <a:t>SPRINT 0 · MVP (2/2)</a:t>
+              <a:t>SPRINT 1 · BACKEND</a:t>
             </a:r>
           </a:p>
         </p:txBody>
@@ -10750,7 +9260,7 @@
                 </a:solidFill>
                 <a:latin typeface="Calibri"/>
               </a:rPr>
-              <a:t>Escala, robustez e funcionalidades avançadas</a:t>
+              <a:t>Correções de detecção real</a:t>
             </a:r>
           </a:p>
         </p:txBody>
@@ -10841,7 +9351,7 @@
                   <a:srgbClr val="FFFFFF"/>
                 </a:solidFill>
               </a:rPr>
-              <a:t>Itens 13–23</a:t>
+              <a:t>19/05</a:t>
             </a:r>
           </a:p>
         </p:txBody>
@@ -10855,7 +9365,7 @@
         <p:spPr>
           <a:xfrm>
             <a:off x="548640" y="1463040"/>
-            <a:ext cx="5394960" cy="4572000"/>
+            <a:ext cx="10789920" cy="4114800"/>
           </a:xfrm>
           <a:prstGeom prst="rect">
             <a:avLst/>
@@ -10877,13 +9387,13 @@
               </a:spcAft>
             </a:pPr>
             <a:r>
-              <a:rPr sz="1600">
+              <a:rPr sz="1800">
                 <a:solidFill>
                   <a:srgbClr val="FFFFFF"/>
                 </a:solidFill>
                 <a:latin typeface="Calibri"/>
               </a:rPr>
-              <a:t>•  Escalabilidade do pose-service:</a:t>
+              <a:t>•  Sprint inteiramente de backend — nenhuma mudança no app Android</a:t>
             </a:r>
           </a:p>
           <a:p>
@@ -10896,13 +9406,13 @@
               </a:spcAft>
             </a:pPr>
             <a:r>
-              <a:rPr sz="1400">
-                <a:solidFill>
-                  <a:srgbClr val="B0B8C2"/>
-                </a:solidFill>
-                <a:latin typeface="Calibri"/>
-              </a:rPr>
-              <a:t>    ‣  cache Redis por hash MD5 do vídeo, fila assíncrona (asyncio.Queue), armazenamento de vídeos no MinIO</a:t>
+              <a:rPr sz="1800">
+                <a:solidFill>
+                  <a:srgbClr val="FFFFFF"/>
+                </a:solidFill>
+                <a:latin typeface="Calibri"/>
+              </a:rPr>
+              <a:t>•  Ajustes em exercise_analyzer.py, orientation_detector.py e tf_serving_client.py</a:t>
             </a:r>
           </a:p>
           <a:p>
@@ -10915,13 +9425,13 @@
               </a:spcAft>
             </a:pPr>
             <a:r>
-              <a:rPr sz="1600">
+              <a:rPr sz="1800">
                 <a:solidFill>
                   <a:srgbClr val="FFFFFF"/>
                 </a:solidFill>
                 <a:latin typeface="Calibri"/>
               </a:rPr>
-              <a:t>•  Guia visual de posicionamento de câmera no app</a:t>
+              <a:t>•  Foco: landmarks que funcionavam bem em dados sintéticos falhavam em imagens reais</a:t>
             </a:r>
           </a:p>
           <a:p>
@@ -10934,150 +9444,13 @@
               </a:spcAft>
             </a:pPr>
             <a:r>
-              <a:rPr sz="1600">
+              <a:rPr sz="1800">
                 <a:solidFill>
                   <a:srgbClr val="FFFFFF"/>
                 </a:solidFill>
                 <a:latin typeface="Calibri"/>
               </a:rPr>
-              <a:t>•  Gestão de alunos no dashboard (CRUD)</a:t>
-            </a:r>
-          </a:p>
-          <a:p>
-            <a:pPr>
-              <a:lnSpc>
-                <a:spcPct val="112000"/>
-              </a:lnSpc>
-              <a:spcAft>
-                <a:spcPts val="800"/>
-              </a:spcAft>
-            </a:pPr>
-            <a:r>
-              <a:rPr sz="1600">
-                <a:solidFill>
-                  <a:srgbClr val="FFFFFF"/>
-                </a:solidFill>
-                <a:latin typeface="Calibri"/>
-              </a:rPr>
-              <a:t>•  Gamificação completa: pontos, nível, streak, 12 conquistas, ranking da academia</a:t>
-            </a:r>
-          </a:p>
-        </p:txBody>
-      </p:sp>
-      <p:sp>
-        <p:nvSpPr>
-          <p:cNvPr id="9" name="TextBox 8"/>
-          <p:cNvSpPr txBox="1"/>
-          <p:nvPr/>
-        </p:nvSpPr>
-        <p:spPr>
-          <a:xfrm>
-            <a:off x="6217920" y="1463040"/>
-            <a:ext cx="5394960" cy="4572000"/>
-          </a:xfrm>
-          <a:prstGeom prst="rect">
-            <a:avLst/>
-          </a:prstGeom>
-          <a:noFill/>
-        </p:spPr>
-        <p:txBody>
-          <a:bodyPr wrap="square">
-            <a:spAutoFit/>
-          </a:bodyPr>
-          <a:lstStyle/>
-          <a:p>
-            <a:pPr>
-              <a:lnSpc>
-                <a:spcPct val="112000"/>
-              </a:lnSpc>
-              <a:spcAft>
-                <a:spcPts val="800"/>
-              </a:spcAft>
-            </a:pPr>
-            <a:r>
-              <a:rPr sz="1600">
-                <a:solidFill>
-                  <a:srgbClr val="FFFFFF"/>
-                </a:solidFill>
-                <a:latin typeface="Calibri"/>
-              </a:rPr>
-              <a:t>•  Modo offline no Android (ML Kit on-device + sincronização via WorkManager)</a:t>
-            </a:r>
-          </a:p>
-          <a:p>
-            <a:pPr>
-              <a:lnSpc>
-                <a:spcPct val="112000"/>
-              </a:lnSpc>
-              <a:spcAft>
-                <a:spcPts val="800"/>
-              </a:spcAft>
-            </a:pPr>
-            <a:r>
-              <a:rPr sz="1600">
-                <a:solidFill>
-                  <a:srgbClr val="FFFFFF"/>
-                </a:solidFill>
-                <a:latin typeface="Calibri"/>
-              </a:rPr>
-              <a:t>•  34 testes automatizados (pose-service)</a:t>
-            </a:r>
-          </a:p>
-          <a:p>
-            <a:pPr>
-              <a:lnSpc>
-                <a:spcPct val="112000"/>
-              </a:lnSpc>
-              <a:spcAft>
-                <a:spcPts val="800"/>
-              </a:spcAft>
-            </a:pPr>
-            <a:r>
-              <a:rPr sz="1600">
-                <a:solidFill>
-                  <a:srgbClr val="FFFFFF"/>
-                </a:solidFill>
-                <a:latin typeface="Calibri"/>
-              </a:rPr>
-              <a:t>•  Plano de treino integrado (professor cria, app monitora)</a:t>
-            </a:r>
-          </a:p>
-          <a:p>
-            <a:pPr>
-              <a:lnSpc>
-                <a:spcPct val="112000"/>
-              </a:lnSpc>
-              <a:spcAft>
-                <a:spcPts val="800"/>
-              </a:spcAft>
-            </a:pPr>
-            <a:r>
-              <a:rPr sz="1600">
-                <a:solidFill>
-                  <a:srgbClr val="FFFFFF"/>
-                </a:solidFill>
-                <a:latin typeface="Calibri"/>
-              </a:rPr>
-              <a:t>•  Multi-tenancy: isolamento completo por academia (tenant_id)</a:t>
-            </a:r>
-          </a:p>
-          <a:p>
-            <a:pPr>
-              <a:lnSpc>
-                <a:spcPct val="112000"/>
-              </a:lnSpc>
-              <a:spcAft>
-                <a:spcPts val="800"/>
-              </a:spcAft>
-            </a:pPr>
-            <a:r>
-              <a:rPr sz="1600">
-                <a:solidFill>
-                  <a:srgbClr val="FFFFFF"/>
-                </a:solidFill>
-                <a:latin typeface="Calibri"/>
-              </a:rPr>
-              <a:t>•  Relatório PDF mensal por aluno, enviado automaticamente por e-mail</a:t>
+              <a:t>•  Configuração de healthcheck e dependências do docker-compose.yml refinadas</a:t>
             </a:r>
           </a:p>
         </p:txBody>
@@ -11230,7 +9603,7 @@
                 </a:solidFill>
                 <a:latin typeface="Calibri"/>
               </a:rPr>
-              <a:t>SPRINT 1 · FUNDAÇÃO E SEGURANÇA</a:t>
+              <a:t>SPRINT 2 · REFATORAÇÃO</a:t>
             </a:r>
           </a:p>
         </p:txBody>
@@ -11269,7 +9642,7 @@
                 </a:solidFill>
                 <a:latin typeface="Calibri"/>
               </a:rPr>
-              <a:t>Estabilidade, compliance e qualidade</a:t>
+              <a:t>Android: de Activities/XML para Jetpack Compose</a:t>
             </a:r>
           </a:p>
         </p:txBody>
@@ -11360,7 +9733,7 @@
                   <a:srgbClr val="FFFFFF"/>
                 </a:solidFill>
               </a:rPr>
-              <a:t>18/06</a:t>
+              <a:t>09/06</a:t>
             </a:r>
           </a:p>
         </p:txBody>
@@ -11373,8 +9746,93 @@
         </p:nvSpPr>
         <p:spPr>
           <a:xfrm>
-            <a:off x="548640" y="1463040"/>
-            <a:ext cx="10789920" cy="2743200"/>
+            <a:off x="548640" y="1371600"/>
+            <a:ext cx="5120640" cy="365760"/>
+          </a:xfrm>
+          <a:prstGeom prst="rect">
+            <a:avLst/>
+          </a:prstGeom>
+          <a:noFill/>
+        </p:spPr>
+        <p:txBody>
+          <a:bodyPr wrap="square" anchor="t">
+            <a:spAutoFit/>
+          </a:bodyPr>
+          <a:lstStyle/>
+          <a:p>
+            <a:pPr algn="l">
+              <a:lnSpc>
+                <a:spcPct val="100000"/>
+              </a:lnSpc>
+            </a:pPr>
+            <a:r>
+              <a:rPr sz="1500" b="1" i="0">
+                <a:solidFill>
+                  <a:srgbClr val="B0B8C2"/>
+                </a:solidFill>
+                <a:latin typeface="Calibri"/>
+              </a:rPr>
+              <a:t>ANTES (Sprint 0)</a:t>
+            </a:r>
+          </a:p>
+        </p:txBody>
+      </p:sp>
+      <p:sp>
+        <p:nvSpPr>
+          <p:cNvPr id="9" name="Rounded Rectangle 8"/>
+          <p:cNvSpPr/>
+          <p:nvPr/>
+        </p:nvSpPr>
+        <p:spPr>
+          <a:xfrm>
+            <a:off x="548640" y="1783080"/>
+            <a:ext cx="5120640" cy="4206240"/>
+          </a:xfrm>
+          <a:prstGeom prst="roundRect">
+            <a:avLst/>
+          </a:prstGeom>
+          <a:solidFill>
+            <a:srgbClr val="20262E"/>
+          </a:solidFill>
+          <a:ln w="12700">
+            <a:solidFill>
+              <a:srgbClr val="4A525E"/>
+            </a:solidFill>
+          </a:ln>
+          <a:effectLst/>
+        </p:spPr>
+        <p:style>
+          <a:lnRef idx="1">
+            <a:schemeClr val="accent1"/>
+          </a:lnRef>
+          <a:fillRef idx="3">
+            <a:schemeClr val="accent1"/>
+          </a:fillRef>
+          <a:effectRef idx="2">
+            <a:schemeClr val="accent1"/>
+          </a:effectRef>
+          <a:fontRef idx="minor">
+            <a:schemeClr val="lt1"/>
+          </a:fontRef>
+        </p:style>
+        <p:txBody>
+          <a:bodyPr rtlCol="0" anchor="ctr"/>
+          <a:lstStyle/>
+          <a:p>
+            <a:pPr algn="ctr"/>
+          </a:p>
+        </p:txBody>
+      </p:sp>
+      <p:sp>
+        <p:nvSpPr>
+          <p:cNvPr id="10" name="TextBox 9"/>
+          <p:cNvSpPr txBox="1"/>
+          <p:nvPr/>
+        </p:nvSpPr>
+        <p:spPr>
+          <a:xfrm>
+            <a:off x="868680" y="1965960"/>
+            <a:ext cx="4572000" cy="3840480"/>
           </a:xfrm>
           <a:prstGeom prst="rect">
             <a:avLst/>
@@ -11396,13 +9854,13 @@
               </a:spcAft>
             </a:pPr>
             <a:r>
-              <a:rPr sz="1700">
-                <a:solidFill>
-                  <a:srgbClr val="FFFFFF"/>
-                </a:solidFill>
-                <a:latin typeface="Calibri"/>
-              </a:rPr>
-              <a:t>•  CI/CD inicial com GitHub Actions (testes, builds, geração de APK)</a:t>
+              <a:rPr sz="1500">
+                <a:solidFill>
+                  <a:srgbClr val="B0B8C2"/>
+                </a:solidFill>
+                <a:latin typeface="Calibri"/>
+              </a:rPr>
+              <a:t>•  Activities + Fragments</a:t>
             </a:r>
           </a:p>
           <a:p>
@@ -11415,13 +9873,13 @@
               </a:spcAft>
             </a:pPr>
             <a:r>
-              <a:rPr sz="1700">
-                <a:solidFill>
-                  <a:srgbClr val="FFFFFF"/>
-                </a:solidFill>
-                <a:latin typeface="Calibri"/>
-              </a:rPr>
-              <a:t>•  Backup automático: pg_dump + mongo export → MinIO, diário às 03:00 UTC, retenção de 30 dias</a:t>
+              <a:rPr sz="1500">
+                <a:solidFill>
+                  <a:srgbClr val="B0B8C2"/>
+                </a:solidFill>
+                <a:latin typeface="Calibri"/>
+              </a:rPr>
+              <a:t>•  Layouts XML</a:t>
             </a:r>
           </a:p>
           <a:p>
@@ -11434,13 +9892,13 @@
               </a:spcAft>
             </a:pPr>
             <a:r>
-              <a:rPr sz="1700">
-                <a:solidFill>
-                  <a:srgbClr val="FFFFFF"/>
-                </a:solidFill>
-                <a:latin typeface="Calibri"/>
-              </a:rPr>
-              <a:t>•  Refresh token rotation: token anterior é revogado a cada renovação (token roubado não pode ser reutilizado)</a:t>
+              <a:rPr sz="1500">
+                <a:solidFill>
+                  <a:srgbClr val="B0B8C2"/>
+                </a:solidFill>
+                <a:latin typeface="Calibri"/>
+              </a:rPr>
+              <a:t>•  Sem grafo de navegação</a:t>
             </a:r>
           </a:p>
           <a:p>
@@ -11453,27 +9911,46 @@
               </a:spcAft>
             </a:pPr>
             <a:r>
-              <a:rPr sz="1700">
-                <a:solidFill>
-                  <a:srgbClr val="FFFFFF"/>
-                </a:solidFill>
-                <a:latin typeface="Calibri"/>
-              </a:rPr>
-              <a:t>•  LGPD compliance: exportação e exclusão de dados do usuário, com tela dedicada no app</a:t>
-            </a:r>
-          </a:p>
-        </p:txBody>
-      </p:sp>
-      <p:sp>
-        <p:nvSpPr>
-          <p:cNvPr id="9" name="TextBox 8"/>
+              <a:rPr sz="1500">
+                <a:solidFill>
+                  <a:srgbClr val="B0B8C2"/>
+                </a:solidFill>
+                <a:latin typeface="Calibri"/>
+              </a:rPr>
+              <a:t>•  3 telas: Login, Sessões, Câmera</a:t>
+            </a:r>
+          </a:p>
+          <a:p>
+            <a:pPr>
+              <a:lnSpc>
+                <a:spcPct val="112000"/>
+              </a:lnSpc>
+              <a:spcAft>
+                <a:spcPts val="800"/>
+              </a:spcAft>
+            </a:pPr>
+            <a:r>
+              <a:rPr sz="1500">
+                <a:solidFill>
+                  <a:srgbClr val="B0B8C2"/>
+                </a:solidFill>
+                <a:latin typeface="Calibri"/>
+              </a:rPr>
+              <a:t>•  Sem tema centralizado</a:t>
+            </a:r>
+          </a:p>
+        </p:txBody>
+      </p:sp>
+      <p:sp>
+        <p:nvSpPr>
+          <p:cNvPr id="11" name="TextBox 10"/>
           <p:cNvSpPr txBox="1"/>
           <p:nvPr/>
         </p:nvSpPr>
         <p:spPr>
           <a:xfrm>
-            <a:off x="548640" y="4572000"/>
-            <a:ext cx="10789920" cy="365760"/>
+            <a:off x="6217920" y="1371600"/>
+            <a:ext cx="5120640" cy="365760"/>
           </a:xfrm>
           <a:prstGeom prst="rect">
             <a:avLst/>
@@ -11492,27 +9969,73 @@
               </a:lnSpc>
             </a:pPr>
             <a:r>
-              <a:rPr sz="1400" b="1" i="0">
-                <a:solidFill>
-                  <a:srgbClr val="F59E0B"/>
-                </a:solidFill>
-                <a:latin typeface="Calibri"/>
-              </a:rPr>
-              <a:t>ENTREGUE NO MESMO COMMIT (fora do escopo formal do Sprint 1):</a:t>
-            </a:r>
-          </a:p>
-        </p:txBody>
-      </p:sp>
-      <p:sp>
-        <p:nvSpPr>
-          <p:cNvPr id="10" name="TextBox 9"/>
+              <a:rPr sz="1500" b="1" i="0">
+                <a:solidFill>
+                  <a:srgbClr val="00D4AA"/>
+                </a:solidFill>
+                <a:latin typeface="Calibri"/>
+              </a:rPr>
+              <a:t>DEPOIS (Sprint 2)</a:t>
+            </a:r>
+          </a:p>
+        </p:txBody>
+      </p:sp>
+      <p:sp>
+        <p:nvSpPr>
+          <p:cNvPr id="12" name="Rounded Rectangle 11"/>
+          <p:cNvSpPr/>
+          <p:nvPr/>
+        </p:nvSpPr>
+        <p:spPr>
+          <a:xfrm>
+            <a:off x="6217920" y="1783080"/>
+            <a:ext cx="5120640" cy="4206240"/>
+          </a:xfrm>
+          <a:prstGeom prst="roundRect">
+            <a:avLst/>
+          </a:prstGeom>
+          <a:solidFill>
+            <a:srgbClr val="0F2E28"/>
+          </a:solidFill>
+          <a:ln w="19050">
+            <a:solidFill>
+              <a:srgbClr val="00D4AA"/>
+            </a:solidFill>
+          </a:ln>
+          <a:effectLst/>
+        </p:spPr>
+        <p:style>
+          <a:lnRef idx="1">
+            <a:schemeClr val="accent1"/>
+          </a:lnRef>
+          <a:fillRef idx="3">
+            <a:schemeClr val="accent1"/>
+          </a:fillRef>
+          <a:effectRef idx="2">
+            <a:schemeClr val="accent1"/>
+          </a:effectRef>
+          <a:fontRef idx="minor">
+            <a:schemeClr val="lt1"/>
+          </a:fontRef>
+        </p:style>
+        <p:txBody>
+          <a:bodyPr rtlCol="0" anchor="ctr"/>
+          <a:lstStyle/>
+          <a:p>
+            <a:pPr algn="ctr"/>
+          </a:p>
+        </p:txBody>
+      </p:sp>
+      <p:sp>
+        <p:nvSpPr>
+          <p:cNvPr id="13" name="TextBox 12"/>
           <p:cNvSpPr txBox="1"/>
           <p:nvPr/>
         </p:nvSpPr>
         <p:spPr>
           <a:xfrm>
-            <a:off x="548640" y="4983480"/>
-            <a:ext cx="10789920" cy="1463040"/>
+            <a:off x="6537960" y="1965960"/>
+            <a:ext cx="4572000" cy="3840480"/>
           </a:xfrm>
           <a:prstGeom prst="rect">
             <a:avLst/>
@@ -11540,7 +10063,7 @@
                 </a:solidFill>
                 <a:latin typeface="Calibri"/>
               </a:rPr>
-              <a:t>•  Redesign completo do app Android (Jetpack Compose + Material 3) e modo offline</a:t>
+              <a:t>•  100% Jetpack Compose + Material 3</a:t>
             </a:r>
           </a:p>
           <a:p>
@@ -11559,7 +10082,83 @@
                 </a:solidFill>
                 <a:latin typeface="Calibri"/>
               </a:rPr>
-              <a:t>•  Motor de exercícios migrado para IA — item do Sprint 3, antecipado (ver próximo slide)</a:t>
+              <a:t>•  AppNavHost + MainScreen + Routes (navegação unificada)</a:t>
+            </a:r>
+          </a:p>
+          <a:p>
+            <a:pPr>
+              <a:lnSpc>
+                <a:spcPct val="112000"/>
+              </a:lnSpc>
+              <a:spcAft>
+                <a:spcPts val="800"/>
+              </a:spcAft>
+            </a:pPr>
+            <a:r>
+              <a:rPr sz="1500">
+                <a:solidFill>
+                  <a:srgbClr val="FFFFFF"/>
+                </a:solidFill>
+                <a:latin typeface="Calibri"/>
+              </a:rPr>
+              <a:t>•  ViewModel dedicado por tela</a:t>
+            </a:r>
+          </a:p>
+          <a:p>
+            <a:pPr>
+              <a:lnSpc>
+                <a:spcPct val="112000"/>
+              </a:lnSpc>
+              <a:spcAft>
+                <a:spcPts val="800"/>
+              </a:spcAft>
+            </a:pPr>
+            <a:r>
+              <a:rPr sz="1500">
+                <a:solidFill>
+                  <a:srgbClr val="FFFFFF"/>
+                </a:solidFill>
+                <a:latin typeface="Calibri"/>
+              </a:rPr>
+              <a:t>•  6 telas: Login, Câmera (+PoseOverlay), Perfil, Progresso, Lista e Detalhe de Sessão</a:t>
+            </a:r>
+          </a:p>
+          <a:p>
+            <a:pPr>
+              <a:lnSpc>
+                <a:spcPct val="112000"/>
+              </a:lnSpc>
+              <a:spcAft>
+                <a:spcPts val="800"/>
+              </a:spcAft>
+            </a:pPr>
+            <a:r>
+              <a:rPr sz="1500">
+                <a:solidFill>
+                  <a:srgbClr val="FFFFFF"/>
+                </a:solidFill>
+                <a:latin typeface="Calibri"/>
+              </a:rPr>
+              <a:t>•  Tema centralizado (Color/Theme/Type.kt)</a:t>
+            </a:r>
+          </a:p>
+          <a:p>
+            <a:pPr>
+              <a:lnSpc>
+                <a:spcPct val="112000"/>
+              </a:lnSpc>
+              <a:spcAft>
+                <a:spcPts val="800"/>
+              </a:spcAft>
+            </a:pPr>
+            <a:r>
+              <a:rPr sz="1500">
+                <a:solidFill>
+                  <a:srgbClr val="FFFFFF"/>
+                </a:solidFill>
+                <a:latin typeface="Calibri"/>
+              </a:rPr>
+              <a:t>•  Modelo de pose atualizado (MoveNet Thunder) no backend</a:t>
             </a:r>
           </a:p>
         </p:txBody>
@@ -11649,7 +10248,7 @@
             <a:avLst/>
           </a:prstGeom>
           <a:solidFill>
-            <a:srgbClr val="F59E0B"/>
+            <a:srgbClr val="00D4AA"/>
           </a:solidFill>
           <a:ln>
             <a:noFill/>
@@ -11708,11 +10307,11 @@
             <a:r>
               <a:rPr sz="1400" b="1" i="0">
                 <a:solidFill>
-                  <a:srgbClr val="F59E0B"/>
-                </a:solidFill>
-                <a:latin typeface="Calibri"/>
-              </a:rPr>
-              <a:t>SPRINT 1 · EXPERIMENTO</a:t>
+                  <a:srgbClr val="00D4AA"/>
+                </a:solidFill>
+                <a:latin typeface="Calibri"/>
+              </a:rPr>
+              <a:t>SPRINT 3 · EXPANSÃO (1/2)</a:t>
             </a:r>
           </a:p>
         </p:txBody>
@@ -11751,7 +10350,7 @@
                 </a:solidFill>
                 <a:latin typeface="Calibri"/>
               </a:rPr>
-              <a:t>Por que antecipamos o item de IA (Sprint 3)?</a:t>
+              <a:t>Produto, segurança e infraestrutura</a:t>
             </a:r>
           </a:p>
         </p:txBody>
@@ -11797,14 +10396,105 @@
       </p:sp>
       <p:sp>
         <p:nvSpPr>
-          <p:cNvPr id="7" name="TextBox 6"/>
+          <p:cNvPr id="7" name="Rounded Rectangle 6"/>
+          <p:cNvSpPr/>
+          <p:nvPr/>
+        </p:nvSpPr>
+        <p:spPr>
+          <a:xfrm>
+            <a:off x="10088575" y="365760"/>
+            <a:ext cx="1645920" cy="411480"/>
+          </a:xfrm>
+          <a:prstGeom prst="roundRect">
+            <a:avLst/>
+          </a:prstGeom>
+          <a:solidFill>
+            <a:srgbClr val="008F73"/>
+          </a:solidFill>
+          <a:ln>
+            <a:noFill/>
+          </a:ln>
+          <a:effectLst/>
+        </p:spPr>
+        <p:style>
+          <a:lnRef idx="1">
+            <a:schemeClr val="accent1"/>
+          </a:lnRef>
+          <a:fillRef idx="3">
+            <a:schemeClr val="accent1"/>
+          </a:fillRef>
+          <a:effectRef idx="2">
+            <a:schemeClr val="accent1"/>
+          </a:effectRef>
+          <a:fontRef idx="minor">
+            <a:schemeClr val="lt1"/>
+          </a:fontRef>
+        </p:style>
+        <p:txBody>
+          <a:bodyPr rtlCol="0" anchor="ctr"/>
+          <a:lstStyle/>
+          <a:p>
+            <a:pPr algn="ctr"/>
+            <a:r>
+              <a:rPr sz="1300" b="1">
+                <a:solidFill>
+                  <a:srgbClr val="FFFFFF"/>
+                </a:solidFill>
+              </a:rPr>
+              <a:t>18/06</a:t>
+            </a:r>
+          </a:p>
+        </p:txBody>
+      </p:sp>
+      <p:sp>
+        <p:nvSpPr>
+          <p:cNvPr id="8" name="TextBox 7"/>
           <p:cNvSpPr txBox="1"/>
           <p:nvPr/>
         </p:nvSpPr>
         <p:spPr>
           <a:xfrm>
-            <a:off x="548640" y="1463040"/>
-            <a:ext cx="10789920" cy="4114800"/>
+            <a:off x="548640" y="1325880"/>
+            <a:ext cx="10789920" cy="365760"/>
+          </a:xfrm>
+          <a:prstGeom prst="rect">
+            <a:avLst/>
+          </a:prstGeom>
+          <a:noFill/>
+        </p:spPr>
+        <p:txBody>
+          <a:bodyPr wrap="square" anchor="t">
+            <a:spAutoFit/>
+          </a:bodyPr>
+          <a:lstStyle/>
+          <a:p>
+            <a:pPr algn="l">
+              <a:lnSpc>
+                <a:spcPct val="100000"/>
+              </a:lnSpc>
+            </a:pPr>
+            <a:r>
+              <a:rPr sz="1500" b="0" i="0">
+                <a:solidFill>
+                  <a:srgbClr val="B0B8C2"/>
+                </a:solidFill>
+                <a:latin typeface="Calibri"/>
+              </a:rPr>
+              <a:t>Maior commit do projeto — entregas em paralelo:</a:t>
+            </a:r>
+          </a:p>
+        </p:txBody>
+      </p:sp>
+      <p:sp>
+        <p:nvSpPr>
+          <p:cNvPr id="9" name="TextBox 8"/>
+          <p:cNvSpPr txBox="1"/>
+          <p:nvPr/>
+        </p:nvSpPr>
+        <p:spPr>
+          <a:xfrm>
+            <a:off x="548640" y="1783080"/>
+            <a:ext cx="5212080" cy="4297680"/>
           </a:xfrm>
           <a:prstGeom prst="rect">
             <a:avLst/>
@@ -11826,13 +10516,13 @@
               </a:spcAft>
             </a:pPr>
             <a:r>
-              <a:rPr sz="1700">
+              <a:rPr sz="1600">
                 <a:solidFill>
                   <a:srgbClr val="FFFFFF"/>
                 </a:solidFill>
                 <a:latin typeface="Calibri"/>
               </a:rPr>
-              <a:t>•  Hipótese: um modelo estatístico poderia generalizar melhor que regras fixas em filmagem real</a:t>
+              <a:t>•  CI/CD inicial (GitHub Actions)</a:t>
             </a:r>
           </a:p>
           <a:p>
@@ -11845,13 +10535,13 @@
               </a:spcAft>
             </a:pPr>
             <a:r>
-              <a:rPr sz="1700">
+              <a:rPr sz="1600">
                 <a:solidFill>
                   <a:srgbClr val="FFFFFF"/>
                 </a:solidFill>
                 <a:latin typeface="Calibri"/>
               </a:rPr>
-              <a:t>•  Sem dataset real anotado disponível → estratégia de bootstrap (weak supervision):</a:t>
+              <a:t>•  Backup automático (cron 03:00 UTC → MinIO)</a:t>
             </a:r>
           </a:p>
           <a:p>
@@ -11864,13 +10554,13 @@
               </a:spcAft>
             </a:pPr>
             <a:r>
-              <a:rPr sz="1500">
-                <a:solidFill>
-                  <a:srgbClr val="B0B8C2"/>
-                </a:solidFill>
-                <a:latin typeface="Calibri"/>
-              </a:rPr>
-              <a:t>    ‣  Landmarks sintéticos gerados por geometria inversa (ai/synthetic_body.py)</a:t>
+              <a:rPr sz="1600">
+                <a:solidFill>
+                  <a:srgbClr val="FFFFFF"/>
+                </a:solidFill>
+                <a:latin typeface="Calibri"/>
+              </a:rPr>
+              <a:t>•  Refresh token rotation</a:t>
             </a:r>
           </a:p>
           <a:p>
@@ -11883,13 +10573,13 @@
               </a:spcAft>
             </a:pPr>
             <a:r>
-              <a:rPr sz="1500">
-                <a:solidFill>
-                  <a:srgbClr val="B0B8C2"/>
-                </a:solidFill>
-                <a:latin typeface="Calibri"/>
-              </a:rPr>
-              <a:t>    ‣  Rótulos de erro/score vindos do próprio motor de regras, atuando como "professor"</a:t>
+              <a:rPr sz="1600">
+                <a:solidFill>
+                  <a:srgbClr val="FFFFFF"/>
+                </a:solidFill>
+                <a:latin typeface="Calibri"/>
+              </a:rPr>
+              <a:t>•  LGPD: exportação e exclusão de dados</a:t>
             </a:r>
           </a:p>
           <a:p>
@@ -11902,15 +10592,38 @@
               </a:spcAft>
             </a:pPr>
             <a:r>
-              <a:rPr sz="1700">
+              <a:rPr sz="1600">
                 <a:solidFill>
                   <a:srgbClr val="FFFFFF"/>
                 </a:solidFill>
                 <a:latin typeface="Calibri"/>
               </a:rPr>
-              <a:t>•  Validado contra vídeo real ("Bad squat form"): 48/48 testes passando, pipeline completo até o WebSocket do professor</a:t>
-            </a:r>
-          </a:p>
+              <a:t>•  Relatório PDF mensal por e-mail</a:t>
+            </a:r>
+          </a:p>
+        </p:txBody>
+      </p:sp>
+      <p:sp>
+        <p:nvSpPr>
+          <p:cNvPr id="10" name="TextBox 9"/>
+          <p:cNvSpPr txBox="1"/>
+          <p:nvPr/>
+        </p:nvSpPr>
+        <p:spPr>
+          <a:xfrm>
+            <a:off x="6035040" y="1783080"/>
+            <a:ext cx="5394960" cy="4297680"/>
+          </a:xfrm>
+          <a:prstGeom prst="rect">
+            <a:avLst/>
+          </a:prstGeom>
+          <a:noFill/>
+        </p:spPr>
+        <p:txBody>
+          <a:bodyPr wrap="square">
+            <a:spAutoFit/>
+          </a:bodyPr>
+          <a:lstStyle/>
           <a:p>
             <a:pPr>
               <a:lnSpc>
@@ -11921,13 +10634,89 @@
               </a:spcAft>
             </a:pPr>
             <a:r>
-              <a:rPr sz="1700">
+              <a:rPr sz="1600">
                 <a:solidFill>
                   <a:srgbClr val="FFFFFF"/>
                 </a:solidFill>
                 <a:latin typeface="Calibri"/>
               </a:rPr>
-              <a:t>•  No mesmo dia, 2 bugs reais encontrados e corrigidos: score zerado no bench press (pernas fora de quadro) e classify_frames() nunca conectado ao pipeline de vídeo</a:t>
+              <a:t>•  Modo offline (ML Kit on-device + WorkManager)</a:t>
+            </a:r>
+          </a:p>
+          <a:p>
+            <a:pPr>
+              <a:lnSpc>
+                <a:spcPct val="112000"/>
+              </a:lnSpc>
+              <a:spcAft>
+                <a:spcPts val="800"/>
+              </a:spcAft>
+            </a:pPr>
+            <a:r>
+              <a:rPr sz="1600">
+                <a:solidFill>
+                  <a:srgbClr val="FFFFFF"/>
+                </a:solidFill>
+                <a:latin typeface="Calibri"/>
+              </a:rPr>
+              <a:t>•  Gamificação: AchievementsScreen (pontos, nível, streak)</a:t>
+            </a:r>
+          </a:p>
+          <a:p>
+            <a:pPr>
+              <a:lnSpc>
+                <a:spcPct val="112000"/>
+              </a:lnSpc>
+              <a:spcAft>
+                <a:spcPts val="800"/>
+              </a:spcAft>
+            </a:pPr>
+            <a:r>
+              <a:rPr sz="1600">
+                <a:solidFill>
+                  <a:srgbClr val="FFFFFF"/>
+                </a:solidFill>
+                <a:latin typeface="Calibri"/>
+              </a:rPr>
+              <a:t>•  Planos de treino: WorkoutPlanScreen</a:t>
+            </a:r>
+          </a:p>
+          <a:p>
+            <a:pPr>
+              <a:lnSpc>
+                <a:spcPct val="112000"/>
+              </a:lnSpc>
+              <a:spcAft>
+                <a:spcPts val="800"/>
+              </a:spcAft>
+            </a:pPr>
+            <a:r>
+              <a:rPr sz="1600">
+                <a:solidFill>
+                  <a:srgbClr val="FFFFFF"/>
+                </a:solidFill>
+                <a:latin typeface="Calibri"/>
+              </a:rPr>
+              <a:t>•  Guia de câmera: CameraGuideScreen</a:t>
+            </a:r>
+          </a:p>
+          <a:p>
+            <a:pPr>
+              <a:lnSpc>
+                <a:spcPct val="112000"/>
+              </a:lnSpc>
+              <a:spcAft>
+                <a:spcPts val="800"/>
+              </a:spcAft>
+            </a:pPr>
+            <a:r>
+              <a:rPr sz="1400">
+                <a:solidFill>
+                  <a:srgbClr val="B0B8C2"/>
+                </a:solidFill>
+                <a:latin typeface="Calibri"/>
+              </a:rPr>
+              <a:t>    ‣  VideoTestScreen construído, mas SEM entrada na navegação</a:t>
             </a:r>
           </a:p>
         </p:txBody>
@@ -12080,7 +10869,7 @@
                 </a:solidFill>
                 <a:latin typeface="Calibri"/>
               </a:rPr>
-              <a:t>SPRINT 1 · HARDENING</a:t>
+              <a:t>SPRINT 3 · EXPANSÃO (2/2)</a:t>
             </a:r>
           </a:p>
         </p:txBody>
@@ -12119,7 +10908,7 @@
                 </a:solidFill>
                 <a:latin typeface="Calibri"/>
               </a:rPr>
-              <a:t>Restauração da feature "Testar Vídeo"</a:t>
+              <a:t>Motor de IA experimental no pose-service</a:t>
             </a:r>
           </a:p>
         </p:txBody>
@@ -12165,66 +10954,14 @@
       </p:sp>
       <p:sp>
         <p:nvSpPr>
-          <p:cNvPr id="7" name="Rounded Rectangle 6"/>
-          <p:cNvSpPr/>
-          <p:nvPr/>
-        </p:nvSpPr>
-        <p:spPr>
-          <a:xfrm>
-            <a:off x="10088575" y="365760"/>
-            <a:ext cx="1645920" cy="411480"/>
-          </a:xfrm>
-          <a:prstGeom prst="roundRect">
-            <a:avLst/>
-          </a:prstGeom>
-          <a:solidFill>
-            <a:srgbClr val="F59E0B"/>
-          </a:solidFill>
-          <a:ln>
-            <a:noFill/>
-          </a:ln>
-          <a:effectLst/>
-        </p:spPr>
-        <p:style>
-          <a:lnRef idx="1">
-            <a:schemeClr val="accent1"/>
-          </a:lnRef>
-          <a:fillRef idx="3">
-            <a:schemeClr val="accent1"/>
-          </a:fillRef>
-          <a:effectRef idx="2">
-            <a:schemeClr val="accent1"/>
-          </a:effectRef>
-          <a:fontRef idx="minor">
-            <a:schemeClr val="lt1"/>
-          </a:fontRef>
-        </p:style>
-        <p:txBody>
-          <a:bodyPr rtlCol="0" anchor="ctr"/>
-          <a:lstStyle/>
-          <a:p>
-            <a:pPr algn="ctr"/>
-            <a:r>
-              <a:rPr sz="1300" b="1">
-                <a:solidFill>
-                  <a:srgbClr val="FFFFFF"/>
-                </a:solidFill>
-              </a:rPr>
-              <a:t>23/06</a:t>
-            </a:r>
-          </a:p>
-        </p:txBody>
-      </p:sp>
-      <p:sp>
-        <p:nvSpPr>
-          <p:cNvPr id="8" name="TextBox 7"/>
+          <p:cNvPr id="7" name="TextBox 6"/>
           <p:cNvSpPr txBox="1"/>
           <p:nvPr/>
         </p:nvSpPr>
         <p:spPr>
           <a:xfrm>
             <a:off x="548640" y="1463040"/>
-            <a:ext cx="10789920" cy="4572000"/>
+            <a:ext cx="10789920" cy="4389120"/>
           </a:xfrm>
           <a:prstGeom prst="rect">
             <a:avLst/>
@@ -12246,13 +10983,13 @@
               </a:spcAft>
             </a:pPr>
             <a:r>
-              <a:rPr sz="1800">
+              <a:rPr sz="1700">
                 <a:solidFill>
                   <a:srgbClr val="FFFFFF"/>
                 </a:solidFill>
                 <a:latin typeface="Calibri"/>
               </a:rPr>
-              <a:t>•  Causa raiz: a tela e o ViewModel já existiam completos desde o Sprint 1, mas nunca foram</a:t>
+              <a:t>•  Motor de regras (exercise_analyzer.py) substituído por modelos de ML (RandomForest)</a:t>
             </a:r>
           </a:p>
           <a:p>
@@ -12265,13 +11002,13 @@
               </a:spcAft>
             </a:pPr>
             <a:r>
-              <a:rPr sz="1600">
-                <a:solidFill>
-                  <a:srgbClr val="B0B8C2"/>
-                </a:solidFill>
-                <a:latin typeface="Calibri"/>
-              </a:rPr>
-              <a:t>    ‣  adicionados à barra de navegação inferior — rota órfã, sem ponto de entrada na UI</a:t>
+              <a:rPr sz="1700">
+                <a:solidFill>
+                  <a:srgbClr val="FFFFFF"/>
+                </a:solidFill>
+                <a:latin typeface="Calibri"/>
+              </a:rPr>
+              <a:t>•  Sem dataset real anotado → estratégia de bootstrap (weak supervision):</a:t>
             </a:r>
           </a:p>
           <a:p>
@@ -12284,13 +11021,13 @@
               </a:spcAft>
             </a:pPr>
             <a:r>
-              <a:rPr sz="1800">
-                <a:solidFill>
-                  <a:srgbClr val="FFFFFF"/>
-                </a:solidFill>
-                <a:latin typeface="Calibri"/>
-              </a:rPr>
-              <a:t>•  Corrigido: item "Testar" adicionado à navegação</a:t>
+              <a:rPr sz="1500">
+                <a:solidFill>
+                  <a:srgbClr val="B0B8C2"/>
+                </a:solidFill>
+                <a:latin typeface="Calibri"/>
+              </a:rPr>
+              <a:t>    ‣  Landmarks sintéticos por geometria inversa (ai/synthetic_body.py)</a:t>
             </a:r>
           </a:p>
           <a:p>
@@ -12303,13 +11040,13 @@
               </a:spcAft>
             </a:pPr>
             <a:r>
-              <a:rPr sz="1800">
-                <a:solidFill>
-                  <a:srgbClr val="FFFFFF"/>
-                </a:solidFill>
-                <a:latin typeface="Calibri"/>
-              </a:rPr>
-              <a:t>•  8 vídeos reais de teste (squat, deadlift, lunge, bench press, bent-over row) embutidos como assets do APK</a:t>
+              <a:rPr sz="1500">
+                <a:solidFill>
+                  <a:srgbClr val="B0B8C2"/>
+                </a:solidFill>
+                <a:latin typeface="Calibri"/>
+              </a:rPr>
+              <a:t>    ‣  Rótulos vindos do próprio motor de regras, atuando como "professor"</a:t>
             </a:r>
           </a:p>
           <a:p>
@@ -12322,13 +11059,32 @@
               </a:spcAft>
             </a:pPr>
             <a:r>
-              <a:rPr sz="1800">
+              <a:rPr sz="1700">
                 <a:solidFill>
                   <a:srgbClr val="FFFFFF"/>
                 </a:solidFill>
                 <a:latin typeface="Calibri"/>
               </a:rPr>
-              <a:t>•  FileProvider configurado para gerar URIs de conteúdo seguras a partir dos vídeos de exemplo</a:t>
+              <a:t>•  Validado contra vídeo real ("Bad squat form"): 48/48 testes, pipeline completo até o WebSocket do professor</a:t>
+            </a:r>
+          </a:p>
+          <a:p>
+            <a:pPr>
+              <a:lnSpc>
+                <a:spcPct val="112000"/>
+              </a:lnSpc>
+              <a:spcAft>
+                <a:spcPts val="800"/>
+              </a:spcAft>
+            </a:pPr>
+            <a:r>
+              <a:rPr sz="1700">
+                <a:solidFill>
+                  <a:srgbClr val="FFFFFF"/>
+                </a:solidFill>
+                <a:latin typeface="Calibri"/>
+              </a:rPr>
+              <a:t>•  No mesmo dia: 2 bugs corrigidos (score zerado no bench press; classify_frames() nunca conectado ao pipeline de vídeo)</a:t>
             </a:r>
           </a:p>
         </p:txBody>
